--- a/presentation_v2.pptx
+++ b/presentation_v2.pptx
@@ -3367,7 +3367,7 @@
               </a:defRPr>
             </a:pPr>
             <a:r>
-              <a:t>Data</a:t>
+              <a:t>Warning</a:t>
             </a:r>
           </a:p>
         </p:txBody>
@@ -3403,7 +3403,330 @@
               </a:defRPr>
             </a:pPr>
             <a:r>
-              <a:t>Kaggle Car Insurance Claim</a:t>
+              <a:t>AI 驗證二原則</a:t>
+            </a:r>
+          </a:p>
+        </p:txBody>
+      </p:sp>
+      <p:sp>
+        <p:nvSpPr>
+          <p:cNvPr id="4" name="Rounded Rectangle 3"/>
+          <p:cNvSpPr/>
+          <p:nvPr/>
+        </p:nvSpPr>
+        <p:spPr>
+          <a:xfrm>
+            <a:off x="731520" y="1554480"/>
+            <a:ext cx="3169919" cy="1097280"/>
+          </a:xfrm>
+          <a:prstGeom prst="roundRect">
+            <a:avLst/>
+          </a:prstGeom>
+          <a:solidFill>
+            <a:srgbClr val="FFFFFF"/>
+          </a:solidFill>
+          <a:ln w="12700">
+            <a:solidFill>
+              <a:srgbClr val="E0E0E0"/>
+            </a:solidFill>
+          </a:ln>
+        </p:spPr>
+        <p:style>
+          <a:lnRef idx="1">
+            <a:schemeClr val="accent1"/>
+          </a:lnRef>
+          <a:fillRef idx="3">
+            <a:schemeClr val="accent1"/>
+          </a:fillRef>
+          <a:effectRef idx="2">
+            <a:schemeClr val="accent1"/>
+          </a:effectRef>
+          <a:fontRef idx="minor">
+            <a:schemeClr val="lt1"/>
+          </a:fontRef>
+        </p:style>
+        <p:txBody>
+          <a:bodyPr rtlCol="0" anchor="ctr" wrap="square" lIns="137160" tIns="91440"/>
+          <a:lstStyle/>
+          <a:p>
+            <a:pPr algn="ctr">
+              <a:defRPr sz="1100">
+                <a:solidFill>
+                  <a:srgbClr val="1A1A1A"/>
+                </a:solidFill>
+                <a:latin typeface="Noto Sans TC"/>
+              </a:defRPr>
+            </a:pPr>
+            <a:r>
+              <a:t>[01]</a:t>
+            </a:r>
+            <a:br/>
+            <a:r>
+              <a:t>AI 會犯錯</a:t>
+            </a:r>
+            <a:br/>
+            <a:r>
+              <a:t>程式碼可能有 bug，統計解讀可能講得很專業但數字是亂掰的 挑一個數字用計算機算、檢查軸標籤、回想統計原理</a:t>
+            </a:r>
+          </a:p>
+        </p:txBody>
+      </p:sp>
+      <p:sp>
+        <p:nvSpPr>
+          <p:cNvPr id="5" name="Rounded Rectangle 4"/>
+          <p:cNvSpPr/>
+          <p:nvPr/>
+        </p:nvSpPr>
+        <p:spPr>
+          <a:xfrm>
+            <a:off x="4084319" y="1554480"/>
+            <a:ext cx="3169919" cy="1097280"/>
+          </a:xfrm>
+          <a:prstGeom prst="roundRect">
+            <a:avLst/>
+          </a:prstGeom>
+          <a:solidFill>
+            <a:srgbClr val="FFFFFF"/>
+          </a:solidFill>
+          <a:ln w="12700">
+            <a:solidFill>
+              <a:srgbClr val="E0E0E0"/>
+            </a:solidFill>
+          </a:ln>
+        </p:spPr>
+        <p:style>
+          <a:lnRef idx="1">
+            <a:schemeClr val="accent1"/>
+          </a:lnRef>
+          <a:fillRef idx="3">
+            <a:schemeClr val="accent1"/>
+          </a:fillRef>
+          <a:effectRef idx="2">
+            <a:schemeClr val="accent1"/>
+          </a:effectRef>
+          <a:fontRef idx="minor">
+            <a:schemeClr val="lt1"/>
+          </a:fontRef>
+        </p:style>
+        <p:txBody>
+          <a:bodyPr rtlCol="0" anchor="ctr" wrap="square" lIns="137160" tIns="91440"/>
+          <a:lstStyle/>
+          <a:p>
+            <a:pPr algn="ctr">
+              <a:defRPr sz="1100">
+                <a:solidFill>
+                  <a:srgbClr val="1A1A1A"/>
+                </a:solidFill>
+                <a:latin typeface="Noto Sans TC"/>
+              </a:defRPr>
+            </a:pPr>
+            <a:r>
+              <a:t>[01]</a:t>
+            </a:r>
+            <a:br/>
+            <a:r>
+              <a:t>AI 會犯錯</a:t>
+            </a:r>
+            <a:br/>
+            <a:r>
+              <a:t>程式碼可能有 bug，統計解讀可能講得很專業但數字是亂掰的</a:t>
+            </a:r>
+          </a:p>
+        </p:txBody>
+      </p:sp>
+      <p:sp>
+        <p:nvSpPr>
+          <p:cNvPr id="6" name="Rounded Rectangle 5"/>
+          <p:cNvSpPr/>
+          <p:nvPr/>
+        </p:nvSpPr>
+        <p:spPr>
+          <a:xfrm>
+            <a:off x="7437118" y="1554480"/>
+            <a:ext cx="3169919" cy="1097280"/>
+          </a:xfrm>
+          <a:prstGeom prst="roundRect">
+            <a:avLst/>
+          </a:prstGeom>
+          <a:solidFill>
+            <a:srgbClr val="FFFFFF"/>
+          </a:solidFill>
+          <a:ln w="12700">
+            <a:solidFill>
+              <a:srgbClr val="E0E0E0"/>
+            </a:solidFill>
+          </a:ln>
+        </p:spPr>
+        <p:style>
+          <a:lnRef idx="1">
+            <a:schemeClr val="accent1"/>
+          </a:lnRef>
+          <a:fillRef idx="3">
+            <a:schemeClr val="accent1"/>
+          </a:fillRef>
+          <a:effectRef idx="2">
+            <a:schemeClr val="accent1"/>
+          </a:effectRef>
+          <a:fontRef idx="minor">
+            <a:schemeClr val="lt1"/>
+          </a:fontRef>
+        </p:style>
+        <p:txBody>
+          <a:bodyPr rtlCol="0" anchor="ctr" wrap="square" lIns="137160" tIns="91440"/>
+          <a:lstStyle/>
+          <a:p>
+            <a:pPr algn="ctr">
+              <a:defRPr sz="1100">
+                <a:solidFill>
+                  <a:srgbClr val="1A1A1A"/>
+                </a:solidFill>
+                <a:latin typeface="Noto Sans TC"/>
+              </a:defRPr>
+            </a:pPr>
+            <a:r>
+              <a:t>[02]</a:t>
+            </a:r>
+            <a:br/>
+            <a:r>
+              <a:t>怎麼驗證</a:t>
+            </a:r>
+            <a:br/>
+            <a:r>
+              <a:t>挑一個數字用計算機算、檢查軸標籤、回想統計原理</a:t>
+            </a:r>
+          </a:p>
+        </p:txBody>
+      </p:sp>
+      <p:sp>
+        <p:nvSpPr>
+          <p:cNvPr id="7" name="TextBox 6"/>
+          <p:cNvSpPr txBox="1"/>
+          <p:nvPr/>
+        </p:nvSpPr>
+        <p:spPr>
+          <a:xfrm>
+            <a:off x="10058400" y="6217920"/>
+            <a:ext cx="1828800" cy="365760"/>
+          </a:xfrm>
+          <a:prstGeom prst="rect">
+            <a:avLst/>
+          </a:prstGeom>
+          <a:noFill/>
+        </p:spPr>
+        <p:txBody>
+          <a:bodyPr wrap="square">
+            <a:spAutoFit/>
+          </a:bodyPr>
+          <a:lstStyle/>
+          <a:p>
+            <a:pPr algn="r">
+              <a:defRPr sz="900" b="0">
+                <a:solidFill>
+                  <a:srgbClr val="6B6B6B"/>
+                </a:solidFill>
+                <a:latin typeface="Noto Sans TC"/>
+              </a:defRPr>
+            </a:pPr>
+            <a:r>
+              <a:t>7 / 35</a:t>
+            </a:r>
+          </a:p>
+        </p:txBody>
+      </p:sp>
+    </p:spTree>
+  </p:cSld>
+  <p:clrMapOvr>
+    <a:masterClrMapping/>
+  </p:clrMapOvr>
+</p:sld>
+</file>
+
+<file path=ppt/slides/slide11.xml><?xml version="1.0" encoding="utf-8"?>
+<p:sld xmlns:a="http://schemas.openxmlformats.org/drawingml/2006/main" xmlns:p="http://schemas.openxmlformats.org/presentationml/2006/main" xmlns:r="http://schemas.openxmlformats.org/officeDocument/2006/relationships">
+  <p:cSld>
+    <p:bg>
+      <p:bgPr>
+        <a:solidFill>
+          <a:srgbClr val="FFFDF7"/>
+        </a:solidFill>
+        <a:effectLst/>
+      </p:bgPr>
+    </p:bg>
+    <p:spTree>
+      <p:nvGrpSpPr>
+        <p:cNvPr id="1" name=""/>
+        <p:cNvGrpSpPr/>
+        <p:nvPr/>
+      </p:nvGrpSpPr>
+      <p:grpSpPr/>
+      <p:sp>
+        <p:nvSpPr>
+          <p:cNvPr id="2" name="TextBox 1"/>
+          <p:cNvSpPr txBox="1"/>
+          <p:nvPr/>
+        </p:nvSpPr>
+        <p:spPr>
+          <a:xfrm>
+            <a:off x="731520" y="548640"/>
+            <a:ext cx="2743200" cy="320040"/>
+          </a:xfrm>
+          <a:prstGeom prst="rect">
+            <a:avLst/>
+          </a:prstGeom>
+          <a:noFill/>
+        </p:spPr>
+        <p:txBody>
+          <a:bodyPr wrap="square">
+            <a:spAutoFit/>
+          </a:bodyPr>
+          <a:lstStyle/>
+          <a:p>
+            <a:pPr algn="l">
+              <a:defRPr sz="1000" b="1">
+                <a:solidFill>
+                  <a:srgbClr val="D4480B"/>
+                </a:solidFill>
+                <a:latin typeface="Noto Sans TC"/>
+              </a:defRPr>
+            </a:pPr>
+            <a:r>
+              <a:t>Data</a:t>
+            </a:r>
+          </a:p>
+        </p:txBody>
+      </p:sp>
+      <p:sp>
+        <p:nvSpPr>
+          <p:cNvPr id="3" name="TextBox 2"/>
+          <p:cNvSpPr txBox="1"/>
+          <p:nvPr/>
+        </p:nvSpPr>
+        <p:spPr>
+          <a:xfrm>
+            <a:off x="731520" y="868680"/>
+            <a:ext cx="10515600" cy="640080"/>
+          </a:xfrm>
+          <a:prstGeom prst="rect">
+            <a:avLst/>
+          </a:prstGeom>
+          <a:noFill/>
+        </p:spPr>
+        <p:txBody>
+          <a:bodyPr wrap="square">
+            <a:spAutoFit/>
+          </a:bodyPr>
+          <a:lstStyle/>
+          <a:p>
+            <a:pPr algn="l">
+              <a:defRPr sz="2800" b="1">
+                <a:solidFill>
+                  <a:srgbClr val="1A1A1A"/>
+                </a:solidFill>
+                <a:latin typeface="Noto Sans TC"/>
+              </a:defRPr>
+            </a:pPr>
+            <a:r>
+              <a:t>10,000 個車主，你能找出誰會出險嗎？</a:t>
             </a:r>
           </a:p>
         </p:txBody>
@@ -3445,7 +3768,7 @@
                         </a:defRPr>
                       </a:pPr>
                       <a:r>
-                        <a:t>類別</a:t>
+                        <a:t>你知道什麼</a:t>
                       </a:r>
                     </a:p>
                   </a:txBody>
@@ -3469,7 +3792,7 @@
                         </a:defRPr>
                       </a:pPr>
                       <a:r>
-                        <a:t>欄位</a:t>
+                        <a:t>舉例</a:t>
                       </a:r>
                     </a:p>
                   </a:txBody>
@@ -3492,7 +3815,7 @@
                         </a:defRPr>
                       </a:pPr>
                       <a:r>
-                        <a:t>人口統計</a:t>
+                        <a:t>這個人是誰</a:t>
                       </a:r>
                     </a:p>
                   </a:txBody>
@@ -3509,7 +3832,7 @@
                         </a:defRPr>
                       </a:pPr>
                       <a:r>
-                        <a:t>AGE, GENDER, EDUCATION, INCOME</a:t>
+                        <a:t>年齡、性別、學歷、收入</a:t>
                       </a:r>
                     </a:p>
                   </a:txBody>
@@ -3528,7 +3851,7 @@
                         </a:defRPr>
                       </a:pPr>
                       <a:r>
-                        <a:t>駕駛背景</a:t>
+                        <a:t>他怎麼開車</a:t>
                       </a:r>
                     </a:p>
                   </a:txBody>
@@ -3545,7 +3868,7 @@
                         </a:defRPr>
                       </a:pPr>
                       <a:r>
-                        <a:t>DRIVING_EXPERIENCE, PAST_ACCIDENTS, SPEEDING_PENALTIES, DUIS</a:t>
+                        <a:t>駕齡、超速幾次、酒駕紀錄、過去事故</a:t>
                       </a:r>
                     </a:p>
                   </a:txBody>
@@ -3564,7 +3887,7 @@
                         </a:defRPr>
                       </a:pPr>
                       <a:r>
-                        <a:t>車輛屬性</a:t>
+                        <a:t>他的車</a:t>
                       </a:r>
                     </a:p>
                   </a:txBody>
@@ -3581,7 +3904,7 @@
                         </a:defRPr>
                       </a:pPr>
                       <a:r>
-                        <a:t>VEHICLE_OWNERSHIP, VEHICLE_YEAR, ANNUAL_MILEAGE</a:t>
+                        <a:t>自有或租賃、車齡、年行駛里程</a:t>
                       </a:r>
                     </a:p>
                   </a:txBody>
@@ -3600,7 +3923,7 @@
                         </a:defRPr>
                       </a:pPr>
                       <a:r>
-                        <a:t>預測目標</a:t>
+                        <a:t>你要猜的</a:t>
                       </a:r>
                     </a:p>
                   </a:txBody>
@@ -3617,7 +3940,7 @@
                         </a:defRPr>
                       </a:pPr>
                       <a:r>
-                        <a:t>OUTCOME（0: 未理賠，1: 有理賠）</a:t>
+                        <a:t>這個人會不會申請理賠？</a:t>
                       </a:r>
                     </a:p>
                   </a:txBody>
@@ -3660,439 +3983,6 @@
             </a:pPr>
             <a:r>
               <a:t>10 / 35</a:t>
-            </a:r>
-          </a:p>
-        </p:txBody>
-      </p:sp>
-    </p:spTree>
-  </p:cSld>
-  <p:clrMapOvr>
-    <a:masterClrMapping/>
-  </p:clrMapOvr>
-</p:sld>
-</file>
-
-<file path=ppt/slides/slide11.xml><?xml version="1.0" encoding="utf-8"?>
-<p:sld xmlns:a="http://schemas.openxmlformats.org/drawingml/2006/main" xmlns:p="http://schemas.openxmlformats.org/presentationml/2006/main" xmlns:r="http://schemas.openxmlformats.org/officeDocument/2006/relationships">
-  <p:cSld>
-    <p:bg>
-      <p:bgPr>
-        <a:solidFill>
-          <a:srgbClr val="FFFDF7"/>
-        </a:solidFill>
-        <a:effectLst/>
-      </p:bgPr>
-    </p:bg>
-    <p:spTree>
-      <p:nvGrpSpPr>
-        <p:cNvPr id="1" name=""/>
-        <p:cNvGrpSpPr/>
-        <p:nvPr/>
-      </p:nvGrpSpPr>
-      <p:grpSpPr/>
-      <p:sp>
-        <p:nvSpPr>
-          <p:cNvPr id="2" name="TextBox 1"/>
-          <p:cNvSpPr txBox="1"/>
-          <p:nvPr/>
-        </p:nvSpPr>
-        <p:spPr>
-          <a:xfrm>
-            <a:off x="731520" y="548640"/>
-            <a:ext cx="2743200" cy="320040"/>
-          </a:xfrm>
-          <a:prstGeom prst="rect">
-            <a:avLst/>
-          </a:prstGeom>
-          <a:noFill/>
-        </p:spPr>
-        <p:txBody>
-          <a:bodyPr wrap="square">
-            <a:spAutoFit/>
-          </a:bodyPr>
-          <a:lstStyle/>
-          <a:p>
-            <a:pPr algn="l">
-              <a:defRPr sz="1000" b="1">
-                <a:solidFill>
-                  <a:srgbClr val="D4480B"/>
-                </a:solidFill>
-                <a:latin typeface="Noto Sans TC"/>
-              </a:defRPr>
-            </a:pPr>
-            <a:r>
-              <a:t>Demo</a:t>
-            </a:r>
-          </a:p>
-        </p:txBody>
-      </p:sp>
-      <p:sp>
-        <p:nvSpPr>
-          <p:cNvPr id="3" name="TextBox 2"/>
-          <p:cNvSpPr txBox="1"/>
-          <p:nvPr/>
-        </p:nvSpPr>
-        <p:spPr>
-          <a:xfrm>
-            <a:off x="731520" y="868680"/>
-            <a:ext cx="10515600" cy="640080"/>
-          </a:xfrm>
-          <a:prstGeom prst="rect">
-            <a:avLst/>
-          </a:prstGeom>
-          <a:noFill/>
-        </p:spPr>
-        <p:txBody>
-          <a:bodyPr wrap="square">
-            <a:spAutoFit/>
-          </a:bodyPr>
-          <a:lstStyle/>
-          <a:p>
-            <a:pPr algn="l">
-              <a:defRPr sz="2800" b="1">
-                <a:solidFill>
-                  <a:srgbClr val="1A1A1A"/>
-                </a:solidFill>
-                <a:latin typeface="Noto Sans TC"/>
-              </a:defRPr>
-            </a:pPr>
-            <a:r>
-              <a:t>資料載入與清理</a:t>
-            </a:r>
-          </a:p>
-        </p:txBody>
-      </p:sp>
-      <p:sp>
-        <p:nvSpPr>
-          <p:cNvPr id="4" name="TextBox 3"/>
-          <p:cNvSpPr txBox="1"/>
-          <p:nvPr/>
-        </p:nvSpPr>
-        <p:spPr>
-          <a:xfrm>
-            <a:off x="731520" y="1554480"/>
-            <a:ext cx="10515600" cy="4572000"/>
-          </a:xfrm>
-          <a:prstGeom prst="rect">
-            <a:avLst/>
-          </a:prstGeom>
-          <a:noFill/>
-        </p:spPr>
-        <p:txBody>
-          <a:bodyPr wrap="square">
-            <a:spAutoFit/>
-          </a:bodyPr>
-          <a:lstStyle/>
-          <a:p>
-            <a:pPr>
-              <a:spcAft>
-                <a:spcPts val="600"/>
-              </a:spcAft>
-              <a:defRPr sz="1300">
-                <a:solidFill>
-                  <a:srgbClr val="6B6B6B"/>
-                </a:solidFill>
-                <a:latin typeface="Noto Sans TC"/>
-              </a:defRPr>
-            </a:pPr>
-            <a:r>
-              <a:t>• 載入 請讀取 Car_Insurance_Claim.csv，印出前 5 筆和 shape</a:t>
-            </a:r>
-          </a:p>
-          <a:p>
-            <a:pPr>
-              <a:spcAft>
-                <a:spcPts val="600"/>
-              </a:spcAft>
-              <a:defRPr sz="1300">
-                <a:solidFill>
-                  <a:srgbClr val="6B6B6B"/>
-                </a:solidFill>
-                <a:latin typeface="Noto Sans TC"/>
-              </a:defRPr>
-            </a:pPr>
-            <a:r>
-              <a:t>• 發現缺失 檢查哪些欄位有缺失值，列出缺失數量和百分比</a:t>
-            </a:r>
-          </a:p>
-          <a:p>
-            <a:pPr>
-              <a:spcAft>
-                <a:spcPts val="600"/>
-              </a:spcAft>
-              <a:defRPr sz="1300">
-                <a:solidFill>
-                  <a:srgbClr val="6B6B6B"/>
-                </a:solidFill>
-                <a:latin typeface="Noto Sans TC"/>
-              </a:defRPr>
-            </a:pPr>
-            <a:r>
-              <a:t>• 處理 （中位數比平均數穩健，不怕極端值） CREDIT_SCORE 用年齡層中位數填補，ANNUAL_MILEAGE 刪除缺失列</a:t>
-            </a:r>
-          </a:p>
-          <a:p>
-            <a:pPr>
-              <a:spcAft>
-                <a:spcPts val="600"/>
-              </a:spcAft>
-              <a:defRPr sz="1300">
-                <a:solidFill>
-                  <a:srgbClr val="6B6B6B"/>
-                </a:solidFill>
-                <a:latin typeface="Noto Sans TC"/>
-              </a:defRPr>
-            </a:pPr>
-            <a:r>
-              <a:t>• 驗證 再跑一次缺失值檢查，確認都是 0</a:t>
-            </a:r>
-          </a:p>
-        </p:txBody>
-      </p:sp>
-      <p:sp>
-        <p:nvSpPr>
-          <p:cNvPr id="5" name="Rounded Rectangle 4"/>
-          <p:cNvSpPr/>
-          <p:nvPr/>
-        </p:nvSpPr>
-        <p:spPr>
-          <a:xfrm>
-            <a:off x="731520" y="1554480"/>
-            <a:ext cx="10515600" cy="457200"/>
-          </a:xfrm>
-          <a:prstGeom prst="roundRect">
-            <a:avLst/>
-          </a:prstGeom>
-          <a:solidFill>
-            <a:srgbClr val="F0F0F0"/>
-          </a:solidFill>
-          <a:ln>
-            <a:noFill/>
-          </a:ln>
-        </p:spPr>
-        <p:style>
-          <a:lnRef idx="1">
-            <a:schemeClr val="accent1"/>
-          </a:lnRef>
-          <a:fillRef idx="3">
-            <a:schemeClr val="accent1"/>
-          </a:fillRef>
-          <a:effectRef idx="2">
-            <a:schemeClr val="accent1"/>
-          </a:effectRef>
-          <a:fontRef idx="minor">
-            <a:schemeClr val="lt1"/>
-          </a:fontRef>
-        </p:style>
-        <p:txBody>
-          <a:bodyPr rtlCol="0" anchor="ctr" wrap="square" lIns="137160"/>
-          <a:lstStyle/>
-          <a:p>
-            <a:pPr algn="ctr">
-              <a:defRPr sz="1000">
-                <a:solidFill>
-                  <a:srgbClr val="1A1A1A"/>
-                </a:solidFill>
-                <a:latin typeface="Consolas"/>
-              </a:defRPr>
-            </a:pPr>
-            <a:r>
-              <a:t>請讀取 Car_Insurance_Claim.csv，印出前 5 筆和 shape</a:t>
-            </a:r>
-          </a:p>
-        </p:txBody>
-      </p:sp>
-      <p:sp>
-        <p:nvSpPr>
-          <p:cNvPr id="6" name="Rounded Rectangle 5"/>
-          <p:cNvSpPr/>
-          <p:nvPr/>
-        </p:nvSpPr>
-        <p:spPr>
-          <a:xfrm>
-            <a:off x="731520" y="2057400"/>
-            <a:ext cx="10515600" cy="457200"/>
-          </a:xfrm>
-          <a:prstGeom prst="roundRect">
-            <a:avLst/>
-          </a:prstGeom>
-          <a:solidFill>
-            <a:srgbClr val="F0F0F0"/>
-          </a:solidFill>
-          <a:ln>
-            <a:noFill/>
-          </a:ln>
-        </p:spPr>
-        <p:style>
-          <a:lnRef idx="1">
-            <a:schemeClr val="accent1"/>
-          </a:lnRef>
-          <a:fillRef idx="3">
-            <a:schemeClr val="accent1"/>
-          </a:fillRef>
-          <a:effectRef idx="2">
-            <a:schemeClr val="accent1"/>
-          </a:effectRef>
-          <a:fontRef idx="minor">
-            <a:schemeClr val="lt1"/>
-          </a:fontRef>
-        </p:style>
-        <p:txBody>
-          <a:bodyPr rtlCol="0" anchor="ctr" wrap="square" lIns="137160"/>
-          <a:lstStyle/>
-          <a:p>
-            <a:pPr algn="ctr">
-              <a:defRPr sz="1000">
-                <a:solidFill>
-                  <a:srgbClr val="1A1A1A"/>
-                </a:solidFill>
-                <a:latin typeface="Consolas"/>
-              </a:defRPr>
-            </a:pPr>
-            <a:r>
-              <a:t>檢查哪些欄位有缺失值，列出缺失數量和百分比</a:t>
-            </a:r>
-          </a:p>
-        </p:txBody>
-      </p:sp>
-      <p:sp>
-        <p:nvSpPr>
-          <p:cNvPr id="7" name="Rounded Rectangle 6"/>
-          <p:cNvSpPr/>
-          <p:nvPr/>
-        </p:nvSpPr>
-        <p:spPr>
-          <a:xfrm>
-            <a:off x="731520" y="2560320"/>
-            <a:ext cx="10515600" cy="457200"/>
-          </a:xfrm>
-          <a:prstGeom prst="roundRect">
-            <a:avLst/>
-          </a:prstGeom>
-          <a:solidFill>
-            <a:srgbClr val="F0F0F0"/>
-          </a:solidFill>
-          <a:ln>
-            <a:noFill/>
-          </a:ln>
-        </p:spPr>
-        <p:style>
-          <a:lnRef idx="1">
-            <a:schemeClr val="accent1"/>
-          </a:lnRef>
-          <a:fillRef idx="3">
-            <a:schemeClr val="accent1"/>
-          </a:fillRef>
-          <a:effectRef idx="2">
-            <a:schemeClr val="accent1"/>
-          </a:effectRef>
-          <a:fontRef idx="minor">
-            <a:schemeClr val="lt1"/>
-          </a:fontRef>
-        </p:style>
-        <p:txBody>
-          <a:bodyPr rtlCol="0" anchor="ctr" wrap="square" lIns="137160"/>
-          <a:lstStyle/>
-          <a:p>
-            <a:pPr algn="ctr">
-              <a:defRPr sz="1000">
-                <a:solidFill>
-                  <a:srgbClr val="1A1A1A"/>
-                </a:solidFill>
-                <a:latin typeface="Consolas"/>
-              </a:defRPr>
-            </a:pPr>
-            <a:r>
-              <a:t>CREDIT_SCORE 用年齡層中位數填補，ANNUAL_MILEAGE 刪除缺失列</a:t>
-            </a:r>
-          </a:p>
-        </p:txBody>
-      </p:sp>
-      <p:sp>
-        <p:nvSpPr>
-          <p:cNvPr id="8" name="Rounded Rectangle 7"/>
-          <p:cNvSpPr/>
-          <p:nvPr/>
-        </p:nvSpPr>
-        <p:spPr>
-          <a:xfrm>
-            <a:off x="731520" y="3063240"/>
-            <a:ext cx="10515600" cy="457200"/>
-          </a:xfrm>
-          <a:prstGeom prst="roundRect">
-            <a:avLst/>
-          </a:prstGeom>
-          <a:solidFill>
-            <a:srgbClr val="F0F0F0"/>
-          </a:solidFill>
-          <a:ln>
-            <a:noFill/>
-          </a:ln>
-        </p:spPr>
-        <p:style>
-          <a:lnRef idx="1">
-            <a:schemeClr val="accent1"/>
-          </a:lnRef>
-          <a:fillRef idx="3">
-            <a:schemeClr val="accent1"/>
-          </a:fillRef>
-          <a:effectRef idx="2">
-            <a:schemeClr val="accent1"/>
-          </a:effectRef>
-          <a:fontRef idx="minor">
-            <a:schemeClr val="lt1"/>
-          </a:fontRef>
-        </p:style>
-        <p:txBody>
-          <a:bodyPr rtlCol="0" anchor="ctr" wrap="square" lIns="137160"/>
-          <a:lstStyle/>
-          <a:p>
-            <a:pPr algn="ctr">
-              <a:defRPr sz="1000">
-                <a:solidFill>
-                  <a:srgbClr val="1A1A1A"/>
-                </a:solidFill>
-                <a:latin typeface="Consolas"/>
-              </a:defRPr>
-            </a:pPr>
-            <a:r>
-              <a:t>再跑一次缺失值檢查，確認都是 0</a:t>
-            </a:r>
-          </a:p>
-        </p:txBody>
-      </p:sp>
-      <p:sp>
-        <p:nvSpPr>
-          <p:cNvPr id="9" name="TextBox 8"/>
-          <p:cNvSpPr txBox="1"/>
-          <p:nvPr/>
-        </p:nvSpPr>
-        <p:spPr>
-          <a:xfrm>
-            <a:off x="10058400" y="6217920"/>
-            <a:ext cx="1828800" cy="365760"/>
-          </a:xfrm>
-          <a:prstGeom prst="rect">
-            <a:avLst/>
-          </a:prstGeom>
-          <a:noFill/>
-        </p:spPr>
-        <p:txBody>
-          <a:bodyPr wrap="square">
-            <a:spAutoFit/>
-          </a:bodyPr>
-          <a:lstStyle/>
-          <a:p>
-            <a:pPr algn="r">
-              <a:defRPr sz="900" b="0">
-                <a:solidFill>
-                  <a:srgbClr val="6B6B6B"/>
-                </a:solidFill>
-                <a:latin typeface="Noto Sans TC"/>
-              </a:defRPr>
-            </a:pPr>
-            <a:r>
-              <a:t>11 / 35</a:t>
             </a:r>
           </a:p>
         </p:txBody>
@@ -4190,32 +4080,117 @@
               </a:defRPr>
             </a:pPr>
             <a:r>
-              <a:t>視覺化探索四連發</a:t>
-            </a:r>
-          </a:p>
-        </p:txBody>
-      </p:sp>
-      <p:sp>
-        <p:nvSpPr>
-          <p:cNvPr id="4" name="Rounded Rectangle 3"/>
+              <a:t>資料載入與清理</a:t>
+            </a:r>
+          </a:p>
+        </p:txBody>
+      </p:sp>
+      <p:sp>
+        <p:nvSpPr>
+          <p:cNvPr id="4" name="TextBox 3"/>
+          <p:cNvSpPr txBox="1"/>
+          <p:nvPr/>
+        </p:nvSpPr>
+        <p:spPr>
+          <a:xfrm>
+            <a:off x="731520" y="1554480"/>
+            <a:ext cx="10515600" cy="4572000"/>
+          </a:xfrm>
+          <a:prstGeom prst="rect">
+            <a:avLst/>
+          </a:prstGeom>
+          <a:noFill/>
+        </p:spPr>
+        <p:txBody>
+          <a:bodyPr wrap="square">
+            <a:spAutoFit/>
+          </a:bodyPr>
+          <a:lstStyle/>
+          <a:p>
+            <a:pPr>
+              <a:spcAft>
+                <a:spcPts val="600"/>
+              </a:spcAft>
+              <a:defRPr sz="1300">
+                <a:solidFill>
+                  <a:srgbClr val="6B6B6B"/>
+                </a:solidFill>
+                <a:latin typeface="Noto Sans TC"/>
+              </a:defRPr>
+            </a:pPr>
+            <a:r>
+              <a:t>• 載入 請讀取 Car_Insurance_Claim.csv，印出前 5 筆和 shape → 先看資料長什麼樣，別盲做</a:t>
+            </a:r>
+          </a:p>
+          <a:p>
+            <a:pPr>
+              <a:spcAft>
+                <a:spcPts val="600"/>
+              </a:spcAft>
+              <a:defRPr sz="1300">
+                <a:solidFill>
+                  <a:srgbClr val="6B6B6B"/>
+                </a:solidFill>
+                <a:latin typeface="Noto Sans TC"/>
+              </a:defRPr>
+            </a:pPr>
+            <a:r>
+              <a:t>• 發現缺失 檢查哪些欄位有缺失值，列出缺失數量和百分比 → EDA 陷阱 #2：忽略缺失值</a:t>
+            </a:r>
+          </a:p>
+          <a:p>
+            <a:pPr>
+              <a:spcAft>
+                <a:spcPts val="600"/>
+              </a:spcAft>
+              <a:defRPr sz="1300">
+                <a:solidFill>
+                  <a:srgbClr val="6B6B6B"/>
+                </a:solidFill>
+                <a:latin typeface="Noto Sans TC"/>
+              </a:defRPr>
+            </a:pPr>
+            <a:r>
+              <a:t>• 處理 （中位數比平均數穩健，不怕極端值） CREDIT_SCORE 用年齡層中位數填補，ANNUAL_MILEAGE 刪除缺失列 → 中位數不怕極端值；里程缺太少，刪比猜更誠實</a:t>
+            </a:r>
+          </a:p>
+          <a:p>
+            <a:pPr>
+              <a:spcAft>
+                <a:spcPts val="600"/>
+              </a:spcAft>
+              <a:defRPr sz="1300">
+                <a:solidFill>
+                  <a:srgbClr val="6B6B6B"/>
+                </a:solidFill>
+                <a:latin typeface="Noto Sans TC"/>
+              </a:defRPr>
+            </a:pPr>
+            <a:r>
+              <a:t>• 驗證 再跑一次缺失值檢查，確認都是 0 → 永遠要 double check</a:t>
+            </a:r>
+          </a:p>
+        </p:txBody>
+      </p:sp>
+      <p:sp>
+        <p:nvSpPr>
+          <p:cNvPr id="5" name="Rounded Rectangle 4"/>
           <p:cNvSpPr/>
           <p:nvPr/>
         </p:nvSpPr>
         <p:spPr>
           <a:xfrm>
             <a:off x="731520" y="1554480"/>
-            <a:ext cx="3169919" cy="1097280"/>
+            <a:ext cx="10515600" cy="457200"/>
           </a:xfrm>
           <a:prstGeom prst="roundRect">
             <a:avLst/>
           </a:prstGeom>
           <a:solidFill>
-            <a:srgbClr val="FFFFFF"/>
+            <a:srgbClr val="F0F0F0"/>
           </a:solidFill>
-          <a:ln w="12700">
-            <a:solidFill>
-              <a:srgbClr val="E0E0E0"/>
-            </a:solidFill>
+          <a:ln>
+            <a:noFill/>
           </a:ln>
         </p:spPr>
         <p:style>
@@ -4233,44 +4208,42 @@
           </a:fontRef>
         </p:style>
         <p:txBody>
-          <a:bodyPr rtlCol="0" anchor="ctr" wrap="square" lIns="137160" tIns="91440"/>
+          <a:bodyPr rtlCol="0" anchor="ctr" wrap="square" lIns="137160"/>
           <a:lstStyle/>
           <a:p>
             <a:pPr algn="ctr">
-              <a:defRPr sz="1100">
+              <a:defRPr sz="1000">
                 <a:solidFill>
                   <a:srgbClr val="1A1A1A"/>
                 </a:solidFill>
-                <a:latin typeface="Noto Sans TC"/>
-              </a:defRPr>
-            </a:pPr>
-            <a:r>
-              <a:t>1. 描述統計表</a:t>
-            </a:r>
-          </a:p>
-        </p:txBody>
-      </p:sp>
-      <p:sp>
-        <p:nvSpPr>
-          <p:cNvPr id="5" name="Rounded Rectangle 4"/>
+                <a:latin typeface="Consolas"/>
+              </a:defRPr>
+            </a:pPr>
+            <a:r>
+              <a:t>請讀取 Car_Insurance_Claim.csv，印出前 5 筆和 shape</a:t>
+            </a:r>
+          </a:p>
+        </p:txBody>
+      </p:sp>
+      <p:sp>
+        <p:nvSpPr>
+          <p:cNvPr id="6" name="Rounded Rectangle 5"/>
           <p:cNvSpPr/>
           <p:nvPr/>
         </p:nvSpPr>
         <p:spPr>
           <a:xfrm>
-            <a:off x="4084319" y="1554480"/>
-            <a:ext cx="3169919" cy="1097280"/>
+            <a:off x="731520" y="2057400"/>
+            <a:ext cx="10515600" cy="457200"/>
           </a:xfrm>
           <a:prstGeom prst="roundRect">
             <a:avLst/>
           </a:prstGeom>
           <a:solidFill>
-            <a:srgbClr val="FFFFFF"/>
+            <a:srgbClr val="F0F0F0"/>
           </a:solidFill>
-          <a:ln w="12700">
-            <a:solidFill>
-              <a:srgbClr val="E0E0E0"/>
-            </a:solidFill>
+          <a:ln>
+            <a:noFill/>
           </a:ln>
         </p:spPr>
         <p:style>
@@ -4288,44 +4261,42 @@
           </a:fontRef>
         </p:style>
         <p:txBody>
-          <a:bodyPr rtlCol="0" anchor="ctr" wrap="square" lIns="137160" tIns="91440"/>
+          <a:bodyPr rtlCol="0" anchor="ctr" wrap="square" lIns="137160"/>
           <a:lstStyle/>
           <a:p>
             <a:pPr algn="ctr">
-              <a:defRPr sz="1100">
+              <a:defRPr sz="1000">
                 <a:solidFill>
                   <a:srgbClr val="1A1A1A"/>
                 </a:solidFill>
-                <a:latin typeface="Noto Sans TC"/>
-              </a:defRPr>
-            </a:pPr>
-            <a:r>
-              <a:t>2. 風險輪廓長條圖</a:t>
-            </a:r>
-          </a:p>
-        </p:txBody>
-      </p:sp>
-      <p:sp>
-        <p:nvSpPr>
-          <p:cNvPr id="6" name="Rounded Rectangle 5"/>
+                <a:latin typeface="Consolas"/>
+              </a:defRPr>
+            </a:pPr>
+            <a:r>
+              <a:t>檢查哪些欄位有缺失值，列出缺失數量和百分比</a:t>
+            </a:r>
+          </a:p>
+        </p:txBody>
+      </p:sp>
+      <p:sp>
+        <p:nvSpPr>
+          <p:cNvPr id="7" name="Rounded Rectangle 6"/>
           <p:cNvSpPr/>
           <p:nvPr/>
         </p:nvSpPr>
         <p:spPr>
           <a:xfrm>
-            <a:off x="7437118" y="1554480"/>
-            <a:ext cx="3169919" cy="1097280"/>
+            <a:off x="731520" y="2560320"/>
+            <a:ext cx="10515600" cy="457200"/>
           </a:xfrm>
           <a:prstGeom prst="roundRect">
             <a:avLst/>
           </a:prstGeom>
           <a:solidFill>
-            <a:srgbClr val="FFFFFF"/>
+            <a:srgbClr val="F0F0F0"/>
           </a:solidFill>
-          <a:ln w="12700">
-            <a:solidFill>
-              <a:srgbClr val="E0E0E0"/>
-            </a:solidFill>
+          <a:ln>
+            <a:noFill/>
           </a:ln>
         </p:spPr>
         <p:style>
@@ -4343,44 +4314,42 @@
           </a:fontRef>
         </p:style>
         <p:txBody>
-          <a:bodyPr rtlCol="0" anchor="ctr" wrap="square" lIns="137160" tIns="91440"/>
+          <a:bodyPr rtlCol="0" anchor="ctr" wrap="square" lIns="137160"/>
           <a:lstStyle/>
           <a:p>
             <a:pPr algn="ctr">
-              <a:defRPr sz="1100">
+              <a:defRPr sz="1000">
                 <a:solidFill>
                   <a:srgbClr val="1A1A1A"/>
                 </a:solidFill>
-                <a:latin typeface="Noto Sans TC"/>
-              </a:defRPr>
-            </a:pPr>
-            <a:r>
-              <a:t>3. 箱形圖</a:t>
-            </a:r>
-          </a:p>
-        </p:txBody>
-      </p:sp>
-      <p:sp>
-        <p:nvSpPr>
-          <p:cNvPr id="7" name="Rounded Rectangle 6"/>
+                <a:latin typeface="Consolas"/>
+              </a:defRPr>
+            </a:pPr>
+            <a:r>
+              <a:t>CREDIT_SCORE 用年齡層中位數填補，ANNUAL_MILEAGE 刪除缺失列</a:t>
+            </a:r>
+          </a:p>
+        </p:txBody>
+      </p:sp>
+      <p:sp>
+        <p:nvSpPr>
+          <p:cNvPr id="8" name="Rounded Rectangle 7"/>
           <p:cNvSpPr/>
           <p:nvPr/>
         </p:nvSpPr>
         <p:spPr>
           <a:xfrm>
-            <a:off x="731520" y="2788920"/>
-            <a:ext cx="3169919" cy="1097280"/>
+            <a:off x="731520" y="3063240"/>
+            <a:ext cx="10515600" cy="457200"/>
           </a:xfrm>
           <a:prstGeom prst="roundRect">
             <a:avLst/>
           </a:prstGeom>
           <a:solidFill>
-            <a:srgbClr val="FFFFFF"/>
+            <a:srgbClr val="F0F0F0"/>
           </a:solidFill>
-          <a:ln w="12700">
-            <a:solidFill>
-              <a:srgbClr val="E0E0E0"/>
-            </a:solidFill>
+          <a:ln>
+            <a:noFill/>
           </a:ln>
         </p:spPr>
         <p:style>
@@ -4398,26 +4367,26 @@
           </a:fontRef>
         </p:style>
         <p:txBody>
-          <a:bodyPr rtlCol="0" anchor="ctr" wrap="square" lIns="137160" tIns="91440"/>
+          <a:bodyPr rtlCol="0" anchor="ctr" wrap="square" lIns="137160"/>
           <a:lstStyle/>
           <a:p>
             <a:pPr algn="ctr">
-              <a:defRPr sz="1100">
+              <a:defRPr sz="1000">
                 <a:solidFill>
                   <a:srgbClr val="1A1A1A"/>
                 </a:solidFill>
-                <a:latin typeface="Noto Sans TC"/>
-              </a:defRPr>
-            </a:pPr>
-            <a:r>
-              <a:t>4. 相關性熱力圖</a:t>
-            </a:r>
-          </a:p>
-        </p:txBody>
-      </p:sp>
-      <p:sp>
-        <p:nvSpPr>
-          <p:cNvPr id="8" name="TextBox 7"/>
+                <a:latin typeface="Consolas"/>
+              </a:defRPr>
+            </a:pPr>
+            <a:r>
+              <a:t>再跑一次缺失值檢查，確認都是 0</a:t>
+            </a:r>
+          </a:p>
+        </p:txBody>
+      </p:sp>
+      <p:sp>
+        <p:nvSpPr>
+          <p:cNvPr id="9" name="TextBox 8"/>
           <p:cNvSpPr txBox="1"/>
           <p:nvPr/>
         </p:nvSpPr>
@@ -4446,7 +4415,7 @@
               </a:defRPr>
             </a:pPr>
             <a:r>
-              <a:t>12 / 35</a:t>
+              <a:t>11 / 35</a:t>
             </a:r>
           </a:p>
         </p:txBody>
@@ -4508,7 +4477,7 @@
               </a:defRPr>
             </a:pPr>
             <a:r>
-              <a:t>Insight</a:t>
+              <a:t>Demo</a:t>
             </a:r>
           </a:p>
         </p:txBody>
@@ -4544,7 +4513,7 @@
               </a:defRPr>
             </a:pPr>
             <a:r>
-              <a:t>交叉分組才有洞察</a:t>
+              <a:t>視覺化探索四連發</a:t>
             </a:r>
           </a:p>
         </p:txBody>
@@ -4558,13 +4527,13 @@
         <p:spPr>
           <a:xfrm>
             <a:off x="731520" y="1554480"/>
-            <a:ext cx="9875520" cy="1097280"/>
+            <a:ext cx="3169919" cy="1097280"/>
           </a:xfrm>
           <a:prstGeom prst="roundRect">
             <a:avLst/>
           </a:prstGeom>
           <a:solidFill>
-            <a:srgbClr val="FFF0E8"/>
+            <a:srgbClr val="FFFFFF"/>
           </a:solidFill>
           <a:ln w="12700">
             <a:solidFill>
@@ -4599,18 +4568,179 @@
               </a:defRPr>
             </a:pPr>
             <a:r>
-              <a:t>商業問題</a:t>
-            </a:r>
-            <a:br/>
-            <a:r>
-              <a:t>年輕人開新車，理賠率最高？ 特徵的「組合」比單一變數更有洞察力</a:t>
-            </a:r>
-          </a:p>
-        </p:txBody>
-      </p:sp>
-      <p:sp>
-        <p:nvSpPr>
-          <p:cNvPr id="5" name="TextBox 4"/>
+              <a:t>1. 資料的基本面貌長怎樣？</a:t>
+            </a:r>
+          </a:p>
+        </p:txBody>
+      </p:sp>
+      <p:sp>
+        <p:nvSpPr>
+          <p:cNvPr id="5" name="Rounded Rectangle 4"/>
+          <p:cNvSpPr/>
+          <p:nvPr/>
+        </p:nvSpPr>
+        <p:spPr>
+          <a:xfrm>
+            <a:off x="4084319" y="1554480"/>
+            <a:ext cx="3169919" cy="1097280"/>
+          </a:xfrm>
+          <a:prstGeom prst="roundRect">
+            <a:avLst/>
+          </a:prstGeom>
+          <a:solidFill>
+            <a:srgbClr val="FFFFFF"/>
+          </a:solidFill>
+          <a:ln w="12700">
+            <a:solidFill>
+              <a:srgbClr val="E0E0E0"/>
+            </a:solidFill>
+          </a:ln>
+        </p:spPr>
+        <p:style>
+          <a:lnRef idx="1">
+            <a:schemeClr val="accent1"/>
+          </a:lnRef>
+          <a:fillRef idx="3">
+            <a:schemeClr val="accent1"/>
+          </a:fillRef>
+          <a:effectRef idx="2">
+            <a:schemeClr val="accent1"/>
+          </a:effectRef>
+          <a:fontRef idx="minor">
+            <a:schemeClr val="lt1"/>
+          </a:fontRef>
+        </p:style>
+        <p:txBody>
+          <a:bodyPr rtlCol="0" anchor="ctr" wrap="square" lIns="137160" tIns="91440"/>
+          <a:lstStyle/>
+          <a:p>
+            <a:pPr algn="ctr">
+              <a:defRPr sz="1100">
+                <a:solidFill>
+                  <a:srgbClr val="1A1A1A"/>
+                </a:solidFill>
+                <a:latin typeface="Noto Sans TC"/>
+              </a:defRPr>
+            </a:pPr>
+            <a:r>
+              <a:t>2. 年輕人比較容易出險，還是老司機？</a:t>
+            </a:r>
+          </a:p>
+        </p:txBody>
+      </p:sp>
+      <p:sp>
+        <p:nvSpPr>
+          <p:cNvPr id="6" name="Rounded Rectangle 5"/>
+          <p:cNvSpPr/>
+          <p:nvPr/>
+        </p:nvSpPr>
+        <p:spPr>
+          <a:xfrm>
+            <a:off x="7437118" y="1554480"/>
+            <a:ext cx="3169919" cy="1097280"/>
+          </a:xfrm>
+          <a:prstGeom prst="roundRect">
+            <a:avLst/>
+          </a:prstGeom>
+          <a:solidFill>
+            <a:srgbClr val="FFFFFF"/>
+          </a:solidFill>
+          <a:ln w="12700">
+            <a:solidFill>
+              <a:srgbClr val="E0E0E0"/>
+            </a:solidFill>
+          </a:ln>
+        </p:spPr>
+        <p:style>
+          <a:lnRef idx="1">
+            <a:schemeClr val="accent1"/>
+          </a:lnRef>
+          <a:fillRef idx="3">
+            <a:schemeClr val="accent1"/>
+          </a:fillRef>
+          <a:effectRef idx="2">
+            <a:schemeClr val="accent1"/>
+          </a:effectRef>
+          <a:fontRef idx="minor">
+            <a:schemeClr val="lt1"/>
+          </a:fontRef>
+        </p:style>
+        <p:txBody>
+          <a:bodyPr rtlCol="0" anchor="ctr" wrap="square" lIns="137160" tIns="91440"/>
+          <a:lstStyle/>
+          <a:p>
+            <a:pPr algn="ctr">
+              <a:defRPr sz="1100">
+                <a:solidFill>
+                  <a:srgbClr val="1A1A1A"/>
+                </a:solidFill>
+                <a:latin typeface="Noto Sans TC"/>
+              </a:defRPr>
+            </a:pPr>
+            <a:r>
+              <a:t>3. 新手和老手的開車習慣差多少？</a:t>
+            </a:r>
+          </a:p>
+        </p:txBody>
+      </p:sp>
+      <p:sp>
+        <p:nvSpPr>
+          <p:cNvPr id="7" name="Rounded Rectangle 6"/>
+          <p:cNvSpPr/>
+          <p:nvPr/>
+        </p:nvSpPr>
+        <p:spPr>
+          <a:xfrm>
+            <a:off x="731520" y="2788920"/>
+            <a:ext cx="3169919" cy="1097280"/>
+          </a:xfrm>
+          <a:prstGeom prst="roundRect">
+            <a:avLst/>
+          </a:prstGeom>
+          <a:solidFill>
+            <a:srgbClr val="FFFFFF"/>
+          </a:solidFill>
+          <a:ln w="12700">
+            <a:solidFill>
+              <a:srgbClr val="E0E0E0"/>
+            </a:solidFill>
+          </a:ln>
+        </p:spPr>
+        <p:style>
+          <a:lnRef idx="1">
+            <a:schemeClr val="accent1"/>
+          </a:lnRef>
+          <a:fillRef idx="3">
+            <a:schemeClr val="accent1"/>
+          </a:fillRef>
+          <a:effectRef idx="2">
+            <a:schemeClr val="accent1"/>
+          </a:effectRef>
+          <a:fontRef idx="minor">
+            <a:schemeClr val="lt1"/>
+          </a:fontRef>
+        </p:style>
+        <p:txBody>
+          <a:bodyPr rtlCol="0" anchor="ctr" wrap="square" lIns="137160" tIns="91440"/>
+          <a:lstStyle/>
+          <a:p>
+            <a:pPr algn="ctr">
+              <a:defRPr sz="1100">
+                <a:solidFill>
+                  <a:srgbClr val="1A1A1A"/>
+                </a:solidFill>
+                <a:latin typeface="Noto Sans TC"/>
+              </a:defRPr>
+            </a:pPr>
+            <a:r>
+              <a:t>4. 哪些變數跟理賠最相關？</a:t>
+            </a:r>
+          </a:p>
+        </p:txBody>
+      </p:sp>
+      <p:sp>
+        <p:nvSpPr>
+          <p:cNvPr id="8" name="TextBox 7"/>
           <p:cNvSpPr txBox="1"/>
           <p:nvPr/>
         </p:nvSpPr>
@@ -4639,7 +4769,7 @@
               </a:defRPr>
             </a:pPr>
             <a:r>
-              <a:t>13 / 35</a:t>
+              <a:t>12 / 35</a:t>
             </a:r>
           </a:p>
         </p:txBody>
@@ -4653,6 +4783,199 @@
 </file>
 
 <file path=ppt/slides/slide14.xml><?xml version="1.0" encoding="utf-8"?>
+<p:sld xmlns:a="http://schemas.openxmlformats.org/drawingml/2006/main" xmlns:p="http://schemas.openxmlformats.org/presentationml/2006/main" xmlns:r="http://schemas.openxmlformats.org/officeDocument/2006/relationships">
+  <p:cSld>
+    <p:bg>
+      <p:bgPr>
+        <a:solidFill>
+          <a:srgbClr val="FFFDF7"/>
+        </a:solidFill>
+        <a:effectLst/>
+      </p:bgPr>
+    </p:bg>
+    <p:spTree>
+      <p:nvGrpSpPr>
+        <p:cNvPr id="1" name=""/>
+        <p:cNvGrpSpPr/>
+        <p:nvPr/>
+      </p:nvGrpSpPr>
+      <p:grpSpPr/>
+      <p:sp>
+        <p:nvSpPr>
+          <p:cNvPr id="2" name="TextBox 1"/>
+          <p:cNvSpPr txBox="1"/>
+          <p:nvPr/>
+        </p:nvSpPr>
+        <p:spPr>
+          <a:xfrm>
+            <a:off x="731520" y="548640"/>
+            <a:ext cx="2743200" cy="320040"/>
+          </a:xfrm>
+          <a:prstGeom prst="rect">
+            <a:avLst/>
+          </a:prstGeom>
+          <a:noFill/>
+        </p:spPr>
+        <p:txBody>
+          <a:bodyPr wrap="square">
+            <a:spAutoFit/>
+          </a:bodyPr>
+          <a:lstStyle/>
+          <a:p>
+            <a:pPr algn="l">
+              <a:defRPr sz="1000" b="1">
+                <a:solidFill>
+                  <a:srgbClr val="D4480B"/>
+                </a:solidFill>
+                <a:latin typeface="Noto Sans TC"/>
+              </a:defRPr>
+            </a:pPr>
+            <a:r>
+              <a:t>Insight</a:t>
+            </a:r>
+          </a:p>
+        </p:txBody>
+      </p:sp>
+      <p:sp>
+        <p:nvSpPr>
+          <p:cNvPr id="3" name="TextBox 2"/>
+          <p:cNvSpPr txBox="1"/>
+          <p:nvPr/>
+        </p:nvSpPr>
+        <p:spPr>
+          <a:xfrm>
+            <a:off x="731520" y="868680"/>
+            <a:ext cx="10515600" cy="640080"/>
+          </a:xfrm>
+          <a:prstGeom prst="rect">
+            <a:avLst/>
+          </a:prstGeom>
+          <a:noFill/>
+        </p:spPr>
+        <p:txBody>
+          <a:bodyPr wrap="square">
+            <a:spAutoFit/>
+          </a:bodyPr>
+          <a:lstStyle/>
+          <a:p>
+            <a:pPr algn="l">
+              <a:defRPr sz="2800" b="1">
+                <a:solidFill>
+                  <a:srgbClr val="1A1A1A"/>
+                </a:solidFill>
+                <a:latin typeface="Noto Sans TC"/>
+              </a:defRPr>
+            </a:pPr>
+            <a:r>
+              <a:t>交叉分組才有洞察</a:t>
+            </a:r>
+          </a:p>
+        </p:txBody>
+      </p:sp>
+      <p:sp>
+        <p:nvSpPr>
+          <p:cNvPr id="4" name="Rounded Rectangle 3"/>
+          <p:cNvSpPr/>
+          <p:nvPr/>
+        </p:nvSpPr>
+        <p:spPr>
+          <a:xfrm>
+            <a:off x="731520" y="1554480"/>
+            <a:ext cx="9875520" cy="1097280"/>
+          </a:xfrm>
+          <a:prstGeom prst="roundRect">
+            <a:avLst/>
+          </a:prstGeom>
+          <a:solidFill>
+            <a:srgbClr val="FFF0E8"/>
+          </a:solidFill>
+          <a:ln w="12700">
+            <a:solidFill>
+              <a:srgbClr val="E0E0E0"/>
+            </a:solidFill>
+          </a:ln>
+        </p:spPr>
+        <p:style>
+          <a:lnRef idx="1">
+            <a:schemeClr val="accent1"/>
+          </a:lnRef>
+          <a:fillRef idx="3">
+            <a:schemeClr val="accent1"/>
+          </a:fillRef>
+          <a:effectRef idx="2">
+            <a:schemeClr val="accent1"/>
+          </a:effectRef>
+          <a:fontRef idx="minor">
+            <a:schemeClr val="lt1"/>
+          </a:fontRef>
+        </p:style>
+        <p:txBody>
+          <a:bodyPr rtlCol="0" anchor="ctr" wrap="square" lIns="137160" tIns="91440"/>
+          <a:lstStyle/>
+          <a:p>
+            <a:pPr algn="ctr">
+              <a:defRPr sz="1100">
+                <a:solidFill>
+                  <a:srgbClr val="1A1A1A"/>
+                </a:solidFill>
+                <a:latin typeface="Noto Sans TC"/>
+              </a:defRPr>
+            </a:pPr>
+            <a:r>
+              <a:t>商業問題</a:t>
+            </a:r>
+            <a:br/>
+            <a:r>
+              <a:t>年輕人開新車，理賠率最高？ 特徵的「組合」比單一變數更有洞察力</a:t>
+            </a:r>
+          </a:p>
+        </p:txBody>
+      </p:sp>
+      <p:sp>
+        <p:nvSpPr>
+          <p:cNvPr id="5" name="TextBox 4"/>
+          <p:cNvSpPr txBox="1"/>
+          <p:nvPr/>
+        </p:nvSpPr>
+        <p:spPr>
+          <a:xfrm>
+            <a:off x="10058400" y="6217920"/>
+            <a:ext cx="1828800" cy="365760"/>
+          </a:xfrm>
+          <a:prstGeom prst="rect">
+            <a:avLst/>
+          </a:prstGeom>
+          <a:noFill/>
+        </p:spPr>
+        <p:txBody>
+          <a:bodyPr wrap="square">
+            <a:spAutoFit/>
+          </a:bodyPr>
+          <a:lstStyle/>
+          <a:p>
+            <a:pPr algn="r">
+              <a:defRPr sz="900" b="0">
+                <a:solidFill>
+                  <a:srgbClr val="6B6B6B"/>
+                </a:solidFill>
+                <a:latin typeface="Noto Sans TC"/>
+              </a:defRPr>
+            </a:pPr>
+            <a:r>
+              <a:t>13 / 35</a:t>
+            </a:r>
+          </a:p>
+        </p:txBody>
+      </p:sp>
+    </p:spTree>
+  </p:cSld>
+  <p:clrMapOvr>
+    <a:masterClrMapping/>
+  </p:clrMapOvr>
+</p:sld>
+</file>
+
+<file path=ppt/slides/slide15.xml><?xml version="1.0" encoding="utf-8"?>
 <p:sld xmlns:a="http://schemas.openxmlformats.org/drawingml/2006/main" xmlns:p="http://schemas.openxmlformats.org/presentationml/2006/main" xmlns:r="http://schemas.openxmlformats.org/officeDocument/2006/relationships">
   <p:cSld>
     <p:bg>
@@ -4810,239 +5133,6 @@
             </a:pPr>
             <a:r>
               <a:t>14 / 35</a:t>
-            </a:r>
-          </a:p>
-        </p:txBody>
-      </p:sp>
-    </p:spTree>
-  </p:cSld>
-  <p:clrMapOvr>
-    <a:masterClrMapping/>
-  </p:clrMapOvr>
-</p:sld>
-</file>
-
-<file path=ppt/slides/slide15.xml><?xml version="1.0" encoding="utf-8"?>
-<p:sld xmlns:a="http://schemas.openxmlformats.org/drawingml/2006/main" xmlns:p="http://schemas.openxmlformats.org/presentationml/2006/main" xmlns:r="http://schemas.openxmlformats.org/officeDocument/2006/relationships">
-  <p:cSld>
-    <p:bg>
-      <p:bgPr>
-        <a:solidFill>
-          <a:srgbClr val="FFFDF7"/>
-        </a:solidFill>
-        <a:effectLst/>
-      </p:bgPr>
-    </p:bg>
-    <p:spTree>
-      <p:nvGrpSpPr>
-        <p:cNvPr id="1" name=""/>
-        <p:cNvGrpSpPr/>
-        <p:nvPr/>
-      </p:nvGrpSpPr>
-      <p:grpSpPr/>
-      <p:sp>
-        <p:nvSpPr>
-          <p:cNvPr id="2" name="TextBox 1"/>
-          <p:cNvSpPr txBox="1"/>
-          <p:nvPr/>
-        </p:nvSpPr>
-        <p:spPr>
-          <a:xfrm>
-            <a:off x="731520" y="548640"/>
-            <a:ext cx="2743200" cy="320040"/>
-          </a:xfrm>
-          <a:prstGeom prst="rect">
-            <a:avLst/>
-          </a:prstGeom>
-          <a:noFill/>
-        </p:spPr>
-        <p:txBody>
-          <a:bodyPr wrap="square">
-            <a:spAutoFit/>
-          </a:bodyPr>
-          <a:lstStyle/>
-          <a:p>
-            <a:pPr algn="l">
-              <a:defRPr sz="1000" b="1">
-                <a:solidFill>
-                  <a:srgbClr val="D4480B"/>
-                </a:solidFill>
-                <a:latin typeface="Noto Sans TC"/>
-              </a:defRPr>
-            </a:pPr>
-            <a:r>
-              <a:t>Principle</a:t>
-            </a:r>
-          </a:p>
-        </p:txBody>
-      </p:sp>
-      <p:sp>
-        <p:nvSpPr>
-          <p:cNvPr id="3" name="TextBox 2"/>
-          <p:cNvSpPr txBox="1"/>
-          <p:nvPr/>
-        </p:nvSpPr>
-        <p:spPr>
-          <a:xfrm>
-            <a:off x="731520" y="868680"/>
-            <a:ext cx="10515600" cy="640080"/>
-          </a:xfrm>
-          <a:prstGeom prst="rect">
-            <a:avLst/>
-          </a:prstGeom>
-          <a:noFill/>
-        </p:spPr>
-        <p:txBody>
-          <a:bodyPr wrap="square">
-            <a:spAutoFit/>
-          </a:bodyPr>
-          <a:lstStyle/>
-          <a:p>
-            <a:pPr algn="l">
-              <a:defRPr sz="2800" b="1">
-                <a:solidFill>
-                  <a:srgbClr val="1A1A1A"/>
-                </a:solidFill>
-                <a:latin typeface="Noto Sans TC"/>
-              </a:defRPr>
-            </a:pPr>
-            <a:r>
-              <a:t>Benchmark 思維</a:t>
-            </a:r>
-          </a:p>
-        </p:txBody>
-      </p:sp>
-      <p:sp>
-        <p:nvSpPr>
-          <p:cNvPr id="4" name="Rounded Rectangle 3"/>
-          <p:cNvSpPr/>
-          <p:nvPr/>
-        </p:nvSpPr>
-        <p:spPr>
-          <a:xfrm>
-            <a:off x="731520" y="1554480"/>
-            <a:ext cx="9875520" cy="1097280"/>
-          </a:xfrm>
-          <a:prstGeom prst="roundRect">
-            <a:avLst/>
-          </a:prstGeom>
-          <a:solidFill>
-            <a:srgbClr val="FFFFFF"/>
-          </a:solidFill>
-          <a:ln w="12700">
-            <a:solidFill>
-              <a:srgbClr val="E0E0E0"/>
-            </a:solidFill>
-          </a:ln>
-        </p:spPr>
-        <p:style>
-          <a:lnRef idx="1">
-            <a:schemeClr val="accent1"/>
-          </a:lnRef>
-          <a:fillRef idx="3">
-            <a:schemeClr val="accent1"/>
-          </a:fillRef>
-          <a:effectRef idx="2">
-            <a:schemeClr val="accent1"/>
-          </a:effectRef>
-          <a:fontRef idx="minor">
-            <a:schemeClr val="lt1"/>
-          </a:fontRef>
-        </p:style>
-        <p:txBody>
-          <a:bodyPr rtlCol="0" anchor="ctr" wrap="square" lIns="137160" tIns="91440"/>
-          <a:lstStyle/>
-          <a:p>
-            <a:pPr algn="ctr">
-              <a:defRPr sz="1100">
-                <a:solidFill>
-                  <a:srgbClr val="1A1A1A"/>
-                </a:solidFill>
-                <a:latin typeface="Noto Sans TC"/>
-              </a:defRPr>
-            </a:pPr>
-            <a:r>
-              <a:t>[Baseline Model]</a:t>
-            </a:r>
-            <a:br/>
-            <a:r>
-              <a:t>Logistic Regression</a:t>
-            </a:r>
-            <a:br/>
-            <a:r>
-              <a:t>分類界的白飯 — 不花俏，但 穩定、能解釋、大家都懂 。 後面的模型如果只進步 2%，可能不值得用更複雜的方法</a:t>
-            </a:r>
-          </a:p>
-        </p:txBody>
-      </p:sp>
-      <p:sp>
-        <p:nvSpPr>
-          <p:cNvPr id="5" name="TextBox 4"/>
-          <p:cNvSpPr txBox="1"/>
-          <p:nvPr/>
-        </p:nvSpPr>
-        <p:spPr>
-          <a:xfrm>
-            <a:off x="731520" y="2880360"/>
-            <a:ext cx="10515600" cy="457200"/>
-          </a:xfrm>
-          <a:prstGeom prst="rect">
-            <a:avLst/>
-          </a:prstGeom>
-          <a:noFill/>
-        </p:spPr>
-        <p:txBody>
-          <a:bodyPr wrap="square">
-            <a:spAutoFit/>
-          </a:bodyPr>
-          <a:lstStyle/>
-          <a:p>
-            <a:pPr algn="l">
-              <a:defRPr sz="1300" b="0">
-                <a:solidFill>
-                  <a:srgbClr val="D4480B"/>
-                </a:solidFill>
-                <a:latin typeface="Noto Sans TC"/>
-              </a:defRPr>
-            </a:pPr>
-            <a:r>
-              <a:t>「先煮好白飯，再挑戰炒飯」</a:t>
-            </a:r>
-          </a:p>
-        </p:txBody>
-      </p:sp>
-      <p:sp>
-        <p:nvSpPr>
-          <p:cNvPr id="6" name="TextBox 5"/>
-          <p:cNvSpPr txBox="1"/>
-          <p:nvPr/>
-        </p:nvSpPr>
-        <p:spPr>
-          <a:xfrm>
-            <a:off x="10058400" y="6217920"/>
-            <a:ext cx="1828800" cy="365760"/>
-          </a:xfrm>
-          <a:prstGeom prst="rect">
-            <a:avLst/>
-          </a:prstGeom>
-          <a:noFill/>
-        </p:spPr>
-        <p:txBody>
-          <a:bodyPr wrap="square">
-            <a:spAutoFit/>
-          </a:bodyPr>
-          <a:lstStyle/>
-          <a:p>
-            <a:pPr algn="r">
-              <a:defRPr sz="900" b="0">
-                <a:solidFill>
-                  <a:srgbClr val="6B6B6B"/>
-                </a:solidFill>
-                <a:latin typeface="Noto Sans TC"/>
-              </a:defRPr>
-            </a:pPr>
-            <a:r>
-              <a:t>15 / 35</a:t>
             </a:r>
           </a:p>
         </p:txBody>
@@ -5104,7 +5194,7 @@
               </a:defRPr>
             </a:pPr>
             <a:r>
-              <a:t>Demo</a:t>
+              <a:t>Principle</a:t>
             </a:r>
           </a:p>
         </p:txBody>
@@ -5140,7 +5230,7 @@
               </a:defRPr>
             </a:pPr>
             <a:r>
-              <a:t>帶做 Logistic Regression</a:t>
+              <a:t>Benchmark 思維</a:t>
             </a:r>
           </a:p>
         </p:txBody>
@@ -5154,16 +5244,18 @@
         <p:spPr>
           <a:xfrm>
             <a:off x="731520" y="1554480"/>
-            <a:ext cx="10515600" cy="457200"/>
+            <a:ext cx="9875520" cy="1097280"/>
           </a:xfrm>
           <a:prstGeom prst="roundRect">
             <a:avLst/>
           </a:prstGeom>
           <a:solidFill>
-            <a:srgbClr val="F0F0F0"/>
+            <a:srgbClr val="FFFFFF"/>
           </a:solidFill>
-          <a:ln>
-            <a:noFill/>
+          <a:ln w="12700">
+            <a:solidFill>
+              <a:srgbClr val="E0E0E0"/>
+            </a:solidFill>
           </a:ln>
         </p:spPr>
         <p:style>
@@ -5181,86 +5273,41 @@
           </a:fontRef>
         </p:style>
         <p:txBody>
-          <a:bodyPr rtlCol="0" anchor="ctr" wrap="square" lIns="137160"/>
+          <a:bodyPr rtlCol="0" anchor="ctr" wrap="square" lIns="137160" tIns="91440"/>
           <a:lstStyle/>
           <a:p>
             <a:pPr algn="ctr">
-              <a:defRPr sz="1000">
+              <a:defRPr sz="1100">
                 <a:solidFill>
                   <a:srgbClr val="1A1A1A"/>
                 </a:solidFill>
-                <a:latin typeface="Consolas"/>
-              </a:defRPr>
-            </a:pPr>
-            <a:r>
-              <a:t>請將資料做 train/test split（80/20, random_state=42）， 類別欄位做 one-hot encoding，數值欄位做 StandardScaler</a:t>
-            </a:r>
-          </a:p>
-        </p:txBody>
-      </p:sp>
-      <p:sp>
-        <p:nvSpPr>
-          <p:cNvPr id="5" name="Rounded Rectangle 4"/>
-          <p:cNvSpPr/>
-          <p:nvPr/>
-        </p:nvSpPr>
-        <p:spPr>
-          <a:xfrm>
-            <a:off x="731520" y="2057400"/>
+                <a:latin typeface="Noto Sans TC"/>
+              </a:defRPr>
+            </a:pPr>
+            <a:r>
+              <a:t>[Baseline Model]</a:t>
+            </a:r>
+            <a:br/>
+            <a:r>
+              <a:t>Logistic Regression</a:t>
+            </a:r>
+            <a:br/>
+            <a:r>
+              <a:t>分類界的白飯 — 不花俏，但 穩定、能解釋、大家都懂 。 後面的模型如果只進步 2%，可能不值得用更複雜的方法</a:t>
+            </a:r>
+          </a:p>
+        </p:txBody>
+      </p:sp>
+      <p:sp>
+        <p:nvSpPr>
+          <p:cNvPr id="5" name="TextBox 4"/>
+          <p:cNvSpPr txBox="1"/>
+          <p:nvPr/>
+        </p:nvSpPr>
+        <p:spPr>
+          <a:xfrm>
+            <a:off x="731520" y="2880360"/>
             <a:ext cx="10515600" cy="457200"/>
-          </a:xfrm>
-          <a:prstGeom prst="roundRect">
-            <a:avLst/>
-          </a:prstGeom>
-          <a:solidFill>
-            <a:srgbClr val="F0F0F0"/>
-          </a:solidFill>
-          <a:ln>
-            <a:noFill/>
-          </a:ln>
-        </p:spPr>
-        <p:style>
-          <a:lnRef idx="1">
-            <a:schemeClr val="accent1"/>
-          </a:lnRef>
-          <a:fillRef idx="3">
-            <a:schemeClr val="accent1"/>
-          </a:fillRef>
-          <a:effectRef idx="2">
-            <a:schemeClr val="accent1"/>
-          </a:effectRef>
-          <a:fontRef idx="minor">
-            <a:schemeClr val="lt1"/>
-          </a:fontRef>
-        </p:style>
-        <p:txBody>
-          <a:bodyPr rtlCol="0" anchor="ctr" wrap="square" lIns="137160"/>
-          <a:lstStyle/>
-          <a:p>
-            <a:pPr algn="ctr">
-              <a:defRPr sz="1000">
-                <a:solidFill>
-                  <a:srgbClr val="1A1A1A"/>
-                </a:solidFill>
-                <a:latin typeface="Consolas"/>
-              </a:defRPr>
-            </a:pPr>
-            <a:r>
-              <a:t>用 Logistic Regression 預測 OUTCOME， 印出迴歸係數表、classification report、 混淆矩陣（用 heatmap 畫出來）</a:t>
-            </a:r>
-          </a:p>
-        </p:txBody>
-      </p:sp>
-      <p:sp>
-        <p:nvSpPr>
-          <p:cNvPr id="6" name="TextBox 5"/>
-          <p:cNvSpPr txBox="1"/>
-          <p:nvPr/>
-        </p:nvSpPr>
-        <p:spPr>
-          <a:xfrm>
-            <a:off x="10058400" y="6217920"/>
-            <a:ext cx="1828800" cy="365760"/>
           </a:xfrm>
           <a:prstGeom prst="rect">
             <a:avLst/>
@@ -5273,6 +5320,42 @@
           </a:bodyPr>
           <a:lstStyle/>
           <a:p>
+            <a:pPr algn="l">
+              <a:defRPr sz="1300" b="0">
+                <a:solidFill>
+                  <a:srgbClr val="D4480B"/>
+                </a:solidFill>
+                <a:latin typeface="Noto Sans TC"/>
+              </a:defRPr>
+            </a:pPr>
+            <a:r>
+              <a:t>「先煮好白飯，再挑戰炒飯」</a:t>
+            </a:r>
+          </a:p>
+        </p:txBody>
+      </p:sp>
+      <p:sp>
+        <p:nvSpPr>
+          <p:cNvPr id="6" name="TextBox 5"/>
+          <p:cNvSpPr txBox="1"/>
+          <p:nvPr/>
+        </p:nvSpPr>
+        <p:spPr>
+          <a:xfrm>
+            <a:off x="10058400" y="6217920"/>
+            <a:ext cx="1828800" cy="365760"/>
+          </a:xfrm>
+          <a:prstGeom prst="rect">
+            <a:avLst/>
+          </a:prstGeom>
+          <a:noFill/>
+        </p:spPr>
+        <p:txBody>
+          <a:bodyPr wrap="square">
+            <a:spAutoFit/>
+          </a:bodyPr>
+          <a:lstStyle/>
+          <a:p>
             <a:pPr algn="r">
               <a:defRPr sz="900" b="0">
                 <a:solidFill>
@@ -5282,7 +5365,7 @@
               </a:defRPr>
             </a:pPr>
             <a:r>
-              <a:t>16 / 35</a:t>
+              <a:t>15 / 35</a:t>
             </a:r>
           </a:p>
         </p:txBody>
@@ -5344,7 +5427,7 @@
               </a:defRPr>
             </a:pPr>
             <a:r>
-              <a:t>Interpretation</a:t>
+              <a:t>Demo</a:t>
             </a:r>
           </a:p>
         </p:txBody>
@@ -5380,32 +5463,85 @@
               </a:defRPr>
             </a:pPr>
             <a:r>
-              <a:t>解讀迴歸係數</a:t>
-            </a:r>
-          </a:p>
-        </p:txBody>
-      </p:sp>
-      <p:sp>
-        <p:nvSpPr>
-          <p:cNvPr id="4" name="Rounded Rectangle 3"/>
+              <a:t>帶做 Logistic Regression</a:t>
+            </a:r>
+          </a:p>
+        </p:txBody>
+      </p:sp>
+      <p:sp>
+        <p:nvSpPr>
+          <p:cNvPr id="4" name="TextBox 3"/>
+          <p:cNvSpPr txBox="1"/>
+          <p:nvPr/>
+        </p:nvSpPr>
+        <p:spPr>
+          <a:xfrm>
+            <a:off x="731520" y="1554480"/>
+            <a:ext cx="10515600" cy="4572000"/>
+          </a:xfrm>
+          <a:prstGeom prst="rect">
+            <a:avLst/>
+          </a:prstGeom>
+          <a:noFill/>
+        </p:spPr>
+        <p:txBody>
+          <a:bodyPr wrap="square">
+            <a:spAutoFit/>
+          </a:bodyPr>
+          <a:lstStyle/>
+          <a:p>
+            <a:pPr>
+              <a:spcAft>
+                <a:spcPts val="600"/>
+              </a:spcAft>
+              <a:defRPr sz="1300">
+                <a:solidFill>
+                  <a:srgbClr val="6B6B6B"/>
+                </a:solidFill>
+                <a:latin typeface="Noto Sans TC"/>
+              </a:defRPr>
+            </a:pPr>
+            <a:r>
+              <a:t>• 80% 拿來訓練，20% 留著驗證</a:t>
+            </a:r>
+          </a:p>
+          <a:p>
+            <a:pPr>
+              <a:spcAft>
+                <a:spcPts val="600"/>
+              </a:spcAft>
+              <a:defRPr sz="1300">
+                <a:solidFill>
+                  <a:srgbClr val="6B6B6B"/>
+                </a:solidFill>
+                <a:latin typeface="Noto Sans TC"/>
+              </a:defRPr>
+            </a:pPr>
+            <a:r>
+              <a:t>• 看它猜對幾個、猜錯幾個</a:t>
+            </a:r>
+          </a:p>
+        </p:txBody>
+      </p:sp>
+      <p:sp>
+        <p:nvSpPr>
+          <p:cNvPr id="5" name="Rounded Rectangle 4"/>
           <p:cNvSpPr/>
           <p:nvPr/>
         </p:nvSpPr>
         <p:spPr>
           <a:xfrm>
             <a:off x="731520" y="1554480"/>
-            <a:ext cx="3169919" cy="1097280"/>
+            <a:ext cx="10515600" cy="457200"/>
           </a:xfrm>
           <a:prstGeom prst="roundRect">
             <a:avLst/>
           </a:prstGeom>
           <a:solidFill>
-            <a:srgbClr val="FFF0E8"/>
+            <a:srgbClr val="F0F0F0"/>
           </a:solidFill>
-          <a:ln w="12700">
-            <a:solidFill>
-              <a:srgbClr val="E0E0E0"/>
-            </a:solidFill>
+          <a:ln>
+            <a:noFill/>
           </a:ln>
         </p:spPr>
         <p:style>
@@ -5423,48 +5559,42 @@
           </a:fontRef>
         </p:style>
         <p:txBody>
-          <a:bodyPr rtlCol="0" anchor="ctr" wrap="square" lIns="137160" tIns="91440"/>
+          <a:bodyPr rtlCol="0" anchor="ctr" wrap="square" lIns="137160"/>
           <a:lstStyle/>
           <a:p>
             <a:pPr algn="ctr">
-              <a:defRPr sz="1100">
+              <a:defRPr sz="1000">
                 <a:solidFill>
                   <a:srgbClr val="1A1A1A"/>
                 </a:solidFill>
-                <a:latin typeface="Noto Sans TC"/>
-              </a:defRPr>
-            </a:pPr>
-            <a:r>
-              <a:t>正係數 = 風險 ↑</a:t>
-            </a:r>
-            <a:br/>
-            <a:r>
-              <a:t>超速紀錄越多，理賠機率越高 例：SPEEDING_PENALTIES +0.45</a:t>
-            </a:r>
-          </a:p>
-        </p:txBody>
-      </p:sp>
-      <p:sp>
-        <p:nvSpPr>
-          <p:cNvPr id="5" name="Rounded Rectangle 4"/>
+                <a:latin typeface="Consolas"/>
+              </a:defRPr>
+            </a:pPr>
+            <a:r>
+              <a:t>請將資料做 train/test split（80/20, random_state=42）， 類別欄位做 one-hot encoding，數值欄位做 StandardScaler</a:t>
+            </a:r>
+          </a:p>
+        </p:txBody>
+      </p:sp>
+      <p:sp>
+        <p:nvSpPr>
+          <p:cNvPr id="6" name="Rounded Rectangle 5"/>
           <p:cNvSpPr/>
           <p:nvPr/>
         </p:nvSpPr>
         <p:spPr>
           <a:xfrm>
-            <a:off x="4084319" y="1554480"/>
-            <a:ext cx="3169919" cy="1097280"/>
+            <a:off x="731520" y="2057400"/>
+            <a:ext cx="10515600" cy="457200"/>
           </a:xfrm>
           <a:prstGeom prst="roundRect">
             <a:avLst/>
           </a:prstGeom>
           <a:solidFill>
-            <a:srgbClr val="E8F5EC"/>
+            <a:srgbClr val="F0F0F0"/>
           </a:solidFill>
-          <a:ln w="12700">
-            <a:solidFill>
-              <a:srgbClr val="E0E0E0"/>
-            </a:solidFill>
+          <a:ln>
+            <a:noFill/>
           </a:ln>
         </p:spPr>
         <p:style>
@@ -5482,78 +5612,19 @@
           </a:fontRef>
         </p:style>
         <p:txBody>
-          <a:bodyPr rtlCol="0" anchor="ctr" wrap="square" lIns="137160" tIns="91440"/>
+          <a:bodyPr rtlCol="0" anchor="ctr" wrap="square" lIns="137160"/>
           <a:lstStyle/>
           <a:p>
             <a:pPr algn="ctr">
-              <a:defRPr sz="1100">
+              <a:defRPr sz="1000">
                 <a:solidFill>
                   <a:srgbClr val="1A1A1A"/>
                 </a:solidFill>
-                <a:latin typeface="Noto Sans TC"/>
-              </a:defRPr>
-            </a:pPr>
-            <a:r>
-              <a:t>負係數 = 風險 ↓</a:t>
-            </a:r>
-            <a:br/>
-            <a:r>
-              <a:t>駕齡越長，理賠機率越低 例：DRIVING_EXPERIENCE -0.32</a:t>
-            </a:r>
-          </a:p>
-        </p:txBody>
-      </p:sp>
-      <p:sp>
-        <p:nvSpPr>
-          <p:cNvPr id="6" name="Rounded Rectangle 5"/>
-          <p:cNvSpPr/>
-          <p:nvPr/>
-        </p:nvSpPr>
-        <p:spPr>
-          <a:xfrm>
-            <a:off x="7437118" y="1554480"/>
-            <a:ext cx="3169919" cy="1097280"/>
-          </a:xfrm>
-          <a:prstGeom prst="roundRect">
-            <a:avLst/>
-          </a:prstGeom>
-          <a:solidFill>
-            <a:srgbClr val="FFF0E8"/>
-          </a:solidFill>
-          <a:ln w="12700">
-            <a:solidFill>
-              <a:srgbClr val="E0E0E0"/>
-            </a:solidFill>
-          </a:ln>
-        </p:spPr>
-        <p:style>
-          <a:lnRef idx="1">
-            <a:schemeClr val="accent1"/>
-          </a:lnRef>
-          <a:fillRef idx="3">
-            <a:schemeClr val="accent1"/>
-          </a:fillRef>
-          <a:effectRef idx="2">
-            <a:schemeClr val="accent1"/>
-          </a:effectRef>
-          <a:fontRef idx="minor">
-            <a:schemeClr val="lt1"/>
-          </a:fontRef>
-        </p:style>
-        <p:txBody>
-          <a:bodyPr rtlCol="0" anchor="ctr" wrap="square" lIns="137160" tIns="91440"/>
-          <a:lstStyle/>
-          <a:p>
-            <a:pPr algn="ctr">
-              <a:defRPr sz="1100">
-                <a:solidFill>
-                  <a:srgbClr val="1A1A1A"/>
-                </a:solidFill>
-                <a:latin typeface="Noto Sans TC"/>
-              </a:defRPr>
-            </a:pPr>
-            <a:r>
-              <a:t>p-value &lt; 0.05 = 統計顯著，這個變數真的有影響。有沒有你覺得應該重要、但 p-value 很大的變數？</a:t>
+                <a:latin typeface="Consolas"/>
+              </a:defRPr>
+            </a:pPr>
+            <a:r>
+              <a:t>用 Logistic Regression 預測 OUTCOME， 印出迴歸係數表、classification report、 混淆矩陣（用 heatmap 畫出來）</a:t>
             </a:r>
           </a:p>
         </p:txBody>
@@ -5589,7 +5660,7 @@
               </a:defRPr>
             </a:pPr>
             <a:r>
-              <a:t>17 / 35</a:t>
+              <a:t>16 / 35</a:t>
             </a:r>
           </a:p>
         </p:txBody>
@@ -5651,7 +5722,7 @@
               </a:defRPr>
             </a:pPr>
             <a:r>
-              <a:t>Insight</a:t>
+              <a:t>Interpretation</a:t>
             </a:r>
           </a:p>
         </p:txBody>
@@ -5687,250 +5758,221 @@
               </a:defRPr>
             </a:pPr>
             <a:r>
-              <a:t>Accuracy 的騙局</a:t>
-            </a:r>
-          </a:p>
-        </p:txBody>
-      </p:sp>
-      <p:sp>
-        <p:nvSpPr>
-          <p:cNvPr id="4" name="Rounded Rectangle 3"/>
-          <p:cNvSpPr/>
-          <p:nvPr/>
-        </p:nvSpPr>
-        <p:spPr>
-          <a:xfrm>
-            <a:off x="731520" y="1554480"/>
-            <a:ext cx="3169919" cy="1097280"/>
-          </a:xfrm>
-          <a:prstGeom prst="roundRect">
-            <a:avLst/>
-          </a:prstGeom>
-          <a:solidFill>
-            <a:srgbClr val="FFFFFF"/>
-          </a:solidFill>
-          <a:ln w="12700">
-            <a:solidFill>
-              <a:srgbClr val="E0E0E0"/>
-            </a:solidFill>
-          </a:ln>
-        </p:spPr>
-        <p:style>
-          <a:lnRef idx="1">
-            <a:schemeClr val="accent1"/>
-          </a:lnRef>
-          <a:fillRef idx="3">
-            <a:schemeClr val="accent1"/>
-          </a:fillRef>
-          <a:effectRef idx="2">
-            <a:schemeClr val="accent1"/>
-          </a:effectRef>
-          <a:fontRef idx="minor">
-            <a:schemeClr val="lt1"/>
-          </a:fontRef>
-        </p:style>
-        <p:txBody>
-          <a:bodyPr rtlCol="0" anchor="ctr" wrap="square" lIns="137160" tIns="91440"/>
-          <a:lstStyle/>
-          <a:p>
-            <a:pPr algn="ctr">
-              <a:defRPr sz="1100">
-                <a:solidFill>
-                  <a:srgbClr val="1A1A1A"/>
-                </a:solidFill>
-                <a:latin typeface="Noto Sans TC"/>
-              </a:defRPr>
-            </a:pPr>
-            <a:r>
-              <a:t>Accuracy</a:t>
-            </a:r>
-            <a:br/>
-            <a:r>
-              <a:t>整體猜對比例 不適合不平衡資料</a:t>
-            </a:r>
-          </a:p>
-        </p:txBody>
-      </p:sp>
-      <p:sp>
-        <p:nvSpPr>
-          <p:cNvPr id="5" name="Rounded Rectangle 4"/>
-          <p:cNvSpPr/>
-          <p:nvPr/>
-        </p:nvSpPr>
-        <p:spPr>
-          <a:xfrm>
-            <a:off x="4084319" y="1554480"/>
-            <a:ext cx="3169919" cy="1097280"/>
-          </a:xfrm>
-          <a:prstGeom prst="roundRect">
-            <a:avLst/>
-          </a:prstGeom>
-          <a:solidFill>
-            <a:srgbClr val="FFFFFF"/>
-          </a:solidFill>
-          <a:ln w="12700">
-            <a:solidFill>
-              <a:srgbClr val="E0E0E0"/>
-            </a:solidFill>
-          </a:ln>
-        </p:spPr>
-        <p:style>
-          <a:lnRef idx="1">
-            <a:schemeClr val="accent1"/>
-          </a:lnRef>
-          <a:fillRef idx="3">
-            <a:schemeClr val="accent1"/>
-          </a:fillRef>
-          <a:effectRef idx="2">
-            <a:schemeClr val="accent1"/>
-          </a:effectRef>
-          <a:fontRef idx="minor">
-            <a:schemeClr val="lt1"/>
-          </a:fontRef>
-        </p:style>
-        <p:txBody>
-          <a:bodyPr rtlCol="0" anchor="ctr" wrap="square" lIns="137160" tIns="91440"/>
-          <a:lstStyle/>
-          <a:p>
-            <a:pPr algn="ctr">
-              <a:defRPr sz="1100">
-                <a:solidFill>
-                  <a:srgbClr val="1A1A1A"/>
-                </a:solidFill>
-                <a:latin typeface="Noto Sans TC"/>
-              </a:defRPr>
-            </a:pPr>
-            <a:r>
-              <a:t>Precision</a:t>
-            </a:r>
-            <a:br/>
-            <a:r>
-              <a:t>「說有理賠」的 裡面真的有幾個</a:t>
-            </a:r>
-          </a:p>
-        </p:txBody>
-      </p:sp>
-      <p:sp>
-        <p:nvSpPr>
-          <p:cNvPr id="6" name="Rounded Rectangle 5"/>
-          <p:cNvSpPr/>
-          <p:nvPr/>
-        </p:nvSpPr>
-        <p:spPr>
-          <a:xfrm>
-            <a:off x="7437118" y="1554480"/>
-            <a:ext cx="3169919" cy="1097280"/>
-          </a:xfrm>
-          <a:prstGeom prst="roundRect">
-            <a:avLst/>
-          </a:prstGeom>
-          <a:solidFill>
-            <a:srgbClr val="FFFFFF"/>
-          </a:solidFill>
-          <a:ln w="12700">
-            <a:solidFill>
-              <a:srgbClr val="E0E0E0"/>
-            </a:solidFill>
-          </a:ln>
-        </p:spPr>
-        <p:style>
-          <a:lnRef idx="1">
-            <a:schemeClr val="accent1"/>
-          </a:lnRef>
-          <a:fillRef idx="3">
-            <a:schemeClr val="accent1"/>
-          </a:fillRef>
-          <a:effectRef idx="2">
-            <a:schemeClr val="accent1"/>
-          </a:effectRef>
-          <a:fontRef idx="minor">
-            <a:schemeClr val="lt1"/>
-          </a:fontRef>
-        </p:style>
-        <p:txBody>
-          <a:bodyPr rtlCol="0" anchor="ctr" wrap="square" lIns="137160" tIns="91440"/>
-          <a:lstStyle/>
-          <a:p>
-            <a:pPr algn="ctr">
-              <a:defRPr sz="1100">
-                <a:solidFill>
-                  <a:srgbClr val="1A1A1A"/>
-                </a:solidFill>
-                <a:latin typeface="Noto Sans TC"/>
-              </a:defRPr>
-            </a:pPr>
-            <a:r>
-              <a:t>Recall</a:t>
-            </a:r>
-            <a:br/>
-            <a:r>
-              <a:t>真正會理賠的 你抓到了幾個</a:t>
-            </a:r>
-          </a:p>
-        </p:txBody>
-      </p:sp>
-      <p:sp>
-        <p:nvSpPr>
-          <p:cNvPr id="7" name="Rounded Rectangle 6"/>
-          <p:cNvSpPr/>
-          <p:nvPr/>
-        </p:nvSpPr>
-        <p:spPr>
-          <a:xfrm>
-            <a:off x="731520" y="2788920"/>
-            <a:ext cx="3169919" cy="1097280"/>
-          </a:xfrm>
-          <a:prstGeom prst="roundRect">
-            <a:avLst/>
-          </a:prstGeom>
-          <a:solidFill>
-            <a:srgbClr val="FFFFFF"/>
-          </a:solidFill>
-          <a:ln w="12700">
-            <a:solidFill>
-              <a:srgbClr val="E0E0E0"/>
-            </a:solidFill>
-          </a:ln>
-        </p:spPr>
-        <p:style>
-          <a:lnRef idx="1">
-            <a:schemeClr val="accent1"/>
-          </a:lnRef>
-          <a:fillRef idx="3">
-            <a:schemeClr val="accent1"/>
-          </a:fillRef>
-          <a:effectRef idx="2">
-            <a:schemeClr val="accent1"/>
-          </a:effectRef>
-          <a:fontRef idx="minor">
-            <a:schemeClr val="lt1"/>
-          </a:fontRef>
-        </p:style>
-        <p:txBody>
-          <a:bodyPr rtlCol="0" anchor="ctr" wrap="square" lIns="137160" tIns="91440"/>
-          <a:lstStyle/>
-          <a:p>
-            <a:pPr algn="ctr">
-              <a:defRPr sz="1100">
-                <a:solidFill>
-                  <a:srgbClr val="1A1A1A"/>
-                </a:solidFill>
-                <a:latin typeface="Noto Sans TC"/>
-              </a:defRPr>
-            </a:pPr>
-            <a:r>
-              <a:t>F1-Score</a:t>
-            </a:r>
-            <a:br/>
-            <a:r>
-              <a:t>Precision &amp; Recall 的調和平均</a:t>
-            </a:r>
-          </a:p>
-        </p:txBody>
-      </p:sp>
-      <p:sp>
-        <p:nvSpPr>
-          <p:cNvPr id="8" name="TextBox 7"/>
+              <a:t>解讀迴歸係數</a:t>
+            </a:r>
+          </a:p>
+        </p:txBody>
+      </p:sp>
+      <p:graphicFrame>
+        <p:nvGraphicFramePr>
+          <p:cNvPr id="4" name="Table 3"/>
+          <p:cNvGraphicFramePr>
+            <a:graphicFrameLocks noGrp="1"/>
+          </p:cNvGraphicFramePr>
+          <p:nvPr/>
+        </p:nvGraphicFramePr>
+        <p:xfrm>
+          <a:off x="731520" y="1554480"/>
+          <a:ext cx="10058400" cy="960119"/>
+        </p:xfrm>
+        <a:graphic>
+          <a:graphicData uri="http://schemas.openxmlformats.org/drawingml/2006/table">
+            <a:tbl>
+              <a:tblPr firstRow="1" bandRow="1">
+                <a:tableStyleId>{5C22544A-7EE6-4342-B048-85BDC9FD1C3A}</a:tableStyleId>
+              </a:tblPr>
+              <a:tblGrid>
+                <a:gridCol w="3352800"/>
+                <a:gridCol w="3352800"/>
+                <a:gridCol w="3352800"/>
+              </a:tblGrid>
+              <a:tr h="320039">
+                <a:tc>
+                  <a:txBody>
+                    <a:bodyPr/>
+                    <a:lstStyle/>
+                    <a:p>
+                      <a:pPr>
+                        <a:defRPr sz="1000" b="1">
+                          <a:solidFill>
+                            <a:srgbClr val="FFFFFF"/>
+                          </a:solidFill>
+                          <a:latin typeface="Noto Sans TC"/>
+                        </a:defRPr>
+                      </a:pPr>
+                      <a:r>
+                        <a:t>方向</a:t>
+                      </a:r>
+                    </a:p>
+                  </a:txBody>
+                  <a:tcPr>
+                    <a:solidFill>
+                      <a:srgbClr val="1A1A1A"/>
+                    </a:solidFill>
+                  </a:tcPr>
+                </a:tc>
+                <a:tc>
+                  <a:txBody>
+                    <a:bodyPr/>
+                    <a:lstStyle/>
+                    <a:p>
+                      <a:pPr>
+                        <a:defRPr sz="1000" b="1">
+                          <a:solidFill>
+                            <a:srgbClr val="FFFFFF"/>
+                          </a:solidFill>
+                          <a:latin typeface="Noto Sans TC"/>
+                        </a:defRPr>
+                      </a:pPr>
+                      <a:r>
+                        <a:t>白話</a:t>
+                      </a:r>
+                    </a:p>
+                  </a:txBody>
+                  <a:tcPr>
+                    <a:solidFill>
+                      <a:srgbClr val="1A1A1A"/>
+                    </a:solidFill>
+                  </a:tcPr>
+                </a:tc>
+                <a:tc>
+                  <a:txBody>
+                    <a:bodyPr/>
+                    <a:lstStyle/>
+                    <a:p>
+                      <a:pPr>
+                        <a:defRPr sz="1000" b="1">
+                          <a:solidFill>
+                            <a:srgbClr val="FFFFFF"/>
+                          </a:solidFill>
+                          <a:latin typeface="Noto Sans TC"/>
+                        </a:defRPr>
+                      </a:pPr>
+                      <a:r>
+                        <a:t>例子</a:t>
+                      </a:r>
+                    </a:p>
+                  </a:txBody>
+                  <a:tcPr>
+                    <a:solidFill>
+                      <a:srgbClr val="1A1A1A"/>
+                    </a:solidFill>
+                  </a:tcPr>
+                </a:tc>
+              </a:tr>
+              <a:tr h="320039">
+                <a:tc>
+                  <a:txBody>
+                    <a:bodyPr/>
+                    <a:lstStyle/>
+                    <a:p>
+                      <a:pPr>
+                        <a:defRPr sz="1000">
+                          <a:latin typeface="Noto Sans TC"/>
+                        </a:defRPr>
+                      </a:pPr>
+                      <a:r>
+                        <a:t>正 (+)</a:t>
+                      </a:r>
+                    </a:p>
+                  </a:txBody>
+                  <a:tcPr/>
+                </a:tc>
+                <a:tc>
+                  <a:txBody>
+                    <a:bodyPr/>
+                    <a:lstStyle/>
+                    <a:p>
+                      <a:pPr>
+                        <a:defRPr sz="1000">
+                          <a:latin typeface="Noto Sans TC"/>
+                        </a:defRPr>
+                      </a:pPr>
+                      <a:r>
+                        <a:t>這個特徵讓客戶更危險</a:t>
+                      </a:r>
+                    </a:p>
+                  </a:txBody>
+                  <a:tcPr/>
+                </a:tc>
+                <a:tc>
+                  <a:txBody>
+                    <a:bodyPr/>
+                    <a:lstStyle/>
+                    <a:p>
+                      <a:pPr>
+                        <a:defRPr sz="1000">
+                          <a:latin typeface="Noto Sans TC"/>
+                        </a:defRPr>
+                      </a:pPr>
+                      <a:r>
+                        <a:t>超速次數多 → 理賠機率升高</a:t>
+                      </a:r>
+                    </a:p>
+                  </a:txBody>
+                  <a:tcPr/>
+                </a:tc>
+              </a:tr>
+              <a:tr h="320041">
+                <a:tc>
+                  <a:txBody>
+                    <a:bodyPr/>
+                    <a:lstStyle/>
+                    <a:p>
+                      <a:pPr>
+                        <a:defRPr sz="1000">
+                          <a:latin typeface="Noto Sans TC"/>
+                        </a:defRPr>
+                      </a:pPr>
+                      <a:r>
+                        <a:t>負 (−)</a:t>
+                      </a:r>
+                    </a:p>
+                  </a:txBody>
+                  <a:tcPr/>
+                </a:tc>
+                <a:tc>
+                  <a:txBody>
+                    <a:bodyPr/>
+                    <a:lstStyle/>
+                    <a:p>
+                      <a:pPr>
+                        <a:defRPr sz="1000">
+                          <a:latin typeface="Noto Sans TC"/>
+                        </a:defRPr>
+                      </a:pPr>
+                      <a:r>
+                        <a:t>這個特徵讓客戶更安全</a:t>
+                      </a:r>
+                    </a:p>
+                  </a:txBody>
+                  <a:tcPr/>
+                </a:tc>
+                <a:tc>
+                  <a:txBody>
+                    <a:bodyPr/>
+                    <a:lstStyle/>
+                    <a:p>
+                      <a:pPr>
+                        <a:defRPr sz="1000">
+                          <a:latin typeface="Noto Sans TC"/>
+                        </a:defRPr>
+                      </a:pPr>
+                      <a:r>
+                        <a:t>駕齡越長 → 理賠機率降低</a:t>
+                      </a:r>
+                    </a:p>
+                  </a:txBody>
+                  <a:tcPr/>
+                </a:tc>
+              </a:tr>
+            </a:tbl>
+          </a:graphicData>
+        </a:graphic>
+      </p:graphicFrame>
+      <p:sp>
+        <p:nvSpPr>
+          <p:cNvPr id="5" name="TextBox 4"/>
           <p:cNvSpPr txBox="1"/>
           <p:nvPr/>
         </p:nvSpPr>
@@ -5959,7 +6001,7 @@
               </a:defRPr>
             </a:pPr>
             <a:r>
-              <a:t>18 / 35</a:t>
+              <a:t>17 / 35</a:t>
             </a:r>
           </a:p>
         </p:txBody>
@@ -6021,7 +6063,7 @@
               </a:defRPr>
             </a:pPr>
             <a:r>
-              <a:t>Key Concept</a:t>
+              <a:t>Insight</a:t>
             </a:r>
           </a:p>
         </p:txBody>
@@ -6057,76 +6099,21 @@
               </a:defRPr>
             </a:pPr>
             <a:r>
-              <a:t>混淆矩陣：漏網之魚最致命</a:t>
-            </a:r>
-          </a:p>
-        </p:txBody>
-      </p:sp>
-      <p:sp>
-        <p:nvSpPr>
-          <p:cNvPr id="4" name="Rounded Rectangle 3"/>
-          <p:cNvSpPr/>
+              <a:t>Accuracy 的騙局</a:t>
+            </a:r>
+          </a:p>
+        </p:txBody>
+      </p:sp>
+      <p:sp>
+        <p:nvSpPr>
+          <p:cNvPr id="4" name="TextBox 3"/>
+          <p:cNvSpPr txBox="1"/>
           <p:nvPr/>
         </p:nvSpPr>
         <p:spPr>
           <a:xfrm>
             <a:off x="731520" y="1554480"/>
-            <a:ext cx="9875520" cy="1097280"/>
-          </a:xfrm>
-          <a:prstGeom prst="roundRect">
-            <a:avLst/>
-          </a:prstGeom>
-          <a:solidFill>
-            <a:srgbClr val="FFF0E8"/>
-          </a:solidFill>
-          <a:ln w="12700">
-            <a:solidFill>
-              <a:srgbClr val="E0E0E0"/>
-            </a:solidFill>
-          </a:ln>
-        </p:spPr>
-        <p:style>
-          <a:lnRef idx="1">
-            <a:schemeClr val="accent1"/>
-          </a:lnRef>
-          <a:fillRef idx="3">
-            <a:schemeClr val="accent1"/>
-          </a:fillRef>
-          <a:effectRef idx="2">
-            <a:schemeClr val="accent1"/>
-          </a:effectRef>
-          <a:fontRef idx="minor">
-            <a:schemeClr val="lt1"/>
-          </a:fontRef>
-        </p:style>
-        <p:txBody>
-          <a:bodyPr rtlCol="0" anchor="ctr" wrap="square" lIns="137160" tIns="91440"/>
-          <a:lstStyle/>
-          <a:p>
-            <a:pPr algn="ctr">
-              <a:defRPr sz="1100">
-                <a:solidFill>
-                  <a:srgbClr val="1A1A1A"/>
-                </a:solidFill>
-                <a:latin typeface="Noto Sans TC"/>
-              </a:defRPr>
-            </a:pPr>
-            <a:r>
-              <a:t>FP = 你以為他會理賠，結果沒有 — 虛驚一場，沒損失 FN = 你以為他不會理賠，結果出事了 — 公司賠大錢 產險結論： Recall &gt; Precision — 寧可多查，不能漏掉</a:t>
-            </a:r>
-          </a:p>
-        </p:txBody>
-      </p:sp>
-      <p:sp>
-        <p:nvSpPr>
-          <p:cNvPr id="5" name="TextBox 4"/>
-          <p:cNvSpPr txBox="1"/>
-          <p:nvPr/>
-        </p:nvSpPr>
-        <p:spPr>
-          <a:xfrm>
-            <a:off x="10058400" y="6217920"/>
-            <a:ext cx="1828800" cy="365760"/>
+            <a:ext cx="10515600" cy="4572000"/>
           </a:xfrm>
           <a:prstGeom prst="rect">
             <a:avLst/>
@@ -6139,6 +6126,77 @@
           </a:bodyPr>
           <a:lstStyle/>
           <a:p>
+            <a:pPr>
+              <a:spcAft>
+                <a:spcPts val="600"/>
+              </a:spcAft>
+              <a:defRPr sz="1300">
+                <a:solidFill>
+                  <a:srgbClr val="6B6B6B"/>
+                </a:solidFill>
+                <a:latin typeface="Noto Sans TC"/>
+              </a:defRPr>
+            </a:pPr>
+            <a:r>
+              <a:t>• Accuracy 不夠用</a:t>
+            </a:r>
+          </a:p>
+          <a:p>
+            <a:pPr>
+              <a:spcAft>
+                <a:spcPts val="600"/>
+              </a:spcAft>
+              <a:defRPr sz="1300">
+                <a:solidFill>
+                  <a:srgbClr val="6B6B6B"/>
+                </a:solidFill>
+                <a:latin typeface="Noto Sans TC"/>
+              </a:defRPr>
+            </a:pPr>
+            <a:r>
+              <a:t>• 如果 85% 的人沒理賠，寫一個永遠猜「不理賠」的模型 accuracy 也是 85%。 就像氣象預報員每天說「不地震」— 準確率 99.99%，但完全沒用</a:t>
+            </a:r>
+          </a:p>
+          <a:p>
+            <a:pPr>
+              <a:spcAft>
+                <a:spcPts val="600"/>
+              </a:spcAft>
+              <a:defRPr sz="1300">
+                <a:solidFill>
+                  <a:srgbClr val="6B6B6B"/>
+                </a:solidFill>
+                <a:latin typeface="Noto Sans TC"/>
+              </a:defRPr>
+            </a:pPr>
+            <a:r>
+              <a:t>• 所以我們需要更好的指標。</a:t>
+            </a:r>
+          </a:p>
+        </p:txBody>
+      </p:sp>
+      <p:sp>
+        <p:nvSpPr>
+          <p:cNvPr id="5" name="TextBox 4"/>
+          <p:cNvSpPr txBox="1"/>
+          <p:nvPr/>
+        </p:nvSpPr>
+        <p:spPr>
+          <a:xfrm>
+            <a:off x="10058400" y="6217920"/>
+            <a:ext cx="1828800" cy="365760"/>
+          </a:xfrm>
+          <a:prstGeom prst="rect">
+            <a:avLst/>
+          </a:prstGeom>
+          <a:noFill/>
+        </p:spPr>
+        <p:txBody>
+          <a:bodyPr wrap="square">
+            <a:spAutoFit/>
+          </a:bodyPr>
+          <a:lstStyle/>
+          <a:p>
             <a:pPr algn="r">
               <a:defRPr sz="900" b="0">
                 <a:solidFill>
@@ -6148,7 +6206,7 @@
               </a:defRPr>
             </a:pPr>
             <a:r>
-              <a:t>19 / 35</a:t>
+              <a:t>18 / 35</a:t>
             </a:r>
           </a:p>
         </p:txBody>
@@ -6210,7 +6268,7 @@
               </a:defRPr>
             </a:pPr>
             <a:r>
-              <a:t>About</a:t>
+              <a:t>Trend</a:t>
             </a:r>
           </a:p>
         </p:txBody>
@@ -6246,7 +6304,7 @@
               </a:defRPr>
             </a:pPr>
             <a:r>
-              <a:t>侯冠宇</a:t>
+              <a:t>AI 壓縮了寫程式的門檻，但提高了「判斷力」的價值</a:t>
             </a:r>
           </a:p>
         </p:txBody>
@@ -6301,15 +6359,11 @@
               </a:defRPr>
             </a:pPr>
             <a:r>
-              <a:t>[Current]</a:t>
+              <a:t>[Reuters 2025]</a:t>
             </a:r>
             <a:br/>
             <a:r>
-              <a:t>AI 系統架構師</a:t>
-            </a:r>
-            <a:br/>
-            <a:r>
-              <a:t>喬泰科技</a:t>
+              <a:t>Coding bootcamp 招生萎縮 —— AI 正在取代入門級程式工作 美國學生湧向的新熱門： 不是純 CS，而是 AI &amp; Decision-Making AI 沒有殺死商管，是逼商管升級 —— 整合資料與判斷的人價值上升</a:t>
             </a:r>
           </a:p>
         </p:txBody>
@@ -6364,15 +6418,11 @@
               </a:defRPr>
             </a:pPr>
             <a:r>
-              <a:t>[Academic]</a:t>
+              <a:t>[Reuters 2025]</a:t>
             </a:r>
             <a:br/>
             <a:r>
-              <a:t>博士研究生</a:t>
-            </a:r>
-            <a:br/>
-            <a:r>
-              <a:t>國立高雄科技大學</a:t>
+              <a:t>Coding bootcamp 招生萎縮 —— AI 正在取代入門級程式工作</a:t>
             </a:r>
           </a:p>
         </p:txBody>
@@ -6427,29 +6477,84 @@
               </a:defRPr>
             </a:pPr>
             <a:r>
-              <a:t>[Focus]</a:t>
+              <a:t>[New York Times 2025]</a:t>
             </a:r>
             <a:br/>
             <a:r>
-              <a:t>金融科技 × 人工智慧</a:t>
+              <a:t>美國學生湧向的新熱門： 不是純 CS，而是 AI &amp; Decision-Making</a:t>
+            </a:r>
+          </a:p>
+        </p:txBody>
+      </p:sp>
+      <p:sp>
+        <p:nvSpPr>
+          <p:cNvPr id="7" name="Rounded Rectangle 6"/>
+          <p:cNvSpPr/>
+          <p:nvPr/>
+        </p:nvSpPr>
+        <p:spPr>
+          <a:xfrm>
+            <a:off x="731520" y="2788920"/>
+            <a:ext cx="3169919" cy="1097280"/>
+          </a:xfrm>
+          <a:prstGeom prst="roundRect">
+            <a:avLst/>
+          </a:prstGeom>
+          <a:solidFill>
+            <a:srgbClr val="FFFFFF"/>
+          </a:solidFill>
+          <a:ln w="12700">
+            <a:solidFill>
+              <a:srgbClr val="E0E0E0"/>
+            </a:solidFill>
+          </a:ln>
+        </p:spPr>
+        <p:style>
+          <a:lnRef idx="1">
+            <a:schemeClr val="accent1"/>
+          </a:lnRef>
+          <a:fillRef idx="3">
+            <a:schemeClr val="accent1"/>
+          </a:fillRef>
+          <a:effectRef idx="2">
+            <a:schemeClr val="accent1"/>
+          </a:effectRef>
+          <a:fontRef idx="minor">
+            <a:schemeClr val="lt1"/>
+          </a:fontRef>
+        </p:style>
+        <p:txBody>
+          <a:bodyPr rtlCol="0" anchor="ctr" wrap="square" lIns="137160" tIns="91440"/>
+          <a:lstStyle/>
+          <a:p>
+            <a:pPr algn="ctr">
+              <a:defRPr sz="1100">
+                <a:solidFill>
+                  <a:srgbClr val="1A1A1A"/>
+                </a:solidFill>
+                <a:latin typeface="Noto Sans TC"/>
+              </a:defRPr>
+            </a:pPr>
+            <a:r>
+              <a:t>[The Hill 2025]</a:t>
             </a:r>
             <a:br/>
             <a:r>
-              <a:t>機器學習、風險建模、自然語言處理</a:t>
-            </a:r>
-          </a:p>
-        </p:txBody>
-      </p:sp>
-      <p:sp>
-        <p:nvSpPr>
-          <p:cNvPr id="7" name="TextBox 6"/>
+              <a:t>AI 沒有殺死商管，是逼商管升級 —— 整合資料與判斷的人價值上升</a:t>
+            </a:r>
+          </a:p>
+        </p:txBody>
+      </p:sp>
+      <p:sp>
+        <p:nvSpPr>
+          <p:cNvPr id="8" name="TextBox 7"/>
           <p:cNvSpPr txBox="1"/>
           <p:nvPr/>
         </p:nvSpPr>
         <p:spPr>
           <a:xfrm>
-            <a:off x="10058400" y="6217920"/>
-            <a:ext cx="1828800" cy="365760"/>
+            <a:off x="731520" y="4114800"/>
+            <a:ext cx="10515600" cy="457200"/>
           </a:xfrm>
           <a:prstGeom prst="rect">
             <a:avLst/>
@@ -6462,16 +6567,16 @@
           </a:bodyPr>
           <a:lstStyle/>
           <a:p>
-            <a:pPr algn="r">
-              <a:defRPr sz="900" b="0">
-                <a:solidFill>
-                  <a:srgbClr val="6B6B6B"/>
-                </a:solidFill>
-                <a:latin typeface="Noto Sans TC"/>
-              </a:defRPr>
-            </a:pPr>
-            <a:r>
-              <a:t>2 / 35</a:t>
+            <a:pPr algn="l">
+              <a:defRPr sz="1300" b="0">
+                <a:solidFill>
+                  <a:srgbClr val="D4480B"/>
+                </a:solidFill>
+                <a:latin typeface="Noto Sans TC"/>
+              </a:defRPr>
+            </a:pPr>
+            <a:r>
+              <a:t>「程式 AI 會寫，但「這個客戶該不該加費 30%」這個決策，AI 做不了」</a:t>
             </a:r>
           </a:p>
         </p:txBody>
@@ -6490,7 +6595,7 @@
     <p:bg>
       <p:bgPr>
         <a:solidFill>
-          <a:srgbClr val="1A1A1A"/>
+          <a:srgbClr val="FFFDF7"/>
         </a:solidFill>
         <a:effectLst/>
       </p:bgPr>
@@ -6510,8 +6615,8 @@
         </p:nvSpPr>
         <p:spPr>
           <a:xfrm>
-            <a:off x="914400" y="1828800"/>
-            <a:ext cx="10058400" cy="457200"/>
+            <a:off x="731520" y="548640"/>
+            <a:ext cx="2743200" cy="320040"/>
           </a:xfrm>
           <a:prstGeom prst="rect">
             <a:avLst/>
@@ -6524,8 +6629,8 @@
           </a:bodyPr>
           <a:lstStyle/>
           <a:p>
-            <a:pPr algn="ctr">
-              <a:defRPr sz="1200" b="1">
+            <a:pPr algn="l">
+              <a:defRPr sz="1000" b="1">
                 <a:solidFill>
                   <a:srgbClr val="D4480B"/>
                 </a:solidFill>
@@ -6533,7 +6638,7 @@
               </a:defRPr>
             </a:pPr>
             <a:r>
-              <a:t>Part 03</a:t>
+              <a:t>Key Concept</a:t>
             </a:r>
           </a:p>
         </p:txBody>
@@ -6546,8 +6651,8 @@
         </p:nvSpPr>
         <p:spPr>
           <a:xfrm>
-            <a:off x="914400" y="2560320"/>
-            <a:ext cx="10058400" cy="1371600"/>
+            <a:off x="731520" y="868680"/>
+            <a:ext cx="10515600" cy="640080"/>
           </a:xfrm>
           <a:prstGeom prst="rect">
             <a:avLst/>
@@ -6560,30 +6665,289 @@
           </a:bodyPr>
           <a:lstStyle/>
           <a:p>
+            <a:pPr algn="l">
+              <a:defRPr sz="2800" b="1">
+                <a:solidFill>
+                  <a:srgbClr val="1A1A1A"/>
+                </a:solidFill>
+                <a:latin typeface="Noto Sans TC"/>
+              </a:defRPr>
+            </a:pPr>
+            <a:r>
+              <a:t>混淆矩陣：漏網之魚最致命</a:t>
+            </a:r>
+          </a:p>
+        </p:txBody>
+      </p:sp>
+      <p:graphicFrame>
+        <p:nvGraphicFramePr>
+          <p:cNvPr id="4" name="Table 3"/>
+          <p:cNvGraphicFramePr>
+            <a:graphicFrameLocks noGrp="1"/>
+          </p:cNvGraphicFramePr>
+          <p:nvPr/>
+        </p:nvGraphicFramePr>
+        <p:xfrm>
+          <a:off x="731520" y="1554480"/>
+          <a:ext cx="10058400" cy="960119"/>
+        </p:xfrm>
+        <a:graphic>
+          <a:graphicData uri="http://schemas.openxmlformats.org/drawingml/2006/table">
+            <a:tbl>
+              <a:tblPr firstRow="1" bandRow="1">
+                <a:tableStyleId>{5C22544A-7EE6-4342-B048-85BDC9FD1C3A}</a:tableStyleId>
+              </a:tblPr>
+              <a:tblGrid>
+                <a:gridCol w="3352800"/>
+                <a:gridCol w="3352800"/>
+                <a:gridCol w="3352800"/>
+              </a:tblGrid>
+              <a:tr h="320039">
+                <a:tc>
+                  <a:txBody>
+                    <a:bodyPr/>
+                    <a:lstStyle/>
+                    <a:p>
+                      <a:pPr>
+                        <a:defRPr sz="1000" b="1">
+                          <a:solidFill>
+                            <a:srgbClr val="FFFFFF"/>
+                          </a:solidFill>
+                          <a:latin typeface="Noto Sans TC"/>
+                        </a:defRPr>
+                      </a:pPr>
+                    </a:p>
+                  </a:txBody>
+                  <a:tcPr>
+                    <a:solidFill>
+                      <a:srgbClr val="1A1A1A"/>
+                    </a:solidFill>
+                  </a:tcPr>
+                </a:tc>
+                <a:tc>
+                  <a:txBody>
+                    <a:bodyPr/>
+                    <a:lstStyle/>
+                    <a:p>
+                      <a:pPr>
+                        <a:defRPr sz="1000" b="1">
+                          <a:solidFill>
+                            <a:srgbClr val="FFFFFF"/>
+                          </a:solidFill>
+                          <a:latin typeface="Noto Sans TC"/>
+                        </a:defRPr>
+                      </a:pPr>
+                      <a:r>
+                        <a:t>模型說：不會理賠</a:t>
+                      </a:r>
+                    </a:p>
+                  </a:txBody>
+                  <a:tcPr>
+                    <a:solidFill>
+                      <a:srgbClr val="1A1A1A"/>
+                    </a:solidFill>
+                  </a:tcPr>
+                </a:tc>
+                <a:tc>
+                  <a:txBody>
+                    <a:bodyPr/>
+                    <a:lstStyle/>
+                    <a:p>
+                      <a:pPr>
+                        <a:defRPr sz="1000" b="1">
+                          <a:solidFill>
+                            <a:srgbClr val="FFFFFF"/>
+                          </a:solidFill>
+                          <a:latin typeface="Noto Sans TC"/>
+                        </a:defRPr>
+                      </a:pPr>
+                      <a:r>
+                        <a:t>模型說：會理賠</a:t>
+                      </a:r>
+                    </a:p>
+                  </a:txBody>
+                  <a:tcPr>
+                    <a:solidFill>
+                      <a:srgbClr val="1A1A1A"/>
+                    </a:solidFill>
+                  </a:tcPr>
+                </a:tc>
+              </a:tr>
+              <a:tr h="320039">
+                <a:tc>
+                  <a:txBody>
+                    <a:bodyPr/>
+                    <a:lstStyle/>
+                    <a:p>
+                      <a:pPr>
+                        <a:defRPr sz="1000">
+                          <a:latin typeface="Noto Sans TC"/>
+                        </a:defRPr>
+                      </a:pPr>
+                      <a:r>
+                        <a:t>真的沒理賠</a:t>
+                      </a:r>
+                    </a:p>
+                  </a:txBody>
+                  <a:tcPr/>
+                </a:tc>
+                <a:tc>
+                  <a:txBody>
+                    <a:bodyPr/>
+                    <a:lstStyle/>
+                    <a:p>
+                      <a:pPr>
+                        <a:defRPr sz="1000">
+                          <a:latin typeface="Noto Sans TC"/>
+                        </a:defRPr>
+                      </a:pPr>
+                      <a:r>
+                        <a:t>✓ 猜對了</a:t>
+                      </a:r>
+                    </a:p>
+                  </a:txBody>
+                  <a:tcPr/>
+                </a:tc>
+                <a:tc>
+                  <a:txBody>
+                    <a:bodyPr/>
+                    <a:lstStyle/>
+                    <a:p>
+                      <a:pPr>
+                        <a:defRPr sz="1000">
+                          <a:latin typeface="Noto Sans TC"/>
+                        </a:defRPr>
+                      </a:pPr>
+                      <a:r>
+                        <a:t>虛驚一場</a:t>
+                      </a:r>
+                    </a:p>
+                  </a:txBody>
+                  <a:tcPr/>
+                </a:tc>
+              </a:tr>
+              <a:tr h="320041">
+                <a:tc>
+                  <a:txBody>
+                    <a:bodyPr/>
+                    <a:lstStyle/>
+                    <a:p>
+                      <a:pPr>
+                        <a:defRPr sz="1000">
+                          <a:latin typeface="Noto Sans TC"/>
+                        </a:defRPr>
+                      </a:pPr>
+                      <a:r>
+                        <a:t>真的有理賠</a:t>
+                      </a:r>
+                    </a:p>
+                  </a:txBody>
+                  <a:tcPr/>
+                </a:tc>
+                <a:tc>
+                  <a:txBody>
+                    <a:bodyPr/>
+                    <a:lstStyle/>
+                    <a:p>
+                      <a:pPr>
+                        <a:defRPr sz="1000">
+                          <a:latin typeface="Noto Sans TC"/>
+                        </a:defRPr>
+                      </a:pPr>
+                      <a:r>
+                        <a:t>★ 漏掉了 —— 公司賠大錢</a:t>
+                      </a:r>
+                    </a:p>
+                  </a:txBody>
+                  <a:tcPr/>
+                </a:tc>
+                <a:tc>
+                  <a:txBody>
+                    <a:bodyPr/>
+                    <a:lstStyle/>
+                    <a:p>
+                      <a:pPr>
+                        <a:defRPr sz="1000">
+                          <a:latin typeface="Noto Sans TC"/>
+                        </a:defRPr>
+                      </a:pPr>
+                      <a:r>
+                        <a:t>✓ 抓到了</a:t>
+                      </a:r>
+                    </a:p>
+                  </a:txBody>
+                  <a:tcPr/>
+                </a:tc>
+              </a:tr>
+            </a:tbl>
+          </a:graphicData>
+        </a:graphic>
+      </p:graphicFrame>
+      <p:sp>
+        <p:nvSpPr>
+          <p:cNvPr id="5" name="Rounded Rectangle 4"/>
+          <p:cNvSpPr/>
+          <p:nvPr/>
+        </p:nvSpPr>
+        <p:spPr>
+          <a:xfrm>
+            <a:off x="731520" y="2788919"/>
+            <a:ext cx="9875520" cy="1097280"/>
+          </a:xfrm>
+          <a:prstGeom prst="roundRect">
+            <a:avLst/>
+          </a:prstGeom>
+          <a:solidFill>
+            <a:srgbClr val="E8F5EC"/>
+          </a:solidFill>
+          <a:ln w="12700">
+            <a:solidFill>
+              <a:srgbClr val="E0E0E0"/>
+            </a:solidFill>
+          </a:ln>
+        </p:spPr>
+        <p:style>
+          <a:lnRef idx="1">
+            <a:schemeClr val="accent1"/>
+          </a:lnRef>
+          <a:fillRef idx="3">
+            <a:schemeClr val="accent1"/>
+          </a:fillRef>
+          <a:effectRef idx="2">
+            <a:schemeClr val="accent1"/>
+          </a:effectRef>
+          <a:fontRef idx="minor">
+            <a:schemeClr val="lt1"/>
+          </a:fontRef>
+        </p:style>
+        <p:txBody>
+          <a:bodyPr rtlCol="0" anchor="ctr" wrap="square" lIns="137160" tIns="91440"/>
+          <a:lstStyle/>
+          <a:p>
             <a:pPr algn="ctr">
-              <a:defRPr sz="4800" b="1">
-                <a:solidFill>
-                  <a:srgbClr val="FFFFFF"/>
-                </a:solidFill>
-                <a:latin typeface="Noto Sans TC"/>
-              </a:defRPr>
-            </a:pPr>
-            <a:r>
-              <a:t>四大進階分類模型</a:t>
-            </a:r>
-          </a:p>
-        </p:txBody>
-      </p:sp>
-      <p:sp>
-        <p:nvSpPr>
-          <p:cNvPr id="4" name="TextBox 3"/>
+              <a:defRPr sz="1100">
+                <a:solidFill>
+                  <a:srgbClr val="1A1A1A"/>
+                </a:solidFill>
+                <a:latin typeface="Noto Sans TC"/>
+              </a:defRPr>
+            </a:pPr>
+            <a:r>
+              <a:t>產險結論：Recall &gt; Precision —— 寧可多查，不能漏掉</a:t>
+            </a:r>
+          </a:p>
+        </p:txBody>
+      </p:sp>
+      <p:sp>
+        <p:nvSpPr>
+          <p:cNvPr id="6" name="TextBox 5"/>
           <p:cNvSpPr txBox="1"/>
           <p:nvPr/>
         </p:nvSpPr>
         <p:spPr>
           <a:xfrm>
-            <a:off x="914400" y="3931920"/>
-            <a:ext cx="10058400" cy="731520"/>
+            <a:off x="10058400" y="6217920"/>
+            <a:ext cx="1828800" cy="365760"/>
           </a:xfrm>
           <a:prstGeom prst="rect">
             <a:avLst/>
@@ -6596,52 +6960,16 @@
           </a:bodyPr>
           <a:lstStyle/>
           <a:p>
-            <a:pPr algn="ctr">
-              <a:defRPr sz="1800" b="0">
-                <a:solidFill>
-                  <a:srgbClr val="999999"/>
-                </a:solidFill>
-                <a:latin typeface="Noto Sans TC"/>
-              </a:defRPr>
-            </a:pPr>
-            <a:r>
-              <a:t>挑戰 Logistic Regression 基準線</a:t>
-            </a:r>
-          </a:p>
-        </p:txBody>
-      </p:sp>
-      <p:sp>
-        <p:nvSpPr>
-          <p:cNvPr id="5" name="TextBox 4"/>
-          <p:cNvSpPr txBox="1"/>
-          <p:nvPr/>
-        </p:nvSpPr>
-        <p:spPr>
-          <a:xfrm>
-            <a:off x="10058400" y="6217920"/>
-            <a:ext cx="1828800" cy="365760"/>
-          </a:xfrm>
-          <a:prstGeom prst="rect">
-            <a:avLst/>
-          </a:prstGeom>
-          <a:noFill/>
-        </p:spPr>
-        <p:txBody>
-          <a:bodyPr wrap="square">
-            <a:spAutoFit/>
-          </a:bodyPr>
-          <a:lstStyle/>
-          <a:p>
             <a:pPr algn="r">
               <a:defRPr sz="900" b="0">
                 <a:solidFill>
-                  <a:srgbClr val="666666"/>
-                </a:solidFill>
-                <a:latin typeface="Noto Sans TC"/>
-              </a:defRPr>
-            </a:pPr>
-            <a:r>
-              <a:t>20 / 35</a:t>
+                  <a:srgbClr val="6B6B6B"/>
+                </a:solidFill>
+                <a:latin typeface="Noto Sans TC"/>
+              </a:defRPr>
+            </a:pPr>
+            <a:r>
+              <a:t>19 / 35</a:t>
             </a:r>
           </a:p>
         </p:txBody>
@@ -6703,7 +7031,7 @@
               </a:defRPr>
             </a:pPr>
             <a:r>
-              <a:t>Model 01</a:t>
+              <a:t>Metrics</a:t>
             </a:r>
           </a:p>
         </p:txBody>
@@ -6739,21 +7067,334 @@
               </a:defRPr>
             </a:pPr>
             <a:r>
-              <a:t>Decision Tree</a:t>
-            </a:r>
-          </a:p>
-        </p:txBody>
-      </p:sp>
-      <p:sp>
-        <p:nvSpPr>
-          <p:cNvPr id="4" name="Rounded Rectangle 3"/>
+              <a:t>四大評估指標</a:t>
+            </a:r>
+          </a:p>
+        </p:txBody>
+      </p:sp>
+      <p:graphicFrame>
+        <p:nvGraphicFramePr>
+          <p:cNvPr id="4" name="Table 3"/>
+          <p:cNvGraphicFramePr>
+            <a:graphicFrameLocks noGrp="1"/>
+          </p:cNvGraphicFramePr>
+          <p:nvPr/>
+        </p:nvGraphicFramePr>
+        <p:xfrm>
+          <a:off x="731520" y="1554480"/>
+          <a:ext cx="10058400" cy="1600200"/>
+        </p:xfrm>
+        <a:graphic>
+          <a:graphicData uri="http://schemas.openxmlformats.org/drawingml/2006/table">
+            <a:tbl>
+              <a:tblPr firstRow="1" bandRow="1">
+                <a:tableStyleId>{5C22544A-7EE6-4342-B048-85BDC9FD1C3A}</a:tableStyleId>
+              </a:tblPr>
+              <a:tblGrid>
+                <a:gridCol w="3352800"/>
+                <a:gridCol w="3352800"/>
+                <a:gridCol w="3352800"/>
+              </a:tblGrid>
+              <a:tr h="320040">
+                <a:tc>
+                  <a:txBody>
+                    <a:bodyPr/>
+                    <a:lstStyle/>
+                    <a:p>
+                      <a:pPr>
+                        <a:defRPr sz="1000" b="1">
+                          <a:solidFill>
+                            <a:srgbClr val="FFFFFF"/>
+                          </a:solidFill>
+                          <a:latin typeface="Noto Sans TC"/>
+                        </a:defRPr>
+                      </a:pPr>
+                      <a:r>
+                        <a:t>指標</a:t>
+                      </a:r>
+                    </a:p>
+                  </a:txBody>
+                  <a:tcPr>
+                    <a:solidFill>
+                      <a:srgbClr val="1A1A1A"/>
+                    </a:solidFill>
+                  </a:tcPr>
+                </a:tc>
+                <a:tc>
+                  <a:txBody>
+                    <a:bodyPr/>
+                    <a:lstStyle/>
+                    <a:p>
+                      <a:pPr>
+                        <a:defRPr sz="1000" b="1">
+                          <a:solidFill>
+                            <a:srgbClr val="FFFFFF"/>
+                          </a:solidFill>
+                          <a:latin typeface="Noto Sans TC"/>
+                        </a:defRPr>
+                      </a:pPr>
+                      <a:r>
+                        <a:t>白話</a:t>
+                      </a:r>
+                    </a:p>
+                  </a:txBody>
+                  <a:tcPr>
+                    <a:solidFill>
+                      <a:srgbClr val="1A1A1A"/>
+                    </a:solidFill>
+                  </a:tcPr>
+                </a:tc>
+                <a:tc>
+                  <a:txBody>
+                    <a:bodyPr/>
+                    <a:lstStyle/>
+                    <a:p>
+                      <a:pPr>
+                        <a:defRPr sz="1000" b="1">
+                          <a:solidFill>
+                            <a:srgbClr val="FFFFFF"/>
+                          </a:solidFill>
+                          <a:latin typeface="Noto Sans TC"/>
+                        </a:defRPr>
+                      </a:pPr>
+                      <a:r>
+                        <a:t>看矩陣哪裡</a:t>
+                      </a:r>
+                    </a:p>
+                  </a:txBody>
+                  <a:tcPr>
+                    <a:solidFill>
+                      <a:srgbClr val="1A1A1A"/>
+                    </a:solidFill>
+                  </a:tcPr>
+                </a:tc>
+              </a:tr>
+              <a:tr h="320040">
+                <a:tc>
+                  <a:txBody>
+                    <a:bodyPr/>
+                    <a:lstStyle/>
+                    <a:p>
+                      <a:pPr>
+                        <a:defRPr sz="1000">
+                          <a:latin typeface="Noto Sans TC"/>
+                        </a:defRPr>
+                      </a:pPr>
+                      <a:r>
+                        <a:t>Accuracy</a:t>
+                      </a:r>
+                    </a:p>
+                  </a:txBody>
+                  <a:tcPr/>
+                </a:tc>
+                <a:tc>
+                  <a:txBody>
+                    <a:bodyPr/>
+                    <a:lstStyle/>
+                    <a:p>
+                      <a:pPr>
+                        <a:defRPr sz="1000">
+                          <a:latin typeface="Noto Sans TC"/>
+                        </a:defRPr>
+                      </a:pPr>
+                      <a:r>
+                        <a:t>整體猜對比例</a:t>
+                      </a:r>
+                    </a:p>
+                  </a:txBody>
+                  <a:tcPr/>
+                </a:tc>
+                <a:tc>
+                  <a:txBody>
+                    <a:bodyPr/>
+                    <a:lstStyle/>
+                    <a:p>
+                      <a:pPr>
+                        <a:defRPr sz="1000">
+                          <a:latin typeface="Noto Sans TC"/>
+                        </a:defRPr>
+                      </a:pPr>
+                      <a:r>
+                        <a:t>不適合不平衡資料</a:t>
+                      </a:r>
+                    </a:p>
+                  </a:txBody>
+                  <a:tcPr/>
+                </a:tc>
+              </a:tr>
+              <a:tr h="320040">
+                <a:tc>
+                  <a:txBody>
+                    <a:bodyPr/>
+                    <a:lstStyle/>
+                    <a:p>
+                      <a:pPr>
+                        <a:defRPr sz="1000">
+                          <a:latin typeface="Noto Sans TC"/>
+                        </a:defRPr>
+                      </a:pPr>
+                      <a:r>
+                        <a:t>Precision</a:t>
+                      </a:r>
+                    </a:p>
+                  </a:txBody>
+                  <a:tcPr/>
+                </a:tc>
+                <a:tc>
+                  <a:txBody>
+                    <a:bodyPr/>
+                    <a:lstStyle/>
+                    <a:p>
+                      <a:pPr>
+                        <a:defRPr sz="1000">
+                          <a:latin typeface="Noto Sans TC"/>
+                        </a:defRPr>
+                      </a:pPr>
+                      <a:r>
+                        <a:t>模型說「會理賠」的裡面，真的有幾個？</a:t>
+                      </a:r>
+                    </a:p>
+                  </a:txBody>
+                  <a:tcPr/>
+                </a:tc>
+                <a:tc>
+                  <a:txBody>
+                    <a:bodyPr/>
+                    <a:lstStyle/>
+                    <a:p>
+                      <a:pPr>
+                        <a:defRPr sz="1000">
+                          <a:latin typeface="Noto Sans TC"/>
+                        </a:defRPr>
+                      </a:pPr>
+                      <a:r>
+                        <a:t>右邊那一欄</a:t>
+                      </a:r>
+                    </a:p>
+                  </a:txBody>
+                  <a:tcPr/>
+                </a:tc>
+              </a:tr>
+              <a:tr h="320040">
+                <a:tc>
+                  <a:txBody>
+                    <a:bodyPr/>
+                    <a:lstStyle/>
+                    <a:p>
+                      <a:pPr>
+                        <a:defRPr sz="1000">
+                          <a:latin typeface="Noto Sans TC"/>
+                        </a:defRPr>
+                      </a:pPr>
+                      <a:r>
+                        <a:t>Recall</a:t>
+                      </a:r>
+                    </a:p>
+                  </a:txBody>
+                  <a:tcPr/>
+                </a:tc>
+                <a:tc>
+                  <a:txBody>
+                    <a:bodyPr/>
+                    <a:lstStyle/>
+                    <a:p>
+                      <a:pPr>
+                        <a:defRPr sz="1000">
+                          <a:latin typeface="Noto Sans TC"/>
+                        </a:defRPr>
+                      </a:pPr>
+                      <a:r>
+                        <a:t>真的有理賠的人，模型抓到了幾個？</a:t>
+                      </a:r>
+                    </a:p>
+                  </a:txBody>
+                  <a:tcPr/>
+                </a:tc>
+                <a:tc>
+                  <a:txBody>
+                    <a:bodyPr/>
+                    <a:lstStyle/>
+                    <a:p>
+                      <a:pPr>
+                        <a:defRPr sz="1000">
+                          <a:latin typeface="Noto Sans TC"/>
+                        </a:defRPr>
+                      </a:pPr>
+                      <a:r>
+                        <a:t>下面那一列</a:t>
+                      </a:r>
+                    </a:p>
+                  </a:txBody>
+                  <a:tcPr/>
+                </a:tc>
+              </a:tr>
+              <a:tr h="320040">
+                <a:tc>
+                  <a:txBody>
+                    <a:bodyPr/>
+                    <a:lstStyle/>
+                    <a:p>
+                      <a:pPr>
+                        <a:defRPr sz="1000">
+                          <a:latin typeface="Noto Sans TC"/>
+                        </a:defRPr>
+                      </a:pPr>
+                      <a:r>
+                        <a:t>F1-Score</a:t>
+                      </a:r>
+                    </a:p>
+                  </a:txBody>
+                  <a:tcPr/>
+                </a:tc>
+                <a:tc>
+                  <a:txBody>
+                    <a:bodyPr/>
+                    <a:lstStyle/>
+                    <a:p>
+                      <a:pPr>
+                        <a:defRPr sz="1000">
+                          <a:latin typeface="Noto Sans TC"/>
+                        </a:defRPr>
+                      </a:pPr>
+                      <a:r>
+                        <a:t>Precision &amp; Recall 的調和平均</a:t>
+                      </a:r>
+                    </a:p>
+                  </a:txBody>
+                  <a:tcPr/>
+                </a:tc>
+                <a:tc>
+                  <a:txBody>
+                    <a:bodyPr/>
+                    <a:lstStyle/>
+                    <a:p>
+                      <a:pPr>
+                        <a:defRPr sz="1000">
+                          <a:latin typeface="Noto Sans TC"/>
+                        </a:defRPr>
+                      </a:pPr>
+                      <a:r>
+                        <a:t>綜合指標</a:t>
+                      </a:r>
+                    </a:p>
+                  </a:txBody>
+                  <a:tcPr/>
+                </a:tc>
+              </a:tr>
+            </a:tbl>
+          </a:graphicData>
+        </a:graphic>
+      </p:graphicFrame>
+      <p:sp>
+        <p:nvSpPr>
+          <p:cNvPr id="5" name="Rounded Rectangle 4"/>
           <p:cNvSpPr/>
           <p:nvPr/>
         </p:nvSpPr>
         <p:spPr>
           <a:xfrm>
-            <a:off x="731520" y="1554480"/>
-            <a:ext cx="4846320" cy="1097280"/>
+            <a:off x="731520" y="3429000"/>
+            <a:ext cx="9875520" cy="1097280"/>
           </a:xfrm>
           <a:prstGeom prst="roundRect">
             <a:avLst/>
@@ -6794,106 +7435,7 @@
               </a:defRPr>
             </a:pPr>
             <a:r>
-              <a:t>優點</a:t>
-            </a:r>
-            <a:br/>
-            <a:r>
-              <a:t>直覺好解釋 可以畫圖給不懂技術的主管看</a:t>
-            </a:r>
-          </a:p>
-        </p:txBody>
-      </p:sp>
-      <p:sp>
-        <p:nvSpPr>
-          <p:cNvPr id="5" name="Rounded Rectangle 4"/>
-          <p:cNvSpPr/>
-          <p:nvPr/>
-        </p:nvSpPr>
-        <p:spPr>
-          <a:xfrm>
-            <a:off x="5760720" y="1554480"/>
-            <a:ext cx="4846320" cy="1097280"/>
-          </a:xfrm>
-          <a:prstGeom prst="roundRect">
-            <a:avLst/>
-          </a:prstGeom>
-          <a:solidFill>
-            <a:srgbClr val="FFF0E8"/>
-          </a:solidFill>
-          <a:ln w="12700">
-            <a:solidFill>
-              <a:srgbClr val="E0E0E0"/>
-            </a:solidFill>
-          </a:ln>
-        </p:spPr>
-        <p:style>
-          <a:lnRef idx="1">
-            <a:schemeClr val="accent1"/>
-          </a:lnRef>
-          <a:fillRef idx="3">
-            <a:schemeClr val="accent1"/>
-          </a:fillRef>
-          <a:effectRef idx="2">
-            <a:schemeClr val="accent1"/>
-          </a:effectRef>
-          <a:fontRef idx="minor">
-            <a:schemeClr val="lt1"/>
-          </a:fontRef>
-        </p:style>
-        <p:txBody>
-          <a:bodyPr rtlCol="0" anchor="ctr" wrap="square" lIns="137160" tIns="91440"/>
-          <a:lstStyle/>
-          <a:p>
-            <a:pPr algn="ctr">
-              <a:defRPr sz="1100">
-                <a:solidFill>
-                  <a:srgbClr val="1A1A1A"/>
-                </a:solidFill>
-                <a:latin typeface="Noto Sans TC"/>
-              </a:defRPr>
-            </a:pPr>
-            <a:r>
-              <a:t>缺點</a:t>
-            </a:r>
-            <a:br/>
-            <a:r>
-              <a:t>容易過擬合 — 段考很高但模擬考爆炸，因為只會背不會活用</a:t>
-            </a:r>
-          </a:p>
-        </p:txBody>
-      </p:sp>
-      <p:sp>
-        <p:nvSpPr>
-          <p:cNvPr id="6" name="TextBox 5"/>
-          <p:cNvSpPr txBox="1"/>
-          <p:nvPr/>
-        </p:nvSpPr>
-        <p:spPr>
-          <a:xfrm>
-            <a:off x="10058400" y="6217920"/>
-            <a:ext cx="1828800" cy="365760"/>
-          </a:xfrm>
-          <a:prstGeom prst="rect">
-            <a:avLst/>
-          </a:prstGeom>
-          <a:noFill/>
-        </p:spPr>
-        <p:txBody>
-          <a:bodyPr wrap="square">
-            <a:spAutoFit/>
-          </a:bodyPr>
-          <a:lstStyle/>
-          <a:p>
-            <a:pPr algn="r">
-              <a:defRPr sz="900" b="0">
-                <a:solidFill>
-                  <a:srgbClr val="6B6B6B"/>
-                </a:solidFill>
-                <a:latin typeface="Noto Sans TC"/>
-              </a:defRPr>
-            </a:pPr>
-            <a:r>
-              <a:t>21 / 35</a:t>
+              <a:t>產險結論：Recall &gt; Precision —— 寧可多查，不能漏掉</a:t>
             </a:r>
           </a:p>
         </p:txBody>
@@ -6955,7 +7497,7 @@
               </a:defRPr>
             </a:pPr>
             <a:r>
-              <a:t>Model 02</a:t>
+              <a:t>Model 01</a:t>
             </a:r>
           </a:p>
         </p:txBody>
@@ -6991,7 +7533,7 @@
               </a:defRPr>
             </a:pPr>
             <a:r>
-              <a:t>Random Forest</a:t>
+              <a:t>Decision Tree</a:t>
             </a:r>
           </a:p>
         </p:txBody>
@@ -7050,7 +7592,7 @@
             </a:r>
             <a:br/>
             <a:r>
-              <a:t>穩定不易過擬合 可看特徵重要性</a:t>
+              <a:t>直覺好解釋 可以畫圖給不懂技術的主管看</a:t>
             </a:r>
           </a:p>
         </p:txBody>
@@ -7109,7 +7651,7 @@
             </a:r>
             <a:br/>
             <a:r>
-              <a:t>不好解釋單一預測 訓練較慢</a:t>
+              <a:t>容易過擬合 — 段考很高但模擬考爆炸，因為只會背不會活用</a:t>
             </a:r>
           </a:p>
         </p:txBody>
@@ -7145,7 +7687,7 @@
               </a:defRPr>
             </a:pPr>
             <a:r>
-              <a:t>22 / 35</a:t>
+              <a:t>21 / 35</a:t>
             </a:r>
           </a:p>
         </p:txBody>
@@ -7207,7 +7749,7 @@
               </a:defRPr>
             </a:pPr>
             <a:r>
-              <a:t>Model 03</a:t>
+              <a:t>Model 02</a:t>
             </a:r>
           </a:p>
         </p:txBody>
@@ -7243,7 +7785,7 @@
               </a:defRPr>
             </a:pPr>
             <a:r>
-              <a:t>SVM</a:t>
+              <a:t>Random Forest</a:t>
             </a:r>
           </a:p>
         </p:txBody>
@@ -7302,7 +7844,7 @@
             </a:r>
             <a:br/>
             <a:r>
-              <a:t>高維度表現好 邊界清晰</a:t>
+              <a:t>穩定不易過擬合 可看特徵重要性</a:t>
             </a:r>
           </a:p>
         </p:txBody>
@@ -7361,7 +7903,7 @@
             </a:r>
             <a:br/>
             <a:r>
-              <a:t>速度慢、黑箱 需要標準化</a:t>
+              <a:t>不好解釋單一預測 訓練較慢</a:t>
             </a:r>
           </a:p>
         </p:txBody>
@@ -7397,7 +7939,7 @@
               </a:defRPr>
             </a:pPr>
             <a:r>
-              <a:t>23 / 35</a:t>
+              <a:t>22 / 35</a:t>
             </a:r>
           </a:p>
         </p:txBody>
@@ -7459,7 +8001,7 @@
               </a:defRPr>
             </a:pPr>
             <a:r>
-              <a:t>Model 04</a:t>
+              <a:t>Model 03</a:t>
             </a:r>
           </a:p>
         </p:txBody>
@@ -7495,7 +8037,7 @@
               </a:defRPr>
             </a:pPr>
             <a:r>
-              <a:t>XGBoost</a:t>
+              <a:t>SVM</a:t>
             </a:r>
           </a:p>
         </p:txBody>
@@ -7554,7 +8096,7 @@
             </a:r>
             <a:br/>
             <a:r>
-              <a:t>通常最準、速度快 可算特徵重要性</a:t>
+              <a:t>高維度表現好 分界線清楚</a:t>
             </a:r>
           </a:p>
         </p:txBody>
@@ -7613,7 +8155,7 @@
             </a:r>
             <a:br/>
             <a:r>
-              <a:t>參數多要調（學習率、樹深度等），今天用 AI 幫你處理</a:t>
+              <a:t>速度慢，資料量大時跑很久 黑箱 —— 沒辦法解釋「為什麼這樣分」</a:t>
             </a:r>
           </a:p>
         </p:txBody>
@@ -7649,7 +8191,7 @@
               </a:defRPr>
             </a:pPr>
             <a:r>
-              <a:t>24 / 35</a:t>
+              <a:t>23 / 35</a:t>
             </a:r>
           </a:p>
         </p:txBody>
@@ -7663,6 +8205,258 @@
 </file>
 
 <file path=ppt/slides/slide25.xml><?xml version="1.0" encoding="utf-8"?>
+<p:sld xmlns:a="http://schemas.openxmlformats.org/drawingml/2006/main" xmlns:p="http://schemas.openxmlformats.org/presentationml/2006/main" xmlns:r="http://schemas.openxmlformats.org/officeDocument/2006/relationships">
+  <p:cSld>
+    <p:bg>
+      <p:bgPr>
+        <a:solidFill>
+          <a:srgbClr val="FFFDF7"/>
+        </a:solidFill>
+        <a:effectLst/>
+      </p:bgPr>
+    </p:bg>
+    <p:spTree>
+      <p:nvGrpSpPr>
+        <p:cNvPr id="1" name=""/>
+        <p:cNvGrpSpPr/>
+        <p:nvPr/>
+      </p:nvGrpSpPr>
+      <p:grpSpPr/>
+      <p:sp>
+        <p:nvSpPr>
+          <p:cNvPr id="2" name="TextBox 1"/>
+          <p:cNvSpPr txBox="1"/>
+          <p:nvPr/>
+        </p:nvSpPr>
+        <p:spPr>
+          <a:xfrm>
+            <a:off x="731520" y="548640"/>
+            <a:ext cx="2743200" cy="320040"/>
+          </a:xfrm>
+          <a:prstGeom prst="rect">
+            <a:avLst/>
+          </a:prstGeom>
+          <a:noFill/>
+        </p:spPr>
+        <p:txBody>
+          <a:bodyPr wrap="square">
+            <a:spAutoFit/>
+          </a:bodyPr>
+          <a:lstStyle/>
+          <a:p>
+            <a:pPr algn="l">
+              <a:defRPr sz="1000" b="1">
+                <a:solidFill>
+                  <a:srgbClr val="D4480B"/>
+                </a:solidFill>
+                <a:latin typeface="Noto Sans TC"/>
+              </a:defRPr>
+            </a:pPr>
+            <a:r>
+              <a:t>Model 04</a:t>
+            </a:r>
+          </a:p>
+        </p:txBody>
+      </p:sp>
+      <p:sp>
+        <p:nvSpPr>
+          <p:cNvPr id="3" name="TextBox 2"/>
+          <p:cNvSpPr txBox="1"/>
+          <p:nvPr/>
+        </p:nvSpPr>
+        <p:spPr>
+          <a:xfrm>
+            <a:off x="731520" y="868680"/>
+            <a:ext cx="10515600" cy="640080"/>
+          </a:xfrm>
+          <a:prstGeom prst="rect">
+            <a:avLst/>
+          </a:prstGeom>
+          <a:noFill/>
+        </p:spPr>
+        <p:txBody>
+          <a:bodyPr wrap="square">
+            <a:spAutoFit/>
+          </a:bodyPr>
+          <a:lstStyle/>
+          <a:p>
+            <a:pPr algn="l">
+              <a:defRPr sz="2800" b="1">
+                <a:solidFill>
+                  <a:srgbClr val="1A1A1A"/>
+                </a:solidFill>
+                <a:latin typeface="Noto Sans TC"/>
+              </a:defRPr>
+            </a:pPr>
+            <a:r>
+              <a:t>XGBoost</a:t>
+            </a:r>
+          </a:p>
+        </p:txBody>
+      </p:sp>
+      <p:sp>
+        <p:nvSpPr>
+          <p:cNvPr id="4" name="Rounded Rectangle 3"/>
+          <p:cNvSpPr/>
+          <p:nvPr/>
+        </p:nvSpPr>
+        <p:spPr>
+          <a:xfrm>
+            <a:off x="731520" y="1554480"/>
+            <a:ext cx="4846320" cy="1097280"/>
+          </a:xfrm>
+          <a:prstGeom prst="roundRect">
+            <a:avLst/>
+          </a:prstGeom>
+          <a:solidFill>
+            <a:srgbClr val="E8F5EC"/>
+          </a:solidFill>
+          <a:ln w="12700">
+            <a:solidFill>
+              <a:srgbClr val="E0E0E0"/>
+            </a:solidFill>
+          </a:ln>
+        </p:spPr>
+        <p:style>
+          <a:lnRef idx="1">
+            <a:schemeClr val="accent1"/>
+          </a:lnRef>
+          <a:fillRef idx="3">
+            <a:schemeClr val="accent1"/>
+          </a:fillRef>
+          <a:effectRef idx="2">
+            <a:schemeClr val="accent1"/>
+          </a:effectRef>
+          <a:fontRef idx="minor">
+            <a:schemeClr val="lt1"/>
+          </a:fontRef>
+        </p:style>
+        <p:txBody>
+          <a:bodyPr rtlCol="0" anchor="ctr" wrap="square" lIns="137160" tIns="91440"/>
+          <a:lstStyle/>
+          <a:p>
+            <a:pPr algn="ctr">
+              <a:defRPr sz="1100">
+                <a:solidFill>
+                  <a:srgbClr val="1A1A1A"/>
+                </a:solidFill>
+                <a:latin typeface="Noto Sans TC"/>
+              </a:defRPr>
+            </a:pPr>
+            <a:r>
+              <a:t>優點</a:t>
+            </a:r>
+            <a:br/>
+            <a:r>
+              <a:t>通常最準、速度快 可算特徵重要性</a:t>
+            </a:r>
+          </a:p>
+        </p:txBody>
+      </p:sp>
+      <p:sp>
+        <p:nvSpPr>
+          <p:cNvPr id="5" name="Rounded Rectangle 4"/>
+          <p:cNvSpPr/>
+          <p:nvPr/>
+        </p:nvSpPr>
+        <p:spPr>
+          <a:xfrm>
+            <a:off x="5760720" y="1554480"/>
+            <a:ext cx="4846320" cy="1097280"/>
+          </a:xfrm>
+          <a:prstGeom prst="roundRect">
+            <a:avLst/>
+          </a:prstGeom>
+          <a:solidFill>
+            <a:srgbClr val="FFF0E8"/>
+          </a:solidFill>
+          <a:ln w="12700">
+            <a:solidFill>
+              <a:srgbClr val="E0E0E0"/>
+            </a:solidFill>
+          </a:ln>
+        </p:spPr>
+        <p:style>
+          <a:lnRef idx="1">
+            <a:schemeClr val="accent1"/>
+          </a:lnRef>
+          <a:fillRef idx="3">
+            <a:schemeClr val="accent1"/>
+          </a:fillRef>
+          <a:effectRef idx="2">
+            <a:schemeClr val="accent1"/>
+          </a:effectRef>
+          <a:fontRef idx="minor">
+            <a:schemeClr val="lt1"/>
+          </a:fontRef>
+        </p:style>
+        <p:txBody>
+          <a:bodyPr rtlCol="0" anchor="ctr" wrap="square" lIns="137160" tIns="91440"/>
+          <a:lstStyle/>
+          <a:p>
+            <a:pPr algn="ctr">
+              <a:defRPr sz="1100">
+                <a:solidFill>
+                  <a:srgbClr val="1A1A1A"/>
+                </a:solidFill>
+                <a:latin typeface="Noto Sans TC"/>
+              </a:defRPr>
+            </a:pPr>
+            <a:r>
+              <a:t>缺點</a:t>
+            </a:r>
+            <a:br/>
+            <a:r>
+              <a:t>參數很多，調不好反而更差 解釋性低 —— 很難跟主管說清楚</a:t>
+            </a:r>
+          </a:p>
+        </p:txBody>
+      </p:sp>
+      <p:sp>
+        <p:nvSpPr>
+          <p:cNvPr id="6" name="TextBox 5"/>
+          <p:cNvSpPr txBox="1"/>
+          <p:nvPr/>
+        </p:nvSpPr>
+        <p:spPr>
+          <a:xfrm>
+            <a:off x="10058400" y="6217920"/>
+            <a:ext cx="1828800" cy="365760"/>
+          </a:xfrm>
+          <a:prstGeom prst="rect">
+            <a:avLst/>
+          </a:prstGeom>
+          <a:noFill/>
+        </p:spPr>
+        <p:txBody>
+          <a:bodyPr wrap="square">
+            <a:spAutoFit/>
+          </a:bodyPr>
+          <a:lstStyle/>
+          <a:p>
+            <a:pPr algn="r">
+              <a:defRPr sz="900" b="0">
+                <a:solidFill>
+                  <a:srgbClr val="6B6B6B"/>
+                </a:solidFill>
+                <a:latin typeface="Noto Sans TC"/>
+              </a:defRPr>
+            </a:pPr>
+            <a:r>
+              <a:t>24 / 35</a:t>
+            </a:r>
+          </a:p>
+        </p:txBody>
+      </p:sp>
+    </p:spTree>
+  </p:cSld>
+  <p:clrMapOvr>
+    <a:masterClrMapping/>
+  </p:clrMapOvr>
+</p:sld>
+</file>
+
+<file path=ppt/slides/slide26.xml><?xml version="1.0" encoding="utf-8"?>
 <p:sld xmlns:a="http://schemas.openxmlformats.org/drawingml/2006/main" xmlns:p="http://schemas.openxmlformats.org/presentationml/2006/main" xmlns:r="http://schemas.openxmlformats.org/officeDocument/2006/relationships">
   <p:cSld>
     <p:bg>
@@ -8437,7 +9231,7 @@
 </p:sld>
 </file>
 
-<file path=ppt/slides/slide26.xml><?xml version="1.0" encoding="utf-8"?>
+<file path=ppt/slides/slide27.xml><?xml version="1.0" encoding="utf-8"?>
 <p:sld xmlns:a="http://schemas.openxmlformats.org/drawingml/2006/main" xmlns:p="http://schemas.openxmlformats.org/presentationml/2006/main" xmlns:r="http://schemas.openxmlformats.org/officeDocument/2006/relationships">
   <p:cSld>
     <p:bg>
@@ -8486,7 +9280,7 @@
               </a:defRPr>
             </a:pPr>
             <a:r>
-              <a:t>Part 04</a:t>
+              <a:t>Part 03</a:t>
             </a:r>
           </a:p>
         </p:txBody>
@@ -8558,7 +9352,7 @@
               </a:defRPr>
             </a:pPr>
             <a:r>
-              <a:t>動手挑戰 Benchmark</a:t>
+              <a:t>白飯煮好了，換你們炒飯</a:t>
             </a:r>
           </a:p>
         </p:txBody>
@@ -8595,317 +9389,6 @@
             </a:pPr>
             <a:r>
               <a:t>26 / 35</a:t>
-            </a:r>
-          </a:p>
-        </p:txBody>
-      </p:sp>
-    </p:spTree>
-  </p:cSld>
-  <p:clrMapOvr>
-    <a:masterClrMapping/>
-  </p:clrMapOvr>
-</p:sld>
-</file>
-
-<file path=ppt/slides/slide27.xml><?xml version="1.0" encoding="utf-8"?>
-<p:sld xmlns:a="http://schemas.openxmlformats.org/drawingml/2006/main" xmlns:p="http://schemas.openxmlformats.org/presentationml/2006/main" xmlns:r="http://schemas.openxmlformats.org/officeDocument/2006/relationships">
-  <p:cSld>
-    <p:bg>
-      <p:bgPr>
-        <a:solidFill>
-          <a:srgbClr val="FFFDF7"/>
-        </a:solidFill>
-        <a:effectLst/>
-      </p:bgPr>
-    </p:bg>
-    <p:spTree>
-      <p:nvGrpSpPr>
-        <p:cNvPr id="1" name=""/>
-        <p:cNvGrpSpPr/>
-        <p:nvPr/>
-      </p:nvGrpSpPr>
-      <p:grpSpPr/>
-      <p:sp>
-        <p:nvSpPr>
-          <p:cNvPr id="2" name="TextBox 1"/>
-          <p:cNvSpPr txBox="1"/>
-          <p:nvPr/>
-        </p:nvSpPr>
-        <p:spPr>
-          <a:xfrm>
-            <a:off x="731520" y="548640"/>
-            <a:ext cx="2743200" cy="320040"/>
-          </a:xfrm>
-          <a:prstGeom prst="rect">
-            <a:avLst/>
-          </a:prstGeom>
-          <a:noFill/>
-        </p:spPr>
-        <p:txBody>
-          <a:bodyPr wrap="square">
-            <a:spAutoFit/>
-          </a:bodyPr>
-          <a:lstStyle/>
-          <a:p>
-            <a:pPr algn="l">
-              <a:defRPr sz="1000" b="1">
-                <a:solidFill>
-                  <a:srgbClr val="D4480B"/>
-                </a:solidFill>
-                <a:latin typeface="Noto Sans TC"/>
-              </a:defRPr>
-            </a:pPr>
-            <a:r>
-              <a:t>Challenge</a:t>
-            </a:r>
-          </a:p>
-        </p:txBody>
-      </p:sp>
-      <p:sp>
-        <p:nvSpPr>
-          <p:cNvPr id="3" name="TextBox 2"/>
-          <p:cNvSpPr txBox="1"/>
-          <p:nvPr/>
-        </p:nvSpPr>
-        <p:spPr>
-          <a:xfrm>
-            <a:off x="731520" y="868680"/>
-            <a:ext cx="10515600" cy="640080"/>
-          </a:xfrm>
-          <a:prstGeom prst="rect">
-            <a:avLst/>
-          </a:prstGeom>
-          <a:noFill/>
-        </p:spPr>
-        <p:txBody>
-          <a:bodyPr wrap="square">
-            <a:spAutoFit/>
-          </a:bodyPr>
-          <a:lstStyle/>
-          <a:p>
-            <a:pPr algn="l">
-              <a:defRPr sz="2800" b="1">
-                <a:solidFill>
-                  <a:srgbClr val="1A1A1A"/>
-                </a:solidFill>
-                <a:latin typeface="Noto Sans TC"/>
-              </a:defRPr>
-            </a:pPr>
-            <a:r>
-              <a:t>實作任務</a:t>
-            </a:r>
-          </a:p>
-        </p:txBody>
-      </p:sp>
-      <p:sp>
-        <p:nvSpPr>
-          <p:cNvPr id="4" name="Rounded Rectangle 3"/>
-          <p:cNvSpPr/>
-          <p:nvPr/>
-        </p:nvSpPr>
-        <p:spPr>
-          <a:xfrm>
-            <a:off x="731520" y="1554480"/>
-            <a:ext cx="3169919" cy="1097280"/>
-          </a:xfrm>
-          <a:prstGeom prst="roundRect">
-            <a:avLst/>
-          </a:prstGeom>
-          <a:solidFill>
-            <a:srgbClr val="FFFFFF"/>
-          </a:solidFill>
-          <a:ln w="12700">
-            <a:solidFill>
-              <a:srgbClr val="E0E0E0"/>
-            </a:solidFill>
-          </a:ln>
-        </p:spPr>
-        <p:style>
-          <a:lnRef idx="1">
-            <a:schemeClr val="accent1"/>
-          </a:lnRef>
-          <a:fillRef idx="3">
-            <a:schemeClr val="accent1"/>
-          </a:fillRef>
-          <a:effectRef idx="2">
-            <a:schemeClr val="accent1"/>
-          </a:effectRef>
-          <a:fontRef idx="minor">
-            <a:schemeClr val="lt1"/>
-          </a:fontRef>
-        </p:style>
-        <p:txBody>
-          <a:bodyPr rtlCol="0" anchor="ctr" wrap="square" lIns="137160" tIns="91440"/>
-          <a:lstStyle/>
-          <a:p>
-            <a:pPr algn="ctr">
-              <a:defRPr sz="1100">
-                <a:solidFill>
-                  <a:srgbClr val="1A1A1A"/>
-                </a:solidFill>
-                <a:latin typeface="Noto Sans TC"/>
-              </a:defRPr>
-            </a:pPr>
-            <a:r>
-              <a:t>自選 ≥ 1 個進階模型</a:t>
-            </a:r>
-            <a:br/>
-            <a:r>
-              <a:t>Decision Tree / Random Forest / SVM / XGBoost</a:t>
-            </a:r>
-          </a:p>
-        </p:txBody>
-      </p:sp>
-      <p:sp>
-        <p:nvSpPr>
-          <p:cNvPr id="5" name="Rounded Rectangle 4"/>
-          <p:cNvSpPr/>
-          <p:nvPr/>
-        </p:nvSpPr>
-        <p:spPr>
-          <a:xfrm>
-            <a:off x="4084319" y="1554480"/>
-            <a:ext cx="3169919" cy="1097280"/>
-          </a:xfrm>
-          <a:prstGeom prst="roundRect">
-            <a:avLst/>
-          </a:prstGeom>
-          <a:solidFill>
-            <a:srgbClr val="FFFFFF"/>
-          </a:solidFill>
-          <a:ln w="12700">
-            <a:solidFill>
-              <a:srgbClr val="E0E0E0"/>
-            </a:solidFill>
-          </a:ln>
-        </p:spPr>
-        <p:style>
-          <a:lnRef idx="1">
-            <a:schemeClr val="accent1"/>
-          </a:lnRef>
-          <a:fillRef idx="3">
-            <a:schemeClr val="accent1"/>
-          </a:fillRef>
-          <a:effectRef idx="2">
-            <a:schemeClr val="accent1"/>
-          </a:effectRef>
-          <a:fontRef idx="minor">
-            <a:schemeClr val="lt1"/>
-          </a:fontRef>
-        </p:style>
-        <p:txBody>
-          <a:bodyPr rtlCol="0" anchor="ctr" wrap="square" lIns="137160" tIns="91440"/>
-          <a:lstStyle/>
-          <a:p>
-            <a:pPr algn="ctr">
-              <a:defRPr sz="1100">
-                <a:solidFill>
-                  <a:srgbClr val="1A1A1A"/>
-                </a:solidFill>
-                <a:latin typeface="Noto Sans TC"/>
-              </a:defRPr>
-            </a:pPr>
-            <a:r>
-              <a:t>挑戰 LR Benchmark</a:t>
-            </a:r>
-            <a:br/>
-            <a:r>
-              <a:t>用相同資料、相同切分，比較四大指標</a:t>
-            </a:r>
-          </a:p>
-        </p:txBody>
-      </p:sp>
-      <p:sp>
-        <p:nvSpPr>
-          <p:cNvPr id="6" name="Rounded Rectangle 5"/>
-          <p:cNvSpPr/>
-          <p:nvPr/>
-        </p:nvSpPr>
-        <p:spPr>
-          <a:xfrm>
-            <a:off x="7437118" y="1554480"/>
-            <a:ext cx="3169919" cy="1097280"/>
-          </a:xfrm>
-          <a:prstGeom prst="roundRect">
-            <a:avLst/>
-          </a:prstGeom>
-          <a:solidFill>
-            <a:srgbClr val="FFFFFF"/>
-          </a:solidFill>
-          <a:ln w="12700">
-            <a:solidFill>
-              <a:srgbClr val="E0E0E0"/>
-            </a:solidFill>
-          </a:ln>
-        </p:spPr>
-        <p:style>
-          <a:lnRef idx="1">
-            <a:schemeClr val="accent1"/>
-          </a:lnRef>
-          <a:fillRef idx="3">
-            <a:schemeClr val="accent1"/>
-          </a:fillRef>
-          <a:effectRef idx="2">
-            <a:schemeClr val="accent1"/>
-          </a:effectRef>
-          <a:fontRef idx="minor">
-            <a:schemeClr val="lt1"/>
-          </a:fontRef>
-        </p:style>
-        <p:txBody>
-          <a:bodyPr rtlCol="0" anchor="ctr" wrap="square" lIns="137160" tIns="91440"/>
-          <a:lstStyle/>
-          <a:p>
-            <a:pPr algn="ctr">
-              <a:defRPr sz="1100">
-                <a:solidFill>
-                  <a:srgbClr val="1A1A1A"/>
-                </a:solidFill>
-                <a:latin typeface="Noto Sans TC"/>
-              </a:defRPr>
-            </a:pPr>
-            <a:r>
-              <a:t>工具：Antigravity Vibe Coding</a:t>
-            </a:r>
-            <a:br/>
-            <a:r>
-              <a:t>用中文 Prompt 指揮 AI 幫你完成</a:t>
-            </a:r>
-          </a:p>
-        </p:txBody>
-      </p:sp>
-      <p:sp>
-        <p:nvSpPr>
-          <p:cNvPr id="7" name="TextBox 6"/>
-          <p:cNvSpPr txBox="1"/>
-          <p:nvPr/>
-        </p:nvSpPr>
-        <p:spPr>
-          <a:xfrm>
-            <a:off x="10058400" y="6217920"/>
-            <a:ext cx="1828800" cy="365760"/>
-          </a:xfrm>
-          <a:prstGeom prst="rect">
-            <a:avLst/>
-          </a:prstGeom>
-          <a:noFill/>
-        </p:spPr>
-        <p:txBody>
-          <a:bodyPr wrap="square">
-            <a:spAutoFit/>
-          </a:bodyPr>
-          <a:lstStyle/>
-          <a:p>
-            <a:pPr algn="r">
-              <a:defRPr sz="900" b="0">
-                <a:solidFill>
-                  <a:srgbClr val="6B6B6B"/>
-                </a:solidFill>
-                <a:latin typeface="Noto Sans TC"/>
-              </a:defRPr>
-            </a:pPr>
-            <a:r>
-              <a:t>27 / 35</a:t>
             </a:r>
           </a:p>
         </p:txBody>
@@ -8967,7 +9450,7 @@
               </a:defRPr>
             </a:pPr>
             <a:r>
-              <a:t>Prompt Templates</a:t>
+              <a:t>Challenge</a:t>
             </a:r>
           </a:p>
         </p:txBody>
@@ -9003,7 +9486,7 @@
               </a:defRPr>
             </a:pPr>
             <a:r>
-              <a:t>Prompt 範本（上）</a:t>
+              <a:t>你的任務：打敗白飯</a:t>
             </a:r>
           </a:p>
         </p:txBody>
@@ -9017,16 +9500,18 @@
         <p:spPr>
           <a:xfrm>
             <a:off x="731520" y="1554480"/>
-            <a:ext cx="10515600" cy="457200"/>
+            <a:ext cx="3169919" cy="1097280"/>
           </a:xfrm>
           <a:prstGeom prst="roundRect">
             <a:avLst/>
           </a:prstGeom>
           <a:solidFill>
-            <a:srgbClr val="F0F0F0"/>
+            <a:srgbClr val="FFFFFF"/>
           </a:solidFill>
-          <a:ln>
-            <a:noFill/>
+          <a:ln w="12700">
+            <a:solidFill>
+              <a:srgbClr val="E0E0E0"/>
+            </a:solidFill>
           </a:ln>
         </p:spPr>
         <p:style>
@@ -9044,19 +9529,23 @@
           </a:fontRef>
         </p:style>
         <p:txBody>
-          <a:bodyPr rtlCol="0" anchor="ctr" wrap="square" lIns="137160"/>
+          <a:bodyPr rtlCol="0" anchor="ctr" wrap="square" lIns="137160" tIns="91440"/>
           <a:lstStyle/>
           <a:p>
             <a:pPr algn="ctr">
-              <a:defRPr sz="1000">
+              <a:defRPr sz="1100">
                 <a:solidFill>
                   <a:srgbClr val="1A1A1A"/>
                 </a:solidFill>
-                <a:latin typeface="Consolas"/>
-              </a:defRPr>
-            </a:pPr>
-            <a:r>
-              <a:t>用 Decision Tree（max_depth=5, random_state=42）預測 OUTCOME。 畫出混淆矩陣和 classification report， 再畫出特徵重要性排名前 10 的長條圖。</a:t>
+                <a:latin typeface="Noto Sans TC"/>
+              </a:defRPr>
+            </a:pPr>
+            <a:r>
+              <a:t>1. 從四個模型裡挑一個你覺得最厲害的</a:t>
+            </a:r>
+            <a:br/>
+            <a:r>
+              <a:t>Decision Tree / Random Forest / SVM / XGBoost</a:t>
             </a:r>
           </a:p>
         </p:txBody>
@@ -9069,17 +9558,19 @@
         </p:nvSpPr>
         <p:spPr>
           <a:xfrm>
-            <a:off x="731520" y="2057400"/>
-            <a:ext cx="10515600" cy="457200"/>
+            <a:off x="4084319" y="1554480"/>
+            <a:ext cx="3169919" cy="1097280"/>
           </a:xfrm>
           <a:prstGeom prst="roundRect">
             <a:avLst/>
           </a:prstGeom>
           <a:solidFill>
-            <a:srgbClr val="F0F0F0"/>
+            <a:srgbClr val="FFFFFF"/>
           </a:solidFill>
-          <a:ln>
-            <a:noFill/>
+          <a:ln w="12700">
+            <a:solidFill>
+              <a:srgbClr val="E0E0E0"/>
+            </a:solidFill>
           </a:ln>
         </p:spPr>
         <p:style>
@@ -9097,26 +9588,89 @@
           </a:fontRef>
         </p:style>
         <p:txBody>
-          <a:bodyPr rtlCol="0" anchor="ctr" wrap="square" lIns="137160"/>
+          <a:bodyPr rtlCol="0" anchor="ctr" wrap="square" lIns="137160" tIns="91440"/>
           <a:lstStyle/>
           <a:p>
             <a:pPr algn="ctr">
-              <a:defRPr sz="1000">
+              <a:defRPr sz="1100">
                 <a:solidFill>
                   <a:srgbClr val="1A1A1A"/>
                 </a:solidFill>
-                <a:latin typeface="Consolas"/>
-              </a:defRPr>
-            </a:pPr>
-            <a:r>
-              <a:t>用 Random Forest（n_estimators=100, random_state=42）預測 OUTCOME。 印出 classification report 和混淆矩陣， 畫出特徵重要性排名。</a:t>
-            </a:r>
-          </a:p>
-        </p:txBody>
-      </p:sp>
-      <p:sp>
-        <p:nvSpPr>
-          <p:cNvPr id="6" name="TextBox 5"/>
+                <a:latin typeface="Noto Sans TC"/>
+              </a:defRPr>
+            </a:pPr>
+            <a:r>
+              <a:t>2. 用 Vibe Coding 讓 AI 幫你跑，跟 LR 比較誰猜得準</a:t>
+            </a:r>
+            <a:br/>
+            <a:r>
+              <a:t>用相同資料、相同切分（random_state = 42），比較四大指標</a:t>
+            </a:r>
+          </a:p>
+        </p:txBody>
+      </p:sp>
+      <p:sp>
+        <p:nvSpPr>
+          <p:cNvPr id="6" name="Rounded Rectangle 5"/>
+          <p:cNvSpPr/>
+          <p:nvPr/>
+        </p:nvSpPr>
+        <p:spPr>
+          <a:xfrm>
+            <a:off x="7437118" y="1554480"/>
+            <a:ext cx="3169919" cy="1097280"/>
+          </a:xfrm>
+          <a:prstGeom prst="roundRect">
+            <a:avLst/>
+          </a:prstGeom>
+          <a:solidFill>
+            <a:srgbClr val="FFFFFF"/>
+          </a:solidFill>
+          <a:ln w="12700">
+            <a:solidFill>
+              <a:srgbClr val="E0E0E0"/>
+            </a:solidFill>
+          </a:ln>
+        </p:spPr>
+        <p:style>
+          <a:lnRef idx="1">
+            <a:schemeClr val="accent1"/>
+          </a:lnRef>
+          <a:fillRef idx="3">
+            <a:schemeClr val="accent1"/>
+          </a:fillRef>
+          <a:effectRef idx="2">
+            <a:schemeClr val="accent1"/>
+          </a:effectRef>
+          <a:fontRef idx="minor">
+            <a:schemeClr val="lt1"/>
+          </a:fontRef>
+        </p:style>
+        <p:txBody>
+          <a:bodyPr rtlCol="0" anchor="ctr" wrap="square" lIns="137160" tIns="91440"/>
+          <a:lstStyle/>
+          <a:p>
+            <a:pPr algn="ctr">
+              <a:defRPr sz="1100">
+                <a:solidFill>
+                  <a:srgbClr val="1A1A1A"/>
+                </a:solidFill>
+                <a:latin typeface="Noto Sans TC"/>
+              </a:defRPr>
+            </a:pPr>
+            <a:r>
+              <a:t>3. 如果你的模型贏了 — 恭喜；如果沒贏 — 那也是一個發現</a:t>
+            </a:r>
+            <a:br/>
+            <a:r>
+              <a:t>重點不是贏，是你能說出為什麼</a:t>
+            </a:r>
+          </a:p>
+        </p:txBody>
+      </p:sp>
+      <p:sp>
+        <p:nvSpPr>
+          <p:cNvPr id="7" name="TextBox 6"/>
           <p:cNvSpPr txBox="1"/>
           <p:nvPr/>
         </p:nvSpPr>
@@ -9145,7 +9699,7 @@
               </a:defRPr>
             </a:pPr>
             <a:r>
-              <a:t>28 / 35</a:t>
+              <a:t>27 / 35</a:t>
             </a:r>
           </a:p>
         </p:txBody>
@@ -9243,14 +9797,53 @@
               </a:defRPr>
             </a:pPr>
             <a:r>
-              <a:t>Prompt 範本（下）</a:t>
-            </a:r>
-          </a:p>
-        </p:txBody>
-      </p:sp>
-      <p:sp>
-        <p:nvSpPr>
-          <p:cNvPr id="4" name="Rounded Rectangle 3"/>
+              <a:t>Prompt 範本（直接複製貼上）</a:t>
+            </a:r>
+          </a:p>
+        </p:txBody>
+      </p:sp>
+      <p:sp>
+        <p:nvSpPr>
+          <p:cNvPr id="4" name="TextBox 3"/>
+          <p:cNvSpPr txBox="1"/>
+          <p:nvPr/>
+        </p:nvSpPr>
+        <p:spPr>
+          <a:xfrm>
+            <a:off x="731520" y="1554480"/>
+            <a:ext cx="10515600" cy="4572000"/>
+          </a:xfrm>
+          <a:prstGeom prst="rect">
+            <a:avLst/>
+          </a:prstGeom>
+          <a:noFill/>
+        </p:spPr>
+        <p:txBody>
+          <a:bodyPr wrap="square">
+            <a:spAutoFit/>
+          </a:bodyPr>
+          <a:lstStyle/>
+          <a:p>
+            <a:pPr>
+              <a:spcAft>
+                <a:spcPts val="600"/>
+              </a:spcAft>
+              <a:defRPr sz="1300">
+                <a:solidFill>
+                  <a:srgbClr val="6B6B6B"/>
+                </a:solidFill>
+                <a:latin typeface="Noto Sans TC"/>
+              </a:defRPr>
+            </a:pPr>
+            <a:r>
+              <a:t>• → SVM 無法直接算特徵重要性，這是它「黑箱」的代價</a:t>
+            </a:r>
+          </a:p>
+        </p:txBody>
+      </p:sp>
+      <p:sp>
+        <p:nvSpPr>
+          <p:cNvPr id="5" name="Rounded Rectangle 4"/>
           <p:cNvSpPr/>
           <p:nvPr/>
         </p:nvSpPr>
@@ -9296,14 +9889,14 @@
               </a:defRPr>
             </a:pPr>
             <a:r>
-              <a:t>用 SVM（kernel='rbf', random_state=42）預測 OUTCOME。 注意：SVM 需要做 StandardScaler 標準化。 印出 classification report 和混淆矩陣。</a:t>
-            </a:r>
-          </a:p>
-        </p:txBody>
-      </p:sp>
-      <p:sp>
-        <p:nvSpPr>
-          <p:cNvPr id="5" name="Rounded Rectangle 4"/>
+              <a:t>用 Decision Tree（max_depth=5, random_state=42）預測 OUTCOME。 印出 classification report、混淆矩陣 heatmap、特徵重要性前 10。</a:t>
+            </a:r>
+          </a:p>
+        </p:txBody>
+      </p:sp>
+      <p:sp>
+        <p:nvSpPr>
+          <p:cNvPr id="6" name="Rounded Rectangle 5"/>
           <p:cNvSpPr/>
           <p:nvPr/>
         </p:nvSpPr>
@@ -9349,14 +9942,120 @@
               </a:defRPr>
             </a:pPr>
             <a:r>
-              <a:t>用 XGBoost（n_estimators=100, max_depth=5, learning_rate=0.1, random_state=42）預測 OUTCOME。 印出 classification report、混淆矩陣， 畫出 XGBoost 的特徵重要性排名。</a:t>
-            </a:r>
-          </a:p>
-        </p:txBody>
-      </p:sp>
-      <p:sp>
-        <p:nvSpPr>
-          <p:cNvPr id="6" name="TextBox 5"/>
+              <a:t>用 Random Forest（n_estimators=100, random_state=42）預測 OUTCOME。 印出 classification report、混淆矩陣 heatmap、特徵重要性前 10。</a:t>
+            </a:r>
+          </a:p>
+        </p:txBody>
+      </p:sp>
+      <p:sp>
+        <p:nvSpPr>
+          <p:cNvPr id="7" name="Rounded Rectangle 6"/>
+          <p:cNvSpPr/>
+          <p:nvPr/>
+        </p:nvSpPr>
+        <p:spPr>
+          <a:xfrm>
+            <a:off x="731520" y="2560320"/>
+            <a:ext cx="10515600" cy="457200"/>
+          </a:xfrm>
+          <a:prstGeom prst="roundRect">
+            <a:avLst/>
+          </a:prstGeom>
+          <a:solidFill>
+            <a:srgbClr val="F0F0F0"/>
+          </a:solidFill>
+          <a:ln>
+            <a:noFill/>
+          </a:ln>
+        </p:spPr>
+        <p:style>
+          <a:lnRef idx="1">
+            <a:schemeClr val="accent1"/>
+          </a:lnRef>
+          <a:fillRef idx="3">
+            <a:schemeClr val="accent1"/>
+          </a:fillRef>
+          <a:effectRef idx="2">
+            <a:schemeClr val="accent1"/>
+          </a:effectRef>
+          <a:fontRef idx="minor">
+            <a:schemeClr val="lt1"/>
+          </a:fontRef>
+        </p:style>
+        <p:txBody>
+          <a:bodyPr rtlCol="0" anchor="ctr" wrap="square" lIns="137160"/>
+          <a:lstStyle/>
+          <a:p>
+            <a:pPr algn="ctr">
+              <a:defRPr sz="1000">
+                <a:solidFill>
+                  <a:srgbClr val="1A1A1A"/>
+                </a:solidFill>
+                <a:latin typeface="Consolas"/>
+              </a:defRPr>
+            </a:pPr>
+            <a:r>
+              <a:t>用 SVM（kernel='rbf', random_state=42）預測 OUTCOME。 印出 classification report、混淆矩陣 heatmap。</a:t>
+            </a:r>
+          </a:p>
+        </p:txBody>
+      </p:sp>
+      <p:sp>
+        <p:nvSpPr>
+          <p:cNvPr id="8" name="Rounded Rectangle 7"/>
+          <p:cNvSpPr/>
+          <p:nvPr/>
+        </p:nvSpPr>
+        <p:spPr>
+          <a:xfrm>
+            <a:off x="731520" y="3063240"/>
+            <a:ext cx="10515600" cy="457200"/>
+          </a:xfrm>
+          <a:prstGeom prst="roundRect">
+            <a:avLst/>
+          </a:prstGeom>
+          <a:solidFill>
+            <a:srgbClr val="F0F0F0"/>
+          </a:solidFill>
+          <a:ln>
+            <a:noFill/>
+          </a:ln>
+        </p:spPr>
+        <p:style>
+          <a:lnRef idx="1">
+            <a:schemeClr val="accent1"/>
+          </a:lnRef>
+          <a:fillRef idx="3">
+            <a:schemeClr val="accent1"/>
+          </a:fillRef>
+          <a:effectRef idx="2">
+            <a:schemeClr val="accent1"/>
+          </a:effectRef>
+          <a:fontRef idx="minor">
+            <a:schemeClr val="lt1"/>
+          </a:fontRef>
+        </p:style>
+        <p:txBody>
+          <a:bodyPr rtlCol="0" anchor="ctr" wrap="square" lIns="137160"/>
+          <a:lstStyle/>
+          <a:p>
+            <a:pPr algn="ctr">
+              <a:defRPr sz="1000">
+                <a:solidFill>
+                  <a:srgbClr val="1A1A1A"/>
+                </a:solidFill>
+                <a:latin typeface="Consolas"/>
+              </a:defRPr>
+            </a:pPr>
+            <a:r>
+              <a:t>用 XGBoost（n_estimators=100, max_depth=5, learning_rate=0.1, random_state=42）預測 OUTCOME。 印出 classification report、混淆矩陣 heatmap、特徵重要性前 10。</a:t>
+            </a:r>
+          </a:p>
+        </p:txBody>
+      </p:sp>
+      <p:sp>
+        <p:nvSpPr>
+          <p:cNvPr id="9" name="TextBox 8"/>
           <p:cNvSpPr txBox="1"/>
           <p:nvPr/>
         </p:nvSpPr>
@@ -9385,7 +10084,7 @@
               </a:defRPr>
             </a:pPr>
             <a:r>
-              <a:t>29 / 35</a:t>
+              <a:t>28 / 35</a:t>
             </a:r>
           </a:p>
         </p:txBody>
@@ -9447,7 +10146,7 @@
               </a:defRPr>
             </a:pPr>
             <a:r>
-              <a:t>Insight</a:t>
+              <a:t>About</a:t>
             </a:r>
           </a:p>
         </p:txBody>
@@ -9483,7 +10182,7 @@
               </a:defRPr>
             </a:pPr>
             <a:r>
-              <a:t>資料科學，其實你每天都在用</a:t>
+              <a:t>侯冠宇</a:t>
             </a:r>
           </a:p>
         </p:txBody>
@@ -9497,13 +10196,13 @@
         <p:spPr>
           <a:xfrm>
             <a:off x="731520" y="1554480"/>
-            <a:ext cx="9875520" cy="1097280"/>
+            <a:ext cx="3169919" cy="1097280"/>
           </a:xfrm>
           <a:prstGeom prst="roundRect">
             <a:avLst/>
           </a:prstGeom>
           <a:solidFill>
-            <a:srgbClr val="FFF0E8"/>
+            <a:srgbClr val="FFFFFF"/>
           </a:solidFill>
           <a:ln w="12700">
             <a:solidFill>
@@ -9538,14 +10237,148 @@
               </a:defRPr>
             </a:pPr>
             <a:r>
-              <a:t>保險版本： Netflix 猜錯頂多看一部爛片；保險公司猜錯，可能賠到脫褲</a:t>
-            </a:r>
-          </a:p>
-        </p:txBody>
-      </p:sp>
-      <p:sp>
-        <p:nvSpPr>
-          <p:cNvPr id="5" name="TextBox 4"/>
+              <a:t>[Current]</a:t>
+            </a:r>
+            <a:br/>
+            <a:r>
+              <a:t>AI 系統架構師</a:t>
+            </a:r>
+            <a:br/>
+            <a:r>
+              <a:t>喬泰科技</a:t>
+            </a:r>
+          </a:p>
+        </p:txBody>
+      </p:sp>
+      <p:sp>
+        <p:nvSpPr>
+          <p:cNvPr id="5" name="Rounded Rectangle 4"/>
+          <p:cNvSpPr/>
+          <p:nvPr/>
+        </p:nvSpPr>
+        <p:spPr>
+          <a:xfrm>
+            <a:off x="4084319" y="1554480"/>
+            <a:ext cx="3169919" cy="1097280"/>
+          </a:xfrm>
+          <a:prstGeom prst="roundRect">
+            <a:avLst/>
+          </a:prstGeom>
+          <a:solidFill>
+            <a:srgbClr val="FFFFFF"/>
+          </a:solidFill>
+          <a:ln w="12700">
+            <a:solidFill>
+              <a:srgbClr val="E0E0E0"/>
+            </a:solidFill>
+          </a:ln>
+        </p:spPr>
+        <p:style>
+          <a:lnRef idx="1">
+            <a:schemeClr val="accent1"/>
+          </a:lnRef>
+          <a:fillRef idx="3">
+            <a:schemeClr val="accent1"/>
+          </a:fillRef>
+          <a:effectRef idx="2">
+            <a:schemeClr val="accent1"/>
+          </a:effectRef>
+          <a:fontRef idx="minor">
+            <a:schemeClr val="lt1"/>
+          </a:fontRef>
+        </p:style>
+        <p:txBody>
+          <a:bodyPr rtlCol="0" anchor="ctr" wrap="square" lIns="137160" tIns="91440"/>
+          <a:lstStyle/>
+          <a:p>
+            <a:pPr algn="ctr">
+              <a:defRPr sz="1100">
+                <a:solidFill>
+                  <a:srgbClr val="1A1A1A"/>
+                </a:solidFill>
+                <a:latin typeface="Noto Sans TC"/>
+              </a:defRPr>
+            </a:pPr>
+            <a:r>
+              <a:t>[Academic]</a:t>
+            </a:r>
+            <a:br/>
+            <a:r>
+              <a:t>博士研究生</a:t>
+            </a:r>
+            <a:br/>
+            <a:r>
+              <a:t>國立高雄科技大學</a:t>
+            </a:r>
+          </a:p>
+        </p:txBody>
+      </p:sp>
+      <p:sp>
+        <p:nvSpPr>
+          <p:cNvPr id="6" name="Rounded Rectangle 5"/>
+          <p:cNvSpPr/>
+          <p:nvPr/>
+        </p:nvSpPr>
+        <p:spPr>
+          <a:xfrm>
+            <a:off x="7437118" y="1554480"/>
+            <a:ext cx="3169919" cy="1097280"/>
+          </a:xfrm>
+          <a:prstGeom prst="roundRect">
+            <a:avLst/>
+          </a:prstGeom>
+          <a:solidFill>
+            <a:srgbClr val="FFFFFF"/>
+          </a:solidFill>
+          <a:ln w="12700">
+            <a:solidFill>
+              <a:srgbClr val="E0E0E0"/>
+            </a:solidFill>
+          </a:ln>
+        </p:spPr>
+        <p:style>
+          <a:lnRef idx="1">
+            <a:schemeClr val="accent1"/>
+          </a:lnRef>
+          <a:fillRef idx="3">
+            <a:schemeClr val="accent1"/>
+          </a:fillRef>
+          <a:effectRef idx="2">
+            <a:schemeClr val="accent1"/>
+          </a:effectRef>
+          <a:fontRef idx="minor">
+            <a:schemeClr val="lt1"/>
+          </a:fontRef>
+        </p:style>
+        <p:txBody>
+          <a:bodyPr rtlCol="0" anchor="ctr" wrap="square" lIns="137160" tIns="91440"/>
+          <a:lstStyle/>
+          <a:p>
+            <a:pPr algn="ctr">
+              <a:defRPr sz="1100">
+                <a:solidFill>
+                  <a:srgbClr val="1A1A1A"/>
+                </a:solidFill>
+                <a:latin typeface="Noto Sans TC"/>
+              </a:defRPr>
+            </a:pPr>
+            <a:r>
+              <a:t>[Focus]</a:t>
+            </a:r>
+            <a:br/>
+            <a:r>
+              <a:t>金融科技 × 人工智慧</a:t>
+            </a:r>
+            <a:br/>
+            <a:r>
+              <a:t>機器學習、風險建模、自然語言處理</a:t>
+            </a:r>
+          </a:p>
+        </p:txBody>
+      </p:sp>
+      <p:sp>
+        <p:nvSpPr>
+          <p:cNvPr id="7" name="TextBox 6"/>
           <p:cNvSpPr txBox="1"/>
           <p:nvPr/>
         </p:nvSpPr>
@@ -9574,7 +10407,7 @@
               </a:defRPr>
             </a:pPr>
             <a:r>
-              <a:t>3 / 35</a:t>
+              <a:t>2 / 35</a:t>
             </a:r>
           </a:p>
         </p:txBody>
@@ -10161,100 +10994,229 @@
           </a:p>
         </p:txBody>
       </p:sp>
-      <p:sp>
-        <p:nvSpPr>
-          <p:cNvPr id="4" name="TextBox 3"/>
-          <p:cNvSpPr txBox="1"/>
-          <p:nvPr/>
-        </p:nvSpPr>
-        <p:spPr>
-          <a:xfrm>
-            <a:off x="731520" y="1554480"/>
-            <a:ext cx="10515600" cy="4572000"/>
-          </a:xfrm>
-          <a:prstGeom prst="rect">
-            <a:avLst/>
-          </a:prstGeom>
-          <a:noFill/>
-        </p:spPr>
-        <p:txBody>
-          <a:bodyPr wrap="square">
-            <a:spAutoFit/>
-          </a:bodyPr>
-          <a:lstStyle/>
-          <a:p>
-            <a:pPr>
-              <a:spcAft>
-                <a:spcPts val="600"/>
-              </a:spcAft>
-              <a:defRPr sz="1300">
-                <a:solidFill>
-                  <a:srgbClr val="6B6B6B"/>
-                </a:solidFill>
-                <a:latin typeface="Noto Sans TC"/>
-              </a:defRPr>
-            </a:pPr>
-            <a:r>
-              <a:t>• 高風險客群理賠率</a:t>
-            </a:r>
-          </a:p>
-          <a:p>
-            <a:pPr>
-              <a:spcAft>
-                <a:spcPts val="600"/>
-              </a:spcAft>
-              <a:defRPr sz="1300">
-                <a:solidFill>
-                  <a:srgbClr val="6B6B6B"/>
-                </a:solidFill>
-                <a:latin typeface="Noto Sans TC"/>
-              </a:defRPr>
-            </a:pPr>
-            <a:r>
-              <a:t>• 整體平均理賠率</a:t>
-            </a:r>
-          </a:p>
-        </p:txBody>
-      </p:sp>
+      <p:graphicFrame>
+        <p:nvGraphicFramePr>
+          <p:cNvPr id="4" name="Table 3"/>
+          <p:cNvGraphicFramePr>
+            <a:graphicFrameLocks noGrp="1"/>
+          </p:cNvGraphicFramePr>
+          <p:nvPr/>
+        </p:nvGraphicFramePr>
+        <p:xfrm>
+          <a:off x="731520" y="1554480"/>
+          <a:ext cx="10058400" cy="1600200"/>
+        </p:xfrm>
+        <a:graphic>
+          <a:graphicData uri="http://schemas.openxmlformats.org/drawingml/2006/table">
+            <a:tbl>
+              <a:tblPr firstRow="1" bandRow="1">
+                <a:tableStyleId>{5C22544A-7EE6-4342-B048-85BDC9FD1C3A}</a:tableStyleId>
+              </a:tblPr>
+              <a:tblGrid>
+                <a:gridCol w="5029200"/>
+                <a:gridCol w="5029200"/>
+              </a:tblGrid>
+              <a:tr h="320040">
+                <a:tc>
+                  <a:txBody>
+                    <a:bodyPr/>
+                    <a:lstStyle/>
+                    <a:p>
+                      <a:pPr>
+                        <a:defRPr sz="1000" b="1">
+                          <a:solidFill>
+                            <a:srgbClr val="FFFFFF"/>
+                          </a:solidFill>
+                          <a:latin typeface="Noto Sans TC"/>
+                        </a:defRPr>
+                      </a:pPr>
+                      <a:r>
+                        <a:t>模型跑出來的</a:t>
+                      </a:r>
+                    </a:p>
+                  </a:txBody>
+                  <a:tcPr>
+                    <a:solidFill>
+                      <a:srgbClr val="1A1A1A"/>
+                    </a:solidFill>
+                  </a:tcPr>
+                </a:tc>
+                <a:tc>
+                  <a:txBody>
+                    <a:bodyPr/>
+                    <a:lstStyle/>
+                    <a:p>
+                      <a:pPr>
+                        <a:defRPr sz="1000" b="1">
+                          <a:solidFill>
+                            <a:srgbClr val="FFFFFF"/>
+                          </a:solidFill>
+                          <a:latin typeface="Noto Sans TC"/>
+                        </a:defRPr>
+                      </a:pPr>
+                      <a:r>
+                        <a:t>翻譯成人話</a:t>
+                      </a:r>
+                    </a:p>
+                  </a:txBody>
+                  <a:tcPr>
+                    <a:solidFill>
+                      <a:srgbClr val="1A1A1A"/>
+                    </a:solidFill>
+                  </a:tcPr>
+                </a:tc>
+              </a:tr>
+              <a:tr h="320040">
+                <a:tc>
+                  <a:txBody>
+                    <a:bodyPr/>
+                    <a:lstStyle/>
+                    <a:p>
+                      <a:pPr>
+                        <a:defRPr sz="1000">
+                          <a:latin typeface="Noto Sans TC"/>
+                        </a:defRPr>
+                      </a:pPr>
+                      <a:r>
+                        <a:t>Recall = 0.78</a:t>
+                      </a:r>
+                    </a:p>
+                  </a:txBody>
+                  <a:tcPr/>
+                </a:tc>
+                <a:tc>
+                  <a:txBody>
+                    <a:bodyPr/>
+                    <a:lstStyle/>
+                    <a:p>
+                      <a:pPr>
+                        <a:defRPr sz="1000">
+                          <a:latin typeface="Noto Sans TC"/>
+                        </a:defRPr>
+                      </a:pPr>
+                      <a:r>
+                        <a:t>每 100 個會理賠的客戶，我們能抓到 78 個</a:t>
+                      </a:r>
+                    </a:p>
+                  </a:txBody>
+                  <a:tcPr/>
+                </a:tc>
+              </a:tr>
+              <a:tr h="320040">
+                <a:tc>
+                  <a:txBody>
+                    <a:bodyPr/>
+                    <a:lstStyle/>
+                    <a:p>
+                      <a:pPr>
+                        <a:defRPr sz="1000">
+                          <a:latin typeface="Noto Sans TC"/>
+                        </a:defRPr>
+                      </a:pPr>
+                      <a:r>
+                        <a:t>特徵重要性 #1: SPEEDING_VIOLATIONS</a:t>
+                      </a:r>
+                    </a:p>
+                  </a:txBody>
+                  <a:tcPr/>
+                </a:tc>
+                <a:tc>
+                  <a:txBody>
+                    <a:bodyPr/>
+                    <a:lstStyle/>
+                    <a:p>
+                      <a:pPr>
+                        <a:defRPr sz="1000">
+                          <a:latin typeface="Noto Sans TC"/>
+                        </a:defRPr>
+                      </a:pPr>
+                      <a:r>
+                        <a:t>超速紀錄是最強的風險信號</a:t>
+                      </a:r>
+                    </a:p>
+                  </a:txBody>
+                  <a:tcPr/>
+                </a:tc>
+              </a:tr>
+              <a:tr h="320040">
+                <a:tc>
+                  <a:txBody>
+                    <a:bodyPr/>
+                    <a:lstStyle/>
+                    <a:p>
+                      <a:pPr>
+                        <a:defRPr sz="1000">
+                          <a:latin typeface="Noto Sans TC"/>
+                        </a:defRPr>
+                      </a:pPr>
+                      <a:r>
+                        <a:t>16-25 歲 × 超速 → 理賠率 75%</a:t>
+                      </a:r>
+                    </a:p>
+                  </a:txBody>
+                  <a:tcPr/>
+                </a:tc>
+                <a:tc>
+                  <a:txBody>
+                    <a:bodyPr/>
+                    <a:lstStyle/>
+                    <a:p>
+                      <a:pPr>
+                        <a:defRPr sz="1000">
+                          <a:latin typeface="Noto Sans TC"/>
+                        </a:defRPr>
+                      </a:pPr>
+                      <a:r>
+                        <a:t>年輕 + 超速 = 高風險客群</a:t>
+                      </a:r>
+                    </a:p>
+                  </a:txBody>
+                  <a:tcPr/>
+                </a:tc>
+              </a:tr>
+              <a:tr h="320040">
+                <a:tc>
+                  <a:txBody>
+                    <a:bodyPr/>
+                    <a:lstStyle/>
+                    <a:p>
+                      <a:pPr>
+                        <a:defRPr sz="1000">
+                          <a:latin typeface="Noto Sans TC"/>
+                        </a:defRPr>
+                      </a:pPr>
+                      <a:r>
+                        <a:t>→ 報告結論</a:t>
+                      </a:r>
+                    </a:p>
+                  </a:txBody>
+                  <a:tcPr/>
+                </a:tc>
+                <a:tc>
+                  <a:txBody>
+                    <a:bodyPr/>
+                    <a:lstStyle/>
+                    <a:p>
+                      <a:pPr>
+                        <a:defRPr sz="1000">
+                          <a:latin typeface="Noto Sans TC"/>
+                        </a:defRPr>
+                      </a:pPr>
+                      <a:r>
+                        <a:t>建議調高該客群保費 30%，理賠率 75% 遠高於平均 20%</a:t>
+                      </a:r>
+                    </a:p>
+                  </a:txBody>
+                  <a:tcPr/>
+                </a:tc>
+              </a:tr>
+            </a:tbl>
+          </a:graphicData>
+        </a:graphic>
+      </p:graphicFrame>
       <p:sp>
         <p:nvSpPr>
           <p:cNvPr id="5" name="TextBox 4"/>
-          <p:cNvSpPr txBox="1"/>
-          <p:nvPr/>
-        </p:nvSpPr>
-        <p:spPr>
-          <a:xfrm>
-            <a:off x="731520" y="1554480"/>
-            <a:ext cx="10515600" cy="457200"/>
-          </a:xfrm>
-          <a:prstGeom prst="rect">
-            <a:avLst/>
-          </a:prstGeom>
-          <a:noFill/>
-        </p:spPr>
-        <p:txBody>
-          <a:bodyPr wrap="square">
-            <a:spAutoFit/>
-          </a:bodyPr>
-          <a:lstStyle/>
-          <a:p>
-            <a:pPr algn="l">
-              <a:defRPr sz="1300" b="0">
-                <a:solidFill>
-                  <a:srgbClr val="D4480B"/>
-                </a:solidFill>
-                <a:latin typeface="Noto Sans TC"/>
-              </a:defRPr>
-            </a:pPr>
-            <a:r>
-              <a:t>「「建議調高 16-25 歲且擁有超速紀錄駕駛的保費 30%，因理賠機率 75%，遠高於平均 20%」」</a:t>
-            </a:r>
-          </a:p>
-        </p:txBody>
-      </p:sp>
-      <p:sp>
-        <p:nvSpPr>
-          <p:cNvPr id="6" name="TextBox 5"/>
           <p:cNvSpPr txBox="1"/>
           <p:nvPr/>
         </p:nvSpPr>
@@ -10386,190 +11348,157 @@
           </a:p>
         </p:txBody>
       </p:sp>
-      <p:sp>
-        <p:nvSpPr>
-          <p:cNvPr id="4" name="Rounded Rectangle 3"/>
-          <p:cNvSpPr/>
-          <p:nvPr/>
-        </p:nvSpPr>
-        <p:spPr>
-          <a:xfrm>
-            <a:off x="731520" y="1554480"/>
-            <a:ext cx="3169919" cy="1097280"/>
-          </a:xfrm>
-          <a:prstGeom prst="roundRect">
-            <a:avLst/>
-          </a:prstGeom>
-          <a:solidFill>
-            <a:srgbClr val="FFF0E8"/>
-          </a:solidFill>
-          <a:ln w="12700">
-            <a:solidFill>
-              <a:srgbClr val="E0E0E0"/>
-            </a:solidFill>
-          </a:ln>
-        </p:spPr>
-        <p:style>
-          <a:lnRef idx="1">
-            <a:schemeClr val="accent1"/>
-          </a:lnRef>
-          <a:fillRef idx="3">
-            <a:schemeClr val="accent1"/>
-          </a:fillRef>
-          <a:effectRef idx="2">
-            <a:schemeClr val="accent1"/>
-          </a:effectRef>
-          <a:fontRef idx="minor">
-            <a:schemeClr val="lt1"/>
-          </a:fontRef>
-        </p:style>
-        <p:txBody>
-          <a:bodyPr rtlCol="0" anchor="ctr" wrap="square" lIns="137160" tIns="91440"/>
-          <a:lstStyle/>
-          <a:p>
-            <a:pPr algn="ctr">
-              <a:defRPr sz="1100">
-                <a:solidFill>
-                  <a:srgbClr val="1A1A1A"/>
-                </a:solidFill>
-                <a:latin typeface="Noto Sans TC"/>
-              </a:defRPr>
-            </a:pPr>
-            <a:r>
-              <a:t>[技術上做得到]</a:t>
-            </a:r>
-            <a:br/>
-            <a:r>
-              <a:t>模型顯示某族群風險高</a:t>
-            </a:r>
-            <a:br/>
-            <a:r>
-              <a:t>性別、種族都可以放進模型，而且確實有預測力</a:t>
-            </a:r>
-          </a:p>
-        </p:txBody>
-      </p:sp>
-      <p:sp>
-        <p:nvSpPr>
-          <p:cNvPr id="5" name="Rounded Rectangle 4"/>
-          <p:cNvSpPr/>
-          <p:nvPr/>
-        </p:nvSpPr>
-        <p:spPr>
-          <a:xfrm>
-            <a:off x="4084319" y="1554480"/>
-            <a:ext cx="3169919" cy="1097280"/>
-          </a:xfrm>
-          <a:prstGeom prst="roundRect">
-            <a:avLst/>
-          </a:prstGeom>
-          <a:solidFill>
-            <a:srgbClr val="FFFFFF"/>
-          </a:solidFill>
-          <a:ln w="12700">
-            <a:solidFill>
-              <a:srgbClr val="E0E0E0"/>
-            </a:solidFill>
-          </a:ln>
-        </p:spPr>
-        <p:style>
-          <a:lnRef idx="1">
-            <a:schemeClr val="accent1"/>
-          </a:lnRef>
-          <a:fillRef idx="3">
-            <a:schemeClr val="accent1"/>
-          </a:fillRef>
-          <a:effectRef idx="2">
-            <a:schemeClr val="accent1"/>
-          </a:effectRef>
-          <a:fontRef idx="minor">
-            <a:schemeClr val="lt1"/>
-          </a:fontRef>
-        </p:style>
-        <p:txBody>
-          <a:bodyPr rtlCol="0" anchor="ctr" wrap="square" lIns="137160" tIns="91440"/>
-          <a:lstStyle/>
-          <a:p>
-            <a:pPr algn="ctr">
-              <a:defRPr sz="1100">
-                <a:solidFill>
-                  <a:srgbClr val="1A1A1A"/>
-                </a:solidFill>
-                <a:latin typeface="Noto Sans TC"/>
-              </a:defRPr>
-            </a:pPr>
-            <a:r>
-              <a:t>[倫理上不應該]</a:t>
-            </a:r>
-            <a:br/>
-            <a:r>
-              <a:t>保險歧視 &amp; 公平性</a:t>
-            </a:r>
-            <a:br/>
-            <a:r>
-              <a:t>先天特徵不能差別定價。 公平待客原則 是金管會要求。</a:t>
-            </a:r>
-          </a:p>
-        </p:txBody>
-      </p:sp>
-      <p:sp>
-        <p:nvSpPr>
-          <p:cNvPr id="6" name="Rounded Rectangle 5"/>
-          <p:cNvSpPr/>
-          <p:nvPr/>
-        </p:nvSpPr>
-        <p:spPr>
-          <a:xfrm>
-            <a:off x="7437118" y="1554480"/>
-            <a:ext cx="3169919" cy="1097280"/>
-          </a:xfrm>
-          <a:prstGeom prst="roundRect">
-            <a:avLst/>
-          </a:prstGeom>
-          <a:solidFill>
-            <a:srgbClr val="FFF0E8"/>
-          </a:solidFill>
-          <a:ln w="12700">
-            <a:solidFill>
-              <a:srgbClr val="E0E0E0"/>
-            </a:solidFill>
-          </a:ln>
-        </p:spPr>
-        <p:style>
-          <a:lnRef idx="1">
-            <a:schemeClr val="accent1"/>
-          </a:lnRef>
-          <a:fillRef idx="3">
-            <a:schemeClr val="accent1"/>
-          </a:fillRef>
-          <a:effectRef idx="2">
-            <a:schemeClr val="accent1"/>
-          </a:effectRef>
-          <a:fontRef idx="minor">
-            <a:schemeClr val="lt1"/>
-          </a:fontRef>
-        </p:style>
-        <p:txBody>
-          <a:bodyPr rtlCol="0" anchor="ctr" wrap="square" lIns="137160" tIns="91440"/>
-          <a:lstStyle/>
-          <a:p>
-            <a:pPr algn="ctr">
-              <a:defRPr sz="1100">
-                <a:solidFill>
-                  <a:srgbClr val="1A1A1A"/>
-                </a:solidFill>
-                <a:latin typeface="Noto Sans TC"/>
-              </a:defRPr>
-            </a:pPr>
-            <a:r>
-              <a:t>做法： 直接拿掉不該用的變數，或只用於內部分析不用來定價 AI 倫理不只保險： 招聘、貸款、刑事判決都面臨演算法偏見 — 你們這一代一定會遇到</a:t>
-            </a:r>
-          </a:p>
-        </p:txBody>
-      </p:sp>
-      <p:sp>
-        <p:nvSpPr>
-          <p:cNvPr id="7" name="TextBox 6"/>
+      <p:graphicFrame>
+        <p:nvGraphicFramePr>
+          <p:cNvPr id="4" name="Table 3"/>
+          <p:cNvGraphicFramePr>
+            <a:graphicFrameLocks noGrp="1"/>
+          </p:cNvGraphicFramePr>
+          <p:nvPr/>
+        </p:nvGraphicFramePr>
+        <p:xfrm>
+          <a:off x="731520" y="1554480"/>
+          <a:ext cx="10058400" cy="960119"/>
+        </p:xfrm>
+        <a:graphic>
+          <a:graphicData uri="http://schemas.openxmlformats.org/drawingml/2006/table">
+            <a:tbl>
+              <a:tblPr firstRow="1" bandRow="1">
+                <a:tableStyleId>{5C22544A-7EE6-4342-B048-85BDC9FD1C3A}</a:tableStyleId>
+              </a:tblPr>
+              <a:tblGrid>
+                <a:gridCol w="5029200"/>
+                <a:gridCol w="5029200"/>
+              </a:tblGrid>
+              <a:tr h="320039">
+                <a:tc>
+                  <a:txBody>
+                    <a:bodyPr/>
+                    <a:lstStyle/>
+                    <a:p>
+                      <a:pPr>
+                        <a:defRPr sz="1000" b="1">
+                          <a:solidFill>
+                            <a:srgbClr val="FFFFFF"/>
+                          </a:solidFill>
+                          <a:latin typeface="Noto Sans TC"/>
+                        </a:defRPr>
+                      </a:pPr>
+                      <a:r>
+                        <a:t>技術事實</a:t>
+                      </a:r>
+                    </a:p>
+                  </a:txBody>
+                  <a:tcPr>
+                    <a:solidFill>
+                      <a:srgbClr val="1A1A1A"/>
+                    </a:solidFill>
+                  </a:tcPr>
+                </a:tc>
+                <a:tc>
+                  <a:txBody>
+                    <a:bodyPr/>
+                    <a:lstStyle/>
+                    <a:p>
+                      <a:pPr>
+                        <a:defRPr sz="1000" b="1">
+                          <a:solidFill>
+                            <a:srgbClr val="FFFFFF"/>
+                          </a:solidFill>
+                          <a:latin typeface="Noto Sans TC"/>
+                        </a:defRPr>
+                      </a:pPr>
+                      <a:r>
+                        <a:t>但你不能這樣做</a:t>
+                      </a:r>
+                    </a:p>
+                  </a:txBody>
+                  <a:tcPr>
+                    <a:solidFill>
+                      <a:srgbClr val="1A1A1A"/>
+                    </a:solidFill>
+                  </a:tcPr>
+                </a:tc>
+              </a:tr>
+              <a:tr h="320039">
+                <a:tc>
+                  <a:txBody>
+                    <a:bodyPr/>
+                    <a:lstStyle/>
+                    <a:p>
+                      <a:pPr>
+                        <a:defRPr sz="1000">
+                          <a:latin typeface="Noto Sans TC"/>
+                        </a:defRPr>
+                      </a:pPr>
+                      <a:r>
+                        <a:t>模型說：某族群理賠率高 40%</a:t>
+                      </a:r>
+                    </a:p>
+                  </a:txBody>
+                  <a:tcPr/>
+                </a:tc>
+                <a:tc>
+                  <a:txBody>
+                    <a:bodyPr/>
+                    <a:lstStyle/>
+                    <a:p>
+                      <a:pPr>
+                        <a:defRPr sz="1000">
+                          <a:latin typeface="Noto Sans TC"/>
+                        </a:defRPr>
+                      </a:pPr>
+                      <a:r>
+                        <a:t>用族群定價 = 保險歧視，金管會罰錢</a:t>
+                      </a:r>
+                    </a:p>
+                  </a:txBody>
+                  <a:tcPr/>
+                </a:tc>
+              </a:tr>
+              <a:tr h="320041">
+                <a:tc>
+                  <a:txBody>
+                    <a:bodyPr/>
+                    <a:lstStyle/>
+                    <a:p>
+                      <a:pPr>
+                        <a:defRPr sz="1000">
+                          <a:latin typeface="Noto Sans TC"/>
+                        </a:defRPr>
+                      </a:pPr>
+                      <a:r>
+                        <a:t>GENDER 放進模型，準確度 +1.5%</a:t>
+                      </a:r>
+                    </a:p>
+                  </a:txBody>
+                  <a:tcPr/>
+                </a:tc>
+                <a:tc>
+                  <a:txBody>
+                    <a:bodyPr/>
+                    <a:lstStyle/>
+                    <a:p>
+                      <a:pPr>
+                        <a:defRPr sz="1000">
+                          <a:latin typeface="Noto Sans TC"/>
+                        </a:defRPr>
+                      </a:pPr>
+                      <a:r>
+                        <a:t>多 1.5% 的準確度，換一張裁罰公告，值得嗎？</a:t>
+                      </a:r>
+                    </a:p>
+                  </a:txBody>
+                  <a:tcPr/>
+                </a:tc>
+              </a:tr>
+            </a:tbl>
+          </a:graphicData>
+        </a:graphic>
+      </p:graphicFrame>
+      <p:sp>
+        <p:nvSpPr>
+          <p:cNvPr id="5" name="TextBox 4"/>
           <p:cNvSpPr txBox="1"/>
           <p:nvPr/>
         </p:nvSpPr>
@@ -10940,7 +11869,39 @@
               </a:defRPr>
             </a:pPr>
             <a:r>
-              <a:t>• 統計素養和商業直覺，才是你們真正的競爭力。 AI 取代不了會思考的人，只會取代不願意思考的人。</a:t>
+              <a:t>• 用 AI 完成一份完整的 EDA 和模型分析</a:t>
+            </a:r>
+          </a:p>
+          <a:p>
+            <a:pPr>
+              <a:spcAft>
+                <a:spcPts val="600"/>
+              </a:spcAft>
+              <a:defRPr sz="1300">
+                <a:solidFill>
+                  <a:srgbClr val="6B6B6B"/>
+                </a:solidFill>
+                <a:latin typeface="Noto Sans TC"/>
+              </a:defRPr>
+            </a:pPr>
+            <a:r>
+              <a:t>• 知道五種模型的 trade-off，能判斷哪個適合產險</a:t>
+            </a:r>
+          </a:p>
+          <a:p>
+            <a:pPr>
+              <a:spcAft>
+                <a:spcPts val="600"/>
+              </a:spcAft>
+              <a:defRPr sz="1300">
+                <a:solidFill>
+                  <a:srgbClr val="6B6B6B"/>
+                </a:solidFill>
+                <a:latin typeface="Noto Sans TC"/>
+              </a:defRPr>
+            </a:pPr>
+            <a:r>
+              <a:t>• 能把分析結果翻譯成老闆聽得懂的話</a:t>
             </a:r>
           </a:p>
         </p:txBody>
@@ -11037,9 +11998,6 @@
                 <a:latin typeface="Noto Sans TC"/>
               </a:defRPr>
             </a:pPr>
-            <a:r>
-              <a:t>謝謝大家</a:t>
-            </a:r>
           </a:p>
         </p:txBody>
       </p:sp>
@@ -11074,7 +12032,7 @@
               </a:defRPr>
             </a:pPr>
             <a:r>
-              <a:t>侯冠宇</a:t>
+              <a:t>今天願意花三小時動手做分析的人， 未來不會被 AI 取代。 期待看到你們的作品。</a:t>
             </a:r>
           </a:p>
         </p:txBody>
@@ -11172,7 +12130,7 @@
               </a:defRPr>
             </a:pPr>
             <a:r>
-              <a:t>Concept</a:t>
+              <a:t>Insight</a:t>
             </a:r>
           </a:p>
         </p:txBody>
@@ -11208,7 +12166,7 @@
               </a:defRPr>
             </a:pPr>
             <a:r>
-              <a:t>資料探勘 = 淘金</a:t>
+              <a:t>資料科學，其實你每天都在用</a:t>
             </a:r>
           </a:p>
         </p:txBody>
@@ -11222,7 +12180,7 @@
         <p:spPr>
           <a:xfrm>
             <a:off x="731520" y="1554480"/>
-            <a:ext cx="3169919" cy="1097280"/>
+            <a:ext cx="9875520" cy="1097280"/>
           </a:xfrm>
           <a:prstGeom prst="roundRect">
             <a:avLst/>
@@ -11263,124 +12221,14 @@
               </a:defRPr>
             </a:pPr>
             <a:r>
-              <a:t>蝦皮的金子： 買手機殼的人 60% 也買螢幕貼 → 一起推薦</a:t>
-            </a:r>
-          </a:p>
-        </p:txBody>
-      </p:sp>
-      <p:sp>
-        <p:nvSpPr>
-          <p:cNvPr id="5" name="Rounded Rectangle 4"/>
-          <p:cNvSpPr/>
-          <p:nvPr/>
-        </p:nvSpPr>
-        <p:spPr>
-          <a:xfrm>
-            <a:off x="4084319" y="1554480"/>
-            <a:ext cx="3169919" cy="1097280"/>
-          </a:xfrm>
-          <a:prstGeom prst="roundRect">
-            <a:avLst/>
-          </a:prstGeom>
-          <a:solidFill>
-            <a:srgbClr val="FFF0E8"/>
-          </a:solidFill>
-          <a:ln w="12700">
-            <a:solidFill>
-              <a:srgbClr val="E0E0E0"/>
-            </a:solidFill>
-          </a:ln>
-        </p:spPr>
-        <p:style>
-          <a:lnRef idx="1">
-            <a:schemeClr val="accent1"/>
-          </a:lnRef>
-          <a:fillRef idx="3">
-            <a:schemeClr val="accent1"/>
-          </a:fillRef>
-          <a:effectRef idx="2">
-            <a:schemeClr val="accent1"/>
-          </a:effectRef>
-          <a:fontRef idx="minor">
-            <a:schemeClr val="lt1"/>
-          </a:fontRef>
-        </p:style>
-        <p:txBody>
-          <a:bodyPr rtlCol="0" anchor="ctr" wrap="square" lIns="137160" tIns="91440"/>
-          <a:lstStyle/>
-          <a:p>
-            <a:pPr algn="ctr">
-              <a:defRPr sz="1100">
-                <a:solidFill>
-                  <a:srgbClr val="1A1A1A"/>
-                </a:solidFill>
-                <a:latin typeface="Noto Sans TC"/>
-              </a:defRPr>
-            </a:pPr>
-            <a:r>
-              <a:t>保險的金子： 「年輕 + 超速 + 跑車 = 高風險」→ 加費！</a:t>
-            </a:r>
-          </a:p>
-        </p:txBody>
-      </p:sp>
-      <p:sp>
-        <p:nvSpPr>
-          <p:cNvPr id="6" name="Rounded Rectangle 5"/>
-          <p:cNvSpPr/>
-          <p:nvPr/>
-        </p:nvSpPr>
-        <p:spPr>
-          <a:xfrm>
-            <a:off x="7437118" y="1554480"/>
-            <a:ext cx="3169919" cy="1097280"/>
-          </a:xfrm>
-          <a:prstGeom prst="roundRect">
-            <a:avLst/>
-          </a:prstGeom>
-          <a:solidFill>
-            <a:srgbClr val="E8F5EC"/>
-          </a:solidFill>
-          <a:ln w="12700">
-            <a:solidFill>
-              <a:srgbClr val="E0E0E0"/>
-            </a:solidFill>
-          </a:ln>
-        </p:spPr>
-        <p:style>
-          <a:lnRef idx="1">
-            <a:schemeClr val="accent1"/>
-          </a:lnRef>
-          <a:fillRef idx="3">
-            <a:schemeClr val="accent1"/>
-          </a:fillRef>
-          <a:effectRef idx="2">
-            <a:schemeClr val="accent1"/>
-          </a:effectRef>
-          <a:fontRef idx="minor">
-            <a:schemeClr val="lt1"/>
-          </a:fontRef>
-        </p:style>
-        <p:txBody>
-          <a:bodyPr rtlCol="0" anchor="ctr" wrap="square" lIns="137160" tIns="91440"/>
-          <a:lstStyle/>
-          <a:p>
-            <a:pPr algn="ctr">
-              <a:defRPr sz="1100">
-                <a:solidFill>
-                  <a:srgbClr val="1A1A1A"/>
-                </a:solidFill>
-                <a:latin typeface="Noto Sans TC"/>
-              </a:defRPr>
-            </a:pPr>
-            <a:r>
-              <a:t>今天的任務： 從一萬筆車險客戶資料裡面淘金</a:t>
-            </a:r>
-          </a:p>
-        </p:txBody>
-      </p:sp>
-      <p:sp>
-        <p:nvSpPr>
-          <p:cNvPr id="7" name="TextBox 6"/>
+              <a:t>保險版本： Netflix 猜錯頂多看一部爛片；保險公司猜錯，可能賠到脫褲</a:t>
+            </a:r>
+          </a:p>
+        </p:txBody>
+      </p:sp>
+      <p:sp>
+        <p:nvSpPr>
+          <p:cNvPr id="5" name="TextBox 4"/>
           <p:cNvSpPr txBox="1"/>
           <p:nvPr/>
         </p:nvSpPr>
@@ -11409,7 +12257,7 @@
               </a:defRPr>
             </a:pPr>
             <a:r>
-              <a:t>4 / 35</a:t>
+              <a:t>3 / 35</a:t>
             </a:r>
           </a:p>
         </p:txBody>
@@ -11471,7 +12319,7 @@
               </a:defRPr>
             </a:pPr>
             <a:r>
-              <a:t>Agenda</a:t>
+              <a:t>Mission</a:t>
             </a:r>
           </a:p>
         </p:txBody>
@@ -11507,21 +12355,57 @@
               </a:defRPr>
             </a:pPr>
             <a:r>
-              <a:t>今天的三堂課</a:t>
-            </a:r>
-          </a:p>
-        </p:txBody>
-      </p:sp>
-      <p:sp>
-        <p:nvSpPr>
-          <p:cNvPr id="4" name="Rounded Rectangle 3"/>
+              <a:t>今天的淘金任務</a:t>
+            </a:r>
+          </a:p>
+        </p:txBody>
+      </p:sp>
+      <p:sp>
+        <p:nvSpPr>
+          <p:cNvPr id="4" name="TextBox 3"/>
+          <p:cNvSpPr txBox="1"/>
+          <p:nvPr/>
+        </p:nvSpPr>
+        <p:spPr>
+          <a:xfrm>
+            <a:off x="731520" y="1554480"/>
+            <a:ext cx="10515600" cy="457200"/>
+          </a:xfrm>
+          <a:prstGeom prst="rect">
+            <a:avLst/>
+          </a:prstGeom>
+          <a:noFill/>
+        </p:spPr>
+        <p:txBody>
+          <a:bodyPr wrap="square">
+            <a:spAutoFit/>
+          </a:bodyPr>
+          <a:lstStyle/>
+          <a:p>
+            <a:pPr algn="l">
+              <a:defRPr sz="1600" b="0">
+                <a:solidFill>
+                  <a:srgbClr val="6B6B6B"/>
+                </a:solidFill>
+                <a:latin typeface="Noto Sans TC"/>
+              </a:defRPr>
+            </a:pPr>
+            <a:r>
+              <a:t>10,000 筆車險資料，找出誰會理賠</a:t>
+            </a:r>
+          </a:p>
+        </p:txBody>
+      </p:sp>
+      <p:sp>
+        <p:nvSpPr>
+          <p:cNvPr id="5" name="Rounded Rectangle 4"/>
           <p:cNvSpPr/>
           <p:nvPr/>
         </p:nvSpPr>
         <p:spPr>
           <a:xfrm>
-            <a:off x="731520" y="1554480"/>
-            <a:ext cx="9875520" cy="1097280"/>
+            <a:off x="731520" y="2057400"/>
+            <a:ext cx="3169919" cy="1097280"/>
           </a:xfrm>
           <a:prstGeom prst="roundRect">
             <a:avLst/>
@@ -11562,14 +12446,124 @@
               </a:defRPr>
             </a:pPr>
             <a:r>
-              <a:t>全程不寫程式碼 — 你不需要會寫程式，但你需要懂概念。AI 負責執行，你負責判斷</a:t>
-            </a:r>
-          </a:p>
-        </p:txBody>
-      </p:sp>
-      <p:sp>
-        <p:nvSpPr>
-          <p:cNvPr id="5" name="TextBox 4"/>
+              <a:t>10,000 個客戶，19 個欄位，1 個問題： 這個人會不會出險？</a:t>
+            </a:r>
+          </a:p>
+        </p:txBody>
+      </p:sp>
+      <p:sp>
+        <p:nvSpPr>
+          <p:cNvPr id="6" name="Rounded Rectangle 5"/>
+          <p:cNvSpPr/>
+          <p:nvPr/>
+        </p:nvSpPr>
+        <p:spPr>
+          <a:xfrm>
+            <a:off x="4084319" y="2057400"/>
+            <a:ext cx="3169919" cy="1097280"/>
+          </a:xfrm>
+          <a:prstGeom prst="roundRect">
+            <a:avLst/>
+          </a:prstGeom>
+          <a:solidFill>
+            <a:srgbClr val="FFF0E8"/>
+          </a:solidFill>
+          <a:ln w="12700">
+            <a:solidFill>
+              <a:srgbClr val="E0E0E0"/>
+            </a:solidFill>
+          </a:ln>
+        </p:spPr>
+        <p:style>
+          <a:lnRef idx="1">
+            <a:schemeClr val="accent1"/>
+          </a:lnRef>
+          <a:fillRef idx="3">
+            <a:schemeClr val="accent1"/>
+          </a:fillRef>
+          <a:effectRef idx="2">
+            <a:schemeClr val="accent1"/>
+          </a:effectRef>
+          <a:fontRef idx="minor">
+            <a:schemeClr val="lt1"/>
+          </a:fontRef>
+        </p:style>
+        <p:txBody>
+          <a:bodyPr rtlCol="0" anchor="ctr" wrap="square" lIns="137160" tIns="91440"/>
+          <a:lstStyle/>
+          <a:p>
+            <a:pPr algn="ctr">
+              <a:defRPr sz="1100">
+                <a:solidFill>
+                  <a:srgbClr val="1A1A1A"/>
+                </a:solidFill>
+                <a:latin typeface="Noto Sans TC"/>
+              </a:defRPr>
+            </a:pPr>
+            <a:r>
+              <a:t>你的工具： AI（不用寫程式）</a:t>
+            </a:r>
+          </a:p>
+        </p:txBody>
+      </p:sp>
+      <p:sp>
+        <p:nvSpPr>
+          <p:cNvPr id="7" name="Rounded Rectangle 6"/>
+          <p:cNvSpPr/>
+          <p:nvPr/>
+        </p:nvSpPr>
+        <p:spPr>
+          <a:xfrm>
+            <a:off x="7437118" y="2057400"/>
+            <a:ext cx="3169919" cy="1097280"/>
+          </a:xfrm>
+          <a:prstGeom prst="roundRect">
+            <a:avLst/>
+          </a:prstGeom>
+          <a:solidFill>
+            <a:srgbClr val="E8F5EC"/>
+          </a:solidFill>
+          <a:ln w="12700">
+            <a:solidFill>
+              <a:srgbClr val="E0E0E0"/>
+            </a:solidFill>
+          </a:ln>
+        </p:spPr>
+        <p:style>
+          <a:lnRef idx="1">
+            <a:schemeClr val="accent1"/>
+          </a:lnRef>
+          <a:fillRef idx="3">
+            <a:schemeClr val="accent1"/>
+          </a:fillRef>
+          <a:effectRef idx="2">
+            <a:schemeClr val="accent1"/>
+          </a:effectRef>
+          <a:fontRef idx="minor">
+            <a:schemeClr val="lt1"/>
+          </a:fontRef>
+        </p:style>
+        <p:txBody>
+          <a:bodyPr rtlCol="0" anchor="ctr" wrap="square" lIns="137160" tIns="91440"/>
+          <a:lstStyle/>
+          <a:p>
+            <a:pPr algn="ctr">
+              <a:defRPr sz="1100">
+                <a:solidFill>
+                  <a:srgbClr val="1A1A1A"/>
+                </a:solidFill>
+                <a:latin typeface="Noto Sans TC"/>
+              </a:defRPr>
+            </a:pPr>
+            <a:r>
+              <a:t>你的武器： 商業判斷力（AI 沒有的）</a:t>
+            </a:r>
+          </a:p>
+        </p:txBody>
+      </p:sp>
+      <p:sp>
+        <p:nvSpPr>
+          <p:cNvPr id="8" name="TextBox 7"/>
           <p:cNvSpPr txBox="1"/>
           <p:nvPr/>
         </p:nvSpPr>
@@ -11598,7 +12592,7 @@
               </a:defRPr>
             </a:pPr>
             <a:r>
-              <a:t>5 / 35</a:t>
+              <a:t>4 / 35</a:t>
             </a:r>
           </a:p>
         </p:txBody>
@@ -11660,7 +12654,7 @@
               </a:defRPr>
             </a:pPr>
             <a:r>
-              <a:t>Tool</a:t>
+              <a:t>Agenda</a:t>
             </a:r>
           </a:p>
         </p:txBody>
@@ -11696,7 +12690,7 @@
               </a:defRPr>
             </a:pPr>
             <a:r>
-              <a:t>Vibe Coding — 用中文寫程式</a:t>
+              <a:t>今天的三堂課</a:t>
             </a:r>
           </a:p>
         </p:txBody>
@@ -11710,13 +12704,13 @@
         <p:spPr>
           <a:xfrm>
             <a:off x="731520" y="1554480"/>
-            <a:ext cx="3169919" cy="1097280"/>
+            <a:ext cx="9875520" cy="1097280"/>
           </a:xfrm>
           <a:prstGeom prst="roundRect">
             <a:avLst/>
           </a:prstGeom>
           <a:solidFill>
-            <a:srgbClr val="FFFFFF"/>
+            <a:srgbClr val="FFF0E8"/>
           </a:solidFill>
           <a:ln w="12700">
             <a:solidFill>
@@ -11751,218 +12745,21 @@
               </a:defRPr>
             </a:pPr>
             <a:r>
-              <a:t>[免費]</a:t>
-            </a:r>
-            <a:br/>
-            <a:r>
-              <a:t>零成本</a:t>
-            </a:r>
-            <a:br/>
-            <a:r>
-              <a:t>Google 帳號登入即可 不用裝 Python、不用 Anaconda 用自然語言下指令，AI 幫你寫 Python</a:t>
-            </a:r>
-          </a:p>
-        </p:txBody>
-      </p:sp>
-      <p:sp>
-        <p:nvSpPr>
-          <p:cNvPr id="5" name="Rounded Rectangle 4"/>
-          <p:cNvSpPr/>
-          <p:nvPr/>
-        </p:nvSpPr>
-        <p:spPr>
-          <a:xfrm>
-            <a:off x="4084319" y="1554480"/>
-            <a:ext cx="3169919" cy="1097280"/>
-          </a:xfrm>
-          <a:prstGeom prst="roundRect">
-            <a:avLst/>
-          </a:prstGeom>
-          <a:solidFill>
-            <a:srgbClr val="FFFFFF"/>
-          </a:solidFill>
-          <a:ln w="12700">
-            <a:solidFill>
-              <a:srgbClr val="E0E0E0"/>
-            </a:solidFill>
-          </a:ln>
-        </p:spPr>
-        <p:style>
-          <a:lnRef idx="1">
-            <a:schemeClr val="accent1"/>
-          </a:lnRef>
-          <a:fillRef idx="3">
-            <a:schemeClr val="accent1"/>
-          </a:fillRef>
-          <a:effectRef idx="2">
-            <a:schemeClr val="accent1"/>
-          </a:effectRef>
-          <a:fontRef idx="minor">
-            <a:schemeClr val="lt1"/>
-          </a:fontRef>
-        </p:style>
-        <p:txBody>
-          <a:bodyPr rtlCol="0" anchor="ctr" wrap="square" lIns="137160" tIns="91440"/>
-          <a:lstStyle/>
-          <a:p>
-            <a:pPr algn="ctr">
-              <a:defRPr sz="1100">
-                <a:solidFill>
-                  <a:srgbClr val="1A1A1A"/>
-                </a:solidFill>
-                <a:latin typeface="Noto Sans TC"/>
-              </a:defRPr>
-            </a:pPr>
-            <a:r>
-              <a:t>[免費]</a:t>
-            </a:r>
-            <a:br/>
-            <a:r>
-              <a:t>零成本</a:t>
-            </a:r>
-            <a:br/>
-            <a:r>
-              <a:t>Google 帳號登入即可</a:t>
-            </a:r>
-          </a:p>
-        </p:txBody>
-      </p:sp>
-      <p:sp>
-        <p:nvSpPr>
-          <p:cNvPr id="6" name="Rounded Rectangle 5"/>
-          <p:cNvSpPr/>
-          <p:nvPr/>
-        </p:nvSpPr>
-        <p:spPr>
-          <a:xfrm>
-            <a:off x="7437118" y="1554480"/>
-            <a:ext cx="3169919" cy="1097280"/>
-          </a:xfrm>
-          <a:prstGeom prst="roundRect">
-            <a:avLst/>
-          </a:prstGeom>
-          <a:solidFill>
-            <a:srgbClr val="FFFFFF"/>
-          </a:solidFill>
-          <a:ln w="12700">
-            <a:solidFill>
-              <a:srgbClr val="E0E0E0"/>
-            </a:solidFill>
-          </a:ln>
-        </p:spPr>
-        <p:style>
-          <a:lnRef idx="1">
-            <a:schemeClr val="accent1"/>
-          </a:lnRef>
-          <a:fillRef idx="3">
-            <a:schemeClr val="accent1"/>
-          </a:fillRef>
-          <a:effectRef idx="2">
-            <a:schemeClr val="accent1"/>
-          </a:effectRef>
-          <a:fontRef idx="minor">
-            <a:schemeClr val="lt1"/>
-          </a:fontRef>
-        </p:style>
-        <p:txBody>
-          <a:bodyPr rtlCol="0" anchor="ctr" wrap="square" lIns="137160" tIns="91440"/>
-          <a:lstStyle/>
-          <a:p>
-            <a:pPr algn="ctr">
-              <a:defRPr sz="1100">
-                <a:solidFill>
-                  <a:srgbClr val="1A1A1A"/>
-                </a:solidFill>
-                <a:latin typeface="Noto Sans TC"/>
-              </a:defRPr>
-            </a:pPr>
-            <a:r>
-              <a:t>[免安裝]</a:t>
-            </a:r>
-            <a:br/>
-            <a:r>
-              <a:t>瀏覽器開啟</a:t>
-            </a:r>
-            <a:br/>
-            <a:r>
-              <a:t>不用裝 Python、不用 Anaconda</a:t>
-            </a:r>
-          </a:p>
-        </p:txBody>
-      </p:sp>
-      <p:sp>
-        <p:nvSpPr>
-          <p:cNvPr id="7" name="Rounded Rectangle 6"/>
-          <p:cNvSpPr/>
-          <p:nvPr/>
-        </p:nvSpPr>
-        <p:spPr>
-          <a:xfrm>
-            <a:off x="731520" y="2788920"/>
-            <a:ext cx="3169919" cy="1097280"/>
-          </a:xfrm>
-          <a:prstGeom prst="roundRect">
-            <a:avLst/>
-          </a:prstGeom>
-          <a:solidFill>
-            <a:srgbClr val="FFFFFF"/>
-          </a:solidFill>
-          <a:ln w="12700">
-            <a:solidFill>
-              <a:srgbClr val="E0E0E0"/>
-            </a:solidFill>
-          </a:ln>
-        </p:spPr>
-        <p:style>
-          <a:lnRef idx="1">
-            <a:schemeClr val="accent1"/>
-          </a:lnRef>
-          <a:fillRef idx="3">
-            <a:schemeClr val="accent1"/>
-          </a:fillRef>
-          <a:effectRef idx="2">
-            <a:schemeClr val="accent1"/>
-          </a:effectRef>
-          <a:fontRef idx="minor">
-            <a:schemeClr val="lt1"/>
-          </a:fontRef>
-        </p:style>
-        <p:txBody>
-          <a:bodyPr rtlCol="0" anchor="ctr" wrap="square" lIns="137160" tIns="91440"/>
-          <a:lstStyle/>
-          <a:p>
-            <a:pPr algn="ctr">
-              <a:defRPr sz="1100">
-                <a:solidFill>
-                  <a:srgbClr val="1A1A1A"/>
-                </a:solidFill>
-                <a:latin typeface="Noto Sans TC"/>
-              </a:defRPr>
-            </a:pPr>
-            <a:r>
-              <a:t>[中文]</a:t>
-            </a:r>
-            <a:br/>
-            <a:r>
-              <a:t>對話式操作</a:t>
-            </a:r>
-            <a:br/>
-            <a:r>
-              <a:t>用自然語言下指令，AI 幫你寫 Python</a:t>
-            </a:r>
-          </a:p>
-        </p:txBody>
-      </p:sp>
-      <p:sp>
-        <p:nvSpPr>
-          <p:cNvPr id="8" name="TextBox 7"/>
+              <a:t>全程不寫程式碼 — 你不需要會寫程式，但你需要懂概念。AI 負責執行，你負責判斷</a:t>
+            </a:r>
+          </a:p>
+        </p:txBody>
+      </p:sp>
+      <p:sp>
+        <p:nvSpPr>
+          <p:cNvPr id="5" name="TextBox 4"/>
           <p:cNvSpPr txBox="1"/>
           <p:nvPr/>
         </p:nvSpPr>
         <p:spPr>
           <a:xfrm>
-            <a:off x="731520" y="4114800"/>
-            <a:ext cx="10515600" cy="457200"/>
+            <a:off x="10058400" y="6217920"/>
+            <a:ext cx="1828800" cy="365760"/>
           </a:xfrm>
           <a:prstGeom prst="rect">
             <a:avLst/>
@@ -11975,42 +12772,6 @@
           </a:bodyPr>
           <a:lstStyle/>
           <a:p>
-            <a:pPr algn="l">
-              <a:defRPr sz="1300" b="0">
-                <a:solidFill>
-                  <a:srgbClr val="D4480B"/>
-                </a:solidFill>
-                <a:latin typeface="Noto Sans TC"/>
-              </a:defRPr>
-            </a:pPr>
-            <a:r>
-              <a:t>「你只要會打中文，就能做資料分析 — Google Antigravity」</a:t>
-            </a:r>
-          </a:p>
-        </p:txBody>
-      </p:sp>
-      <p:sp>
-        <p:nvSpPr>
-          <p:cNvPr id="9" name="TextBox 8"/>
-          <p:cNvSpPr txBox="1"/>
-          <p:nvPr/>
-        </p:nvSpPr>
-        <p:spPr>
-          <a:xfrm>
-            <a:off x="10058400" y="6217920"/>
-            <a:ext cx="1828800" cy="365760"/>
-          </a:xfrm>
-          <a:prstGeom prst="rect">
-            <a:avLst/>
-          </a:prstGeom>
-          <a:noFill/>
-        </p:spPr>
-        <p:txBody>
-          <a:bodyPr wrap="square">
-            <a:spAutoFit/>
-          </a:bodyPr>
-          <a:lstStyle/>
-          <a:p>
             <a:pPr algn="r">
               <a:defRPr sz="900" b="0">
                 <a:solidFill>
@@ -12020,7 +12781,7 @@
               </a:defRPr>
             </a:pPr>
             <a:r>
-              <a:t>6 / 35</a:t>
+              <a:t>5 / 35</a:t>
             </a:r>
           </a:p>
         </p:txBody>
@@ -12034,6 +12795,176 @@
 </file>
 
 <file path=ppt/slides/slide7.xml><?xml version="1.0" encoding="utf-8"?>
+<p:sld xmlns:a="http://schemas.openxmlformats.org/drawingml/2006/main" xmlns:p="http://schemas.openxmlformats.org/presentationml/2006/main" xmlns:r="http://schemas.openxmlformats.org/officeDocument/2006/relationships">
+  <p:cSld>
+    <p:bg>
+      <p:bgPr>
+        <a:solidFill>
+          <a:srgbClr val="1A1A1A"/>
+        </a:solidFill>
+        <a:effectLst/>
+      </p:bgPr>
+    </p:bg>
+    <p:spTree>
+      <p:nvGrpSpPr>
+        <p:cNvPr id="1" name=""/>
+        <p:cNvGrpSpPr/>
+        <p:nvPr/>
+      </p:nvGrpSpPr>
+      <p:grpSpPr/>
+      <p:sp>
+        <p:nvSpPr>
+          <p:cNvPr id="2" name="TextBox 1"/>
+          <p:cNvSpPr txBox="1"/>
+          <p:nvPr/>
+        </p:nvSpPr>
+        <p:spPr>
+          <a:xfrm>
+            <a:off x="914400" y="1828800"/>
+            <a:ext cx="10058400" cy="457200"/>
+          </a:xfrm>
+          <a:prstGeom prst="rect">
+            <a:avLst/>
+          </a:prstGeom>
+          <a:noFill/>
+        </p:spPr>
+        <p:txBody>
+          <a:bodyPr wrap="square">
+            <a:spAutoFit/>
+          </a:bodyPr>
+          <a:lstStyle/>
+          <a:p>
+            <a:pPr algn="ctr">
+              <a:defRPr sz="1200" b="1">
+                <a:solidFill>
+                  <a:srgbClr val="D4480B"/>
+                </a:solidFill>
+                <a:latin typeface="Noto Sans TC"/>
+              </a:defRPr>
+            </a:pPr>
+            <a:r>
+              <a:t>Part 01</a:t>
+            </a:r>
+          </a:p>
+        </p:txBody>
+      </p:sp>
+      <p:sp>
+        <p:nvSpPr>
+          <p:cNvPr id="3" name="TextBox 2"/>
+          <p:cNvSpPr txBox="1"/>
+          <p:nvPr/>
+        </p:nvSpPr>
+        <p:spPr>
+          <a:xfrm>
+            <a:off x="914400" y="2560320"/>
+            <a:ext cx="10058400" cy="1371600"/>
+          </a:xfrm>
+          <a:prstGeom prst="rect">
+            <a:avLst/>
+          </a:prstGeom>
+          <a:noFill/>
+        </p:spPr>
+        <p:txBody>
+          <a:bodyPr wrap="square">
+            <a:spAutoFit/>
+          </a:bodyPr>
+          <a:lstStyle/>
+          <a:p>
+            <a:pPr algn="ctr">
+              <a:defRPr sz="4800" b="1">
+                <a:solidFill>
+                  <a:srgbClr val="FFFFFF"/>
+                </a:solidFill>
+                <a:latin typeface="Noto Sans TC"/>
+              </a:defRPr>
+            </a:pPr>
+            <a:r>
+              <a:t>EDA</a:t>
+            </a:r>
+          </a:p>
+        </p:txBody>
+      </p:sp>
+      <p:sp>
+        <p:nvSpPr>
+          <p:cNvPr id="4" name="TextBox 3"/>
+          <p:cNvSpPr txBox="1"/>
+          <p:nvPr/>
+        </p:nvSpPr>
+        <p:spPr>
+          <a:xfrm>
+            <a:off x="914400" y="3931920"/>
+            <a:ext cx="10058400" cy="731520"/>
+          </a:xfrm>
+          <a:prstGeom prst="rect">
+            <a:avLst/>
+          </a:prstGeom>
+          <a:noFill/>
+        </p:spPr>
+        <p:txBody>
+          <a:bodyPr wrap="square">
+            <a:spAutoFit/>
+          </a:bodyPr>
+          <a:lstStyle/>
+          <a:p>
+            <a:pPr algn="ctr">
+              <a:defRPr sz="1800" b="0">
+                <a:solidFill>
+                  <a:srgbClr val="999999"/>
+                </a:solidFill>
+                <a:latin typeface="Noto Sans TC"/>
+              </a:defRPr>
+            </a:pPr>
+            <a:r>
+              <a:t>不認識資料就建模，跟不看地圖就開車一樣</a:t>
+            </a:r>
+          </a:p>
+        </p:txBody>
+      </p:sp>
+      <p:sp>
+        <p:nvSpPr>
+          <p:cNvPr id="5" name="TextBox 4"/>
+          <p:cNvSpPr txBox="1"/>
+          <p:nvPr/>
+        </p:nvSpPr>
+        <p:spPr>
+          <a:xfrm>
+            <a:off x="10058400" y="6217920"/>
+            <a:ext cx="1828800" cy="365760"/>
+          </a:xfrm>
+          <a:prstGeom prst="rect">
+            <a:avLst/>
+          </a:prstGeom>
+          <a:noFill/>
+        </p:spPr>
+        <p:txBody>
+          <a:bodyPr wrap="square">
+            <a:spAutoFit/>
+          </a:bodyPr>
+          <a:lstStyle/>
+          <a:p>
+            <a:pPr algn="r">
+              <a:defRPr sz="900" b="0">
+                <a:solidFill>
+                  <a:srgbClr val="666666"/>
+                </a:solidFill>
+                <a:latin typeface="Noto Sans TC"/>
+              </a:defRPr>
+            </a:pPr>
+            <a:r>
+              <a:t>8 / 35</a:t>
+            </a:r>
+          </a:p>
+        </p:txBody>
+      </p:sp>
+    </p:spTree>
+  </p:cSld>
+  <p:clrMapOvr>
+    <a:masterClrMapping/>
+  </p:clrMapOvr>
+</p:sld>
+</file>
+
+<file path=ppt/slides/slide8.xml><?xml version="1.0" encoding="utf-8"?>
 <p:sld xmlns:a="http://schemas.openxmlformats.org/drawingml/2006/main" xmlns:p="http://schemas.openxmlformats.org/presentationml/2006/main" xmlns:r="http://schemas.openxmlformats.org/officeDocument/2006/relationships">
   <p:cSld>
     <p:bg>
@@ -12082,7 +13013,7 @@
               </a:defRPr>
             </a:pPr>
             <a:r>
-              <a:t>Warning</a:t>
+              <a:t>Pitfalls</a:t>
             </a:r>
           </a:p>
         </p:txBody>
@@ -12118,7 +13049,7 @@
               </a:defRPr>
             </a:pPr>
             <a:r>
-              <a:t>AI 驗證三原則</a:t>
+              <a:t>EDA 三大陷阱</a:t>
             </a:r>
           </a:p>
         </p:txBody>
@@ -12138,7 +13069,7 @@
             <a:avLst/>
           </a:prstGeom>
           <a:solidFill>
-            <a:srgbClr val="FFFFFF"/>
+            <a:srgbClr val="FFF0E8"/>
           </a:solidFill>
           <a:ln w="12700">
             <a:solidFill>
@@ -12173,15 +13104,11 @@
               </a:defRPr>
             </a:pPr>
             <a:r>
-              <a:t>[01]</a:t>
+              <a:t>1. 只看平均數不看分佈</a:t>
             </a:r>
             <a:br/>
             <a:r>
-              <a:t>AI 會犯錯</a:t>
-            </a:r>
-            <a:br/>
-            <a:r>
-              <a:t>程式碼可能有 bug，統計解讀可能講得很專業但數字是亂掰的 挑一個數字用計算機算、檢查軸標籤、回想統計原理 你可以用 AI 加速，但你要能解釋每一個結果。 不懂就不算你的分析</a:t>
+              <a:t>你跟馬雲的平均資產幾百億，但你口袋只有兩百塊</a:t>
             </a:r>
           </a:p>
         </p:txBody>
@@ -12201,7 +13128,7 @@
             <a:avLst/>
           </a:prstGeom>
           <a:solidFill>
-            <a:srgbClr val="FFFFFF"/>
+            <a:srgbClr val="FFF0E8"/>
           </a:solidFill>
           <a:ln w="12700">
             <a:solidFill>
@@ -12236,15 +13163,11 @@
               </a:defRPr>
             </a:pPr>
             <a:r>
-              <a:t>[01]</a:t>
+              <a:t>2. 忽略缺失值</a:t>
             </a:r>
             <a:br/>
             <a:r>
-              <a:t>AI 會犯錯</a:t>
-            </a:r>
-            <a:br/>
-            <a:r>
-              <a:t>程式碼可能有 bug，統計解讀可能講得很專業但數字是亂掰的</a:t>
+              <a:t>模型不報錯，但結果是錯的</a:t>
             </a:r>
           </a:p>
         </p:txBody>
@@ -12264,7 +13187,7 @@
             <a:avLst/>
           </a:prstGeom>
           <a:solidFill>
-            <a:srgbClr val="FFFFFF"/>
+            <a:srgbClr val="FFF0E8"/>
           </a:solidFill>
           <a:ln w="12700">
             <a:solidFill>
@@ -12299,85 +13222,18 @@
               </a:defRPr>
             </a:pPr>
             <a:r>
-              <a:t>[02]</a:t>
+              <a:t>3. 相關 ≠ 因果</a:t>
             </a:r>
             <a:br/>
             <a:r>
-              <a:t>怎麼驗證</a:t>
-            </a:r>
-            <a:br/>
-            <a:r>
-              <a:t>挑一個數字用計算機算、檢查軸標籤、回想統計原理</a:t>
-            </a:r>
-          </a:p>
-        </p:txBody>
-      </p:sp>
-      <p:sp>
-        <p:nvSpPr>
-          <p:cNvPr id="7" name="Rounded Rectangle 6"/>
-          <p:cNvSpPr/>
-          <p:nvPr/>
-        </p:nvSpPr>
-        <p:spPr>
-          <a:xfrm>
-            <a:off x="731520" y="2788920"/>
-            <a:ext cx="3169919" cy="1097280"/>
-          </a:xfrm>
-          <a:prstGeom prst="roundRect">
-            <a:avLst/>
-          </a:prstGeom>
-          <a:solidFill>
-            <a:srgbClr val="FFFFFF"/>
-          </a:solidFill>
-          <a:ln w="12700">
-            <a:solidFill>
-              <a:srgbClr val="E0E0E0"/>
-            </a:solidFill>
-          </a:ln>
-        </p:spPr>
-        <p:style>
-          <a:lnRef idx="1">
-            <a:schemeClr val="accent1"/>
-          </a:lnRef>
-          <a:fillRef idx="3">
-            <a:schemeClr val="accent1"/>
-          </a:fillRef>
-          <a:effectRef idx="2">
-            <a:schemeClr val="accent1"/>
-          </a:effectRef>
-          <a:fontRef idx="minor">
-            <a:schemeClr val="lt1"/>
-          </a:fontRef>
-        </p:style>
-        <p:txBody>
-          <a:bodyPr rtlCol="0" anchor="ctr" wrap="square" lIns="137160" tIns="91440"/>
-          <a:lstStyle/>
-          <a:p>
-            <a:pPr algn="ctr">
-              <a:defRPr sz="1100">
-                <a:solidFill>
-                  <a:srgbClr val="1A1A1A"/>
-                </a:solidFill>
-                <a:latin typeface="Noto Sans TC"/>
-              </a:defRPr>
-            </a:pPr>
-            <a:r>
-              <a:t>[03]</a:t>
-            </a:r>
-            <a:br/>
-            <a:r>
-              <a:t>學術誠信</a:t>
-            </a:r>
-            <a:br/>
-            <a:r>
-              <a:t>你可以用 AI 加速，但你要能解釋每一個結果。 不懂就不算你的分析</a:t>
-            </a:r>
-          </a:p>
-        </p:txBody>
-      </p:sp>
-      <p:sp>
-        <p:nvSpPr>
-          <p:cNvPr id="8" name="TextBox 7"/>
+              <a:t>冰淇淋 ↑ 溺水 ↑ —— 兇手是夏天</a:t>
+            </a:r>
+          </a:p>
+        </p:txBody>
+      </p:sp>
+      <p:sp>
+        <p:nvSpPr>
+          <p:cNvPr id="7" name="TextBox 6"/>
           <p:cNvSpPr txBox="1"/>
           <p:nvPr/>
         </p:nvSpPr>
@@ -12406,177 +13262,7 @@
               </a:defRPr>
             </a:pPr>
             <a:r>
-              <a:t>7 / 35</a:t>
-            </a:r>
-          </a:p>
-        </p:txBody>
-      </p:sp>
-    </p:spTree>
-  </p:cSld>
-  <p:clrMapOvr>
-    <a:masterClrMapping/>
-  </p:clrMapOvr>
-</p:sld>
-</file>
-
-<file path=ppt/slides/slide8.xml><?xml version="1.0" encoding="utf-8"?>
-<p:sld xmlns:a="http://schemas.openxmlformats.org/drawingml/2006/main" xmlns:p="http://schemas.openxmlformats.org/presentationml/2006/main" xmlns:r="http://schemas.openxmlformats.org/officeDocument/2006/relationships">
-  <p:cSld>
-    <p:bg>
-      <p:bgPr>
-        <a:solidFill>
-          <a:srgbClr val="1A1A1A"/>
-        </a:solidFill>
-        <a:effectLst/>
-      </p:bgPr>
-    </p:bg>
-    <p:spTree>
-      <p:nvGrpSpPr>
-        <p:cNvPr id="1" name=""/>
-        <p:cNvGrpSpPr/>
-        <p:nvPr/>
-      </p:nvGrpSpPr>
-      <p:grpSpPr/>
-      <p:sp>
-        <p:nvSpPr>
-          <p:cNvPr id="2" name="TextBox 1"/>
-          <p:cNvSpPr txBox="1"/>
-          <p:nvPr/>
-        </p:nvSpPr>
-        <p:spPr>
-          <a:xfrm>
-            <a:off x="914400" y="1828800"/>
-            <a:ext cx="10058400" cy="457200"/>
-          </a:xfrm>
-          <a:prstGeom prst="rect">
-            <a:avLst/>
-          </a:prstGeom>
-          <a:noFill/>
-        </p:spPr>
-        <p:txBody>
-          <a:bodyPr wrap="square">
-            <a:spAutoFit/>
-          </a:bodyPr>
-          <a:lstStyle/>
-          <a:p>
-            <a:pPr algn="ctr">
-              <a:defRPr sz="1200" b="1">
-                <a:solidFill>
-                  <a:srgbClr val="D4480B"/>
-                </a:solidFill>
-                <a:latin typeface="Noto Sans TC"/>
-              </a:defRPr>
-            </a:pPr>
-            <a:r>
-              <a:t>Part 01</a:t>
-            </a:r>
-          </a:p>
-        </p:txBody>
-      </p:sp>
-      <p:sp>
-        <p:nvSpPr>
-          <p:cNvPr id="3" name="TextBox 2"/>
-          <p:cNvSpPr txBox="1"/>
-          <p:nvPr/>
-        </p:nvSpPr>
-        <p:spPr>
-          <a:xfrm>
-            <a:off x="914400" y="2560320"/>
-            <a:ext cx="10058400" cy="1371600"/>
-          </a:xfrm>
-          <a:prstGeom prst="rect">
-            <a:avLst/>
-          </a:prstGeom>
-          <a:noFill/>
-        </p:spPr>
-        <p:txBody>
-          <a:bodyPr wrap="square">
-            <a:spAutoFit/>
-          </a:bodyPr>
-          <a:lstStyle/>
-          <a:p>
-            <a:pPr algn="ctr">
-              <a:defRPr sz="4800" b="1">
-                <a:solidFill>
-                  <a:srgbClr val="FFFFFF"/>
-                </a:solidFill>
-                <a:latin typeface="Noto Sans TC"/>
-              </a:defRPr>
-            </a:pPr>
-            <a:r>
-              <a:t>EDA</a:t>
-            </a:r>
-          </a:p>
-        </p:txBody>
-      </p:sp>
-      <p:sp>
-        <p:nvSpPr>
-          <p:cNvPr id="4" name="TextBox 3"/>
-          <p:cNvSpPr txBox="1"/>
-          <p:nvPr/>
-        </p:nvSpPr>
-        <p:spPr>
-          <a:xfrm>
-            <a:off x="914400" y="3931920"/>
-            <a:ext cx="10058400" cy="731520"/>
-          </a:xfrm>
-          <a:prstGeom prst="rect">
-            <a:avLst/>
-          </a:prstGeom>
-          <a:noFill/>
-        </p:spPr>
-        <p:txBody>
-          <a:bodyPr wrap="square">
-            <a:spAutoFit/>
-          </a:bodyPr>
-          <a:lstStyle/>
-          <a:p>
-            <a:pPr algn="ctr">
-              <a:defRPr sz="1800" b="0">
-                <a:solidFill>
-                  <a:srgbClr val="999999"/>
-                </a:solidFill>
-                <a:latin typeface="Noto Sans TC"/>
-              </a:defRPr>
-            </a:pPr>
-            <a:r>
-              <a:t>在建模前先認識你的資料</a:t>
-            </a:r>
-          </a:p>
-        </p:txBody>
-      </p:sp>
-      <p:sp>
-        <p:nvSpPr>
-          <p:cNvPr id="5" name="TextBox 4"/>
-          <p:cNvSpPr txBox="1"/>
-          <p:nvPr/>
-        </p:nvSpPr>
-        <p:spPr>
-          <a:xfrm>
-            <a:off x="10058400" y="6217920"/>
-            <a:ext cx="1828800" cy="365760"/>
-          </a:xfrm>
-          <a:prstGeom prst="rect">
-            <a:avLst/>
-          </a:prstGeom>
-          <a:noFill/>
-        </p:spPr>
-        <p:txBody>
-          <a:bodyPr wrap="square">
-            <a:spAutoFit/>
-          </a:bodyPr>
-          <a:lstStyle/>
-          <a:p>
-            <a:pPr algn="r">
-              <a:defRPr sz="900" b="0">
-                <a:solidFill>
-                  <a:srgbClr val="666666"/>
-                </a:solidFill>
-                <a:latin typeface="Noto Sans TC"/>
-              </a:defRPr>
-            </a:pPr>
-            <a:r>
-              <a:t>8 / 35</a:t>
+              <a:t>9 / 35</a:t>
             </a:r>
           </a:p>
         </p:txBody>
@@ -12638,7 +13324,7 @@
               </a:defRPr>
             </a:pPr>
             <a:r>
-              <a:t>Pitfalls</a:t>
+              <a:t>Tool</a:t>
             </a:r>
           </a:p>
         </p:txBody>
@@ -12674,7 +13360,7 @@
               </a:defRPr>
             </a:pPr>
             <a:r>
-              <a:t>EDA 三大陷阱</a:t>
+              <a:t>Vibe Coding — 用中文寫程式</a:t>
             </a:r>
           </a:p>
         </p:txBody>
@@ -12694,7 +13380,7 @@
             <a:avLst/>
           </a:prstGeom>
           <a:solidFill>
-            <a:srgbClr val="FFF0E8"/>
+            <a:srgbClr val="FFFFFF"/>
           </a:solidFill>
           <a:ln w="12700">
             <a:solidFill>
@@ -12729,11 +13415,15 @@
               </a:defRPr>
             </a:pPr>
             <a:r>
-              <a:t>1. 只看平均數不看分佈</a:t>
+              <a:t>[免費]</a:t>
             </a:r>
             <a:br/>
             <a:r>
-              <a:t>90% 的人理賠不到 1 萬，1% 的人理賠超過 500 萬，「平均 10 萬」是被拉上去的。 你跟馬雲的平均資產幾百億，但你口袋只有兩百塊</a:t>
+              <a:t>零成本</a:t>
+            </a:r>
+            <a:br/>
+            <a:r>
+              <a:t>Google 帳號登入即可 不用裝 Python、不用 Anaconda 用自然語言下指令，AI 幫你寫 Python</a:t>
             </a:r>
           </a:p>
         </p:txBody>
@@ -12753,7 +13443,7 @@
             <a:avLst/>
           </a:prstGeom>
           <a:solidFill>
-            <a:srgbClr val="FFF0E8"/>
+            <a:srgbClr val="FFFFFF"/>
           </a:solidFill>
           <a:ln w="12700">
             <a:solidFill>
@@ -12788,11 +13478,15 @@
               </a:defRPr>
             </a:pPr>
             <a:r>
-              <a:t>2. 忽略缺失值</a:t>
+              <a:t>[免費]</a:t>
             </a:r>
             <a:br/>
             <a:r>
-              <a:t>真實資料常有客戶漏填 — 不處理就直接建模？模型可能不報錯但結果是錯的， 你會帶著錯誤結論去跟老闆報告</a:t>
+              <a:t>零成本</a:t>
+            </a:r>
+            <a:br/>
+            <a:r>
+              <a:t>Google 帳號登入即可</a:t>
             </a:r>
           </a:p>
         </p:txBody>
@@ -12812,7 +13506,7 @@
             <a:avLst/>
           </a:prstGeom>
           <a:solidFill>
-            <a:srgbClr val="FFF0E8"/>
+            <a:srgbClr val="FFFFFF"/>
           </a:solidFill>
           <a:ln w="12700">
             <a:solidFill>
@@ -12847,25 +13541,92 @@
               </a:defRPr>
             </a:pPr>
             <a:r>
-              <a:t>3. 相關 ≠ 因果</a:t>
+              <a:t>[免安裝]</a:t>
             </a:r>
             <a:br/>
             <a:r>
-              <a:t>冰淇淋銷量 ↑ 溺水人數 ↑ — 不是冰淇淋害人溺水，是夏天。 看到兩個變數有關聯，不代表一個造成另一個</a:t>
-            </a:r>
-          </a:p>
-        </p:txBody>
-      </p:sp>
-      <p:sp>
-        <p:nvSpPr>
-          <p:cNvPr id="7" name="TextBox 6"/>
+              <a:t>瀏覽器開啟</a:t>
+            </a:r>
+            <a:br/>
+            <a:r>
+              <a:t>不用裝 Python、不用 Anaconda</a:t>
+            </a:r>
+          </a:p>
+        </p:txBody>
+      </p:sp>
+      <p:sp>
+        <p:nvSpPr>
+          <p:cNvPr id="7" name="Rounded Rectangle 6"/>
+          <p:cNvSpPr/>
+          <p:nvPr/>
+        </p:nvSpPr>
+        <p:spPr>
+          <a:xfrm>
+            <a:off x="731520" y="2788920"/>
+            <a:ext cx="3169919" cy="1097280"/>
+          </a:xfrm>
+          <a:prstGeom prst="roundRect">
+            <a:avLst/>
+          </a:prstGeom>
+          <a:solidFill>
+            <a:srgbClr val="FFFFFF"/>
+          </a:solidFill>
+          <a:ln w="12700">
+            <a:solidFill>
+              <a:srgbClr val="E0E0E0"/>
+            </a:solidFill>
+          </a:ln>
+        </p:spPr>
+        <p:style>
+          <a:lnRef idx="1">
+            <a:schemeClr val="accent1"/>
+          </a:lnRef>
+          <a:fillRef idx="3">
+            <a:schemeClr val="accent1"/>
+          </a:fillRef>
+          <a:effectRef idx="2">
+            <a:schemeClr val="accent1"/>
+          </a:effectRef>
+          <a:fontRef idx="minor">
+            <a:schemeClr val="lt1"/>
+          </a:fontRef>
+        </p:style>
+        <p:txBody>
+          <a:bodyPr rtlCol="0" anchor="ctr" wrap="square" lIns="137160" tIns="91440"/>
+          <a:lstStyle/>
+          <a:p>
+            <a:pPr algn="ctr">
+              <a:defRPr sz="1100">
+                <a:solidFill>
+                  <a:srgbClr val="1A1A1A"/>
+                </a:solidFill>
+                <a:latin typeface="Noto Sans TC"/>
+              </a:defRPr>
+            </a:pPr>
+            <a:r>
+              <a:t>[中文]</a:t>
+            </a:r>
+            <a:br/>
+            <a:r>
+              <a:t>對話式操作</a:t>
+            </a:r>
+            <a:br/>
+            <a:r>
+              <a:t>用自然語言下指令，AI 幫你寫 Python</a:t>
+            </a:r>
+          </a:p>
+        </p:txBody>
+      </p:sp>
+      <p:sp>
+        <p:nvSpPr>
+          <p:cNvPr id="8" name="TextBox 7"/>
           <p:cNvSpPr txBox="1"/>
           <p:nvPr/>
         </p:nvSpPr>
         <p:spPr>
           <a:xfrm>
-            <a:off x="10058400" y="6217920"/>
-            <a:ext cx="1828800" cy="365760"/>
+            <a:off x="731520" y="4114800"/>
+            <a:ext cx="10515600" cy="457200"/>
           </a:xfrm>
           <a:prstGeom prst="rect">
             <a:avLst/>
@@ -12878,6 +13639,42 @@
           </a:bodyPr>
           <a:lstStyle/>
           <a:p>
+            <a:pPr algn="l">
+              <a:defRPr sz="1300" b="0">
+                <a:solidFill>
+                  <a:srgbClr val="D4480B"/>
+                </a:solidFill>
+                <a:latin typeface="Noto Sans TC"/>
+              </a:defRPr>
+            </a:pPr>
+            <a:r>
+              <a:t>「你只要會打中文，就能做資料分析 — Google Antigravity」</a:t>
+            </a:r>
+          </a:p>
+        </p:txBody>
+      </p:sp>
+      <p:sp>
+        <p:nvSpPr>
+          <p:cNvPr id="9" name="TextBox 8"/>
+          <p:cNvSpPr txBox="1"/>
+          <p:nvPr/>
+        </p:nvSpPr>
+        <p:spPr>
+          <a:xfrm>
+            <a:off x="10058400" y="6217920"/>
+            <a:ext cx="1828800" cy="365760"/>
+          </a:xfrm>
+          <a:prstGeom prst="rect">
+            <a:avLst/>
+          </a:prstGeom>
+          <a:noFill/>
+        </p:spPr>
+        <p:txBody>
+          <a:bodyPr wrap="square">
+            <a:spAutoFit/>
+          </a:bodyPr>
+          <a:lstStyle/>
+          <a:p>
             <a:pPr algn="r">
               <a:defRPr sz="900" b="0">
                 <a:solidFill>
@@ -12887,7 +13684,7 @@
               </a:defRPr>
             </a:pPr>
             <a:r>
-              <a:t>9 / 35</a:t>
+              <a:t>6 / 35</a:t>
             </a:r>
           </a:p>
         </p:txBody>
